--- a/deck/incident-agent-ablation_5min.pptx
+++ b/deck/incident-agent-ablation_5min.pptx
@@ -6,14 +6,15 @@
   </p:sldMasterIdLst>
   <p:sldIdLst>
     <p:sldId id="256" r:id="rId2"/>
-    <p:sldId id="259" r:id="rId5"/>
     <p:sldId id="257" r:id="rId3"/>
-    <p:sldId id="264" r:id="rId10"/>
-    <p:sldId id="269" r:id="rId15"/>
+    <p:sldId id="260" r:id="rId6"/>
+    <p:sldId id="258" r:id="rId4"/>
+    <p:sldId id="265" r:id="rId11"/>
     <p:sldId id="270" r:id="rId16"/>
+    <p:sldId id="271" r:id="rId17"/>
   </p:sldIdLst>
   <p:notesMasterIdLst>
-    <p:notesMasterId r:id="rId18"/>
+    <p:notesMasterId r:id="rId19"/>
   </p:notesMasterIdLst>
   <p:sldSz cx="12192000" cy="6858000"/>
   <p:notesSz cx="6858000" cy="12192000"/>
@@ -112,46 +113,47 @@
   <p:extLst>
     <p:ext uri="{521415D9-36F7-43E2-AB2F-B90AF26B5E84}">
       <p14:sectionLst xmlns:p14="http://schemas.microsoft.com/office/powerpoint/2010/main">
-        <p14:section name="표지" id="{c17eeb18-39e9-ed30-3763-be3d2fe43b50}">
+        <p14:section name="표지" id="{0ca7d6db-fdb8-bcd4-f044-2dfe218f7e7d}">
           <p14:sldIdLst>
             <p14:sldId id="256"/>
           </p14:sldIdLst>
         </p14:section>
-        <p14:section name="요약" id="{14e40750-734e-44a0-c3b3-2696b7f4f0c1}">
+        <p14:section name="요약" id="{9adafa3c-f3cd-3044-e1dd-aaa6ff5db02d}">
           <p14:sldIdLst>
             <p14:sldId id="257"/>
+            <p14:sldId id="258"/>
           </p14:sldIdLst>
         </p14:section>
-        <p14:section name="문제" id="{f2d7dffe-f81b-bde9-bdae-20b868c8fef4}">
+        <p14:section name="문제" id="{99e2068b-bc77-d4c6-d18e-9851e7d81062}">
           <p14:sldIdLst>
-            <p14:sldId id="259"/>
+            <p14:sldId id="260"/>
           </p14:sldIdLst>
         </p14:section>
-        <p14:section name="개선" id="{ed736460-cf96-cfcf-efb4-89ee5e3377a0}">
+        <p14:section name="개선" id="{7ae72d53-17b1-2a87-0ab4-de496c65272f}">
           <p14:sldIdLst/>
         </p14:section>
-        <p14:section name="평가 설계" id="{2e4aed98-bb52-c93c-917d-89f389bfc7b4}">
+        <p14:section name="평가 설계" id="{89c76f3a-cb6f-e817-2ce5-2571ec1d857e}">
           <p14:sldIdLst/>
         </p14:section>
-        <p14:section name="Before/After" id="{1c3f7c36-6787-e44d-96ca-b2a1cd89e643}">
+        <p14:section name="Before/After" id="{29ccccdf-61f8-fc02-b50a-73c802a2bf28}">
           <p14:sldIdLst>
-            <p14:sldId id="264"/>
+            <p14:sldId id="265"/>
           </p14:sldIdLst>
         </p14:section>
-        <p14:section name="평가자 검증" id="{30032802-7821-931f-2755-80663ede30f5}">
+        <p14:section name="평가자 검증" id="{5c4d0fdb-fa7e-04b9-3581-29f9835d05fa}">
           <p14:sldIdLst/>
         </p14:section>
-        <p14:section name="시연" id="{56ec1e8d-a8a9-62b7-9bb2-36927e5aa1f7}">
-          <p14:sldIdLst>
-            <p14:sldId id="269"/>
-          </p14:sldIdLst>
-        </p14:section>
-        <p14:section name="한계" id="{ca51285a-c4a4-2ce1-d4be-405e55e8f6b9}">
+        <p14:section name="시연" id="{91e61492-86e6-5381-c26d-32b2a5f584f9}">
           <p14:sldIdLst>
             <p14:sldId id="270"/>
           </p14:sldIdLst>
         </p14:section>
-        <p14:section name="마무리" id="{e6e69074-a172-a120-61d6-7b3411d50d8d}">
+        <p14:section name="한계" id="{b0da42d1-4cd1-97b9-b696-c86b27506e1b}">
+          <p14:sldIdLst>
+            <p14:sldId id="271"/>
+          </p14:sldIdLst>
+        </p14:section>
+        <p14:section name="마무리" id="{bfa83e08-d88f-4e51-fc14-2609c97fb189}">
           <p14:sldIdLst/>
         </p14:section>
       </p14:sectionLst>
@@ -600,7 +602,7 @@
 </p:notes>
 </file>
 
-<file path=ppt/notesSlides/notesSlide14.xml><?xml version="1.0" encoding="utf-8"?>
+<file path=ppt/notesSlides/notesSlide10.xml><?xml version="1.0" encoding="utf-8"?>
 <p:notes xmlns:a="http://schemas.openxmlformats.org/drawingml/2006/main" xmlns:r="http://schemas.openxmlformats.org/officeDocument/2006/relationships" xmlns:p="http://schemas.openxmlformats.org/presentationml/2006/main">
   <p:cSld>
     <p:spTree>
@@ -646,7 +648,7 @@
           <a:p>
             <a:r>
               <a:rPr lang="en-US" dirty="0"/>
-              <a:t/>
+              <a:t>이 표가 핵심입니다. RAG 행에 품질 별표가 몰려 있고, Judge 행에는 비용과 지연 별표만 있습니다.</a:t>
             </a:r>
             <a:endParaRPr lang="en-US" dirty="0"/>
           </a:p>
@@ -669,7 +671,7 @@
           <a:p>
             <a:fld id="{F7021451-1387-4CA6-816F-3879F97B5CBC}" type="slidenum">
               <a:rPr lang="en-US"/>
-              <a:t>14</a:t>
+              <a:t>10</a:t>
             </a:fld>
             <a:endParaRPr lang="en-US"/>
           </a:p>
@@ -776,6 +778,94 @@
 </p:notes>
 </file>
 
+<file path=ppt/notesSlides/notesSlide16.xml><?xml version="1.0" encoding="utf-8"?>
+<p:notes xmlns:a="http://schemas.openxmlformats.org/drawingml/2006/main" xmlns:r="http://schemas.openxmlformats.org/officeDocument/2006/relationships" xmlns:p="http://schemas.openxmlformats.org/presentationml/2006/main">
+  <p:cSld>
+    <p:spTree>
+      <p:nvGrpSpPr>
+        <p:cNvPr id="1" name=""/>
+        <p:cNvGrpSpPr/>
+        <p:nvPr/>
+      </p:nvGrpSpPr>
+      <p:grpSpPr>
+        <a:xfrm>
+          <a:off x="0" y="0"/>
+          <a:ext cx="0" cy="0"/>
+          <a:chOff x="0" y="0"/>
+          <a:chExt cx="0" cy="0"/>
+        </a:xfrm>
+      </p:grpSpPr>
+      <p:sp>
+        <p:nvSpPr>
+          <p:cNvPr id="2" name="Slide Image Placeholder 1"/>
+          <p:cNvSpPr>
+            <a:spLocks noGrp="1" noRot="1" noChangeAspect="1"/>
+          </p:cNvSpPr>
+          <p:nvPr>
+            <p:ph type="sldImg"/>
+          </p:nvPr>
+        </p:nvSpPr>
+        <p:spPr/>
+      </p:sp>
+      <p:sp>
+        <p:nvSpPr>
+          <p:cNvPr id="3" name="Notes Placeholder 2"/>
+          <p:cNvSpPr>
+            <a:spLocks noGrp="1"/>
+          </p:cNvSpPr>
+          <p:nvPr>
+            <p:ph type="body" idx="1"/>
+          </p:nvPr>
+        </p:nvSpPr>
+        <p:spPr/>
+        <p:txBody>
+          <a:bodyPr/>
+          <a:lstStyle/>
+          <a:p>
+            <a:r>
+              <a:rPr lang="en-US" dirty="0"/>
+              <a:t/>
+            </a:r>
+            <a:endParaRPr lang="en-US" dirty="0"/>
+          </a:p>
+        </p:txBody>
+      </p:sp>
+      <p:sp>
+        <p:nvSpPr>
+          <p:cNvPr id="4" name="Slide Number Placeholder 3"/>
+          <p:cNvSpPr>
+            <a:spLocks noGrp="1"/>
+          </p:cNvSpPr>
+          <p:nvPr>
+            <p:ph type="sldNum" sz="quarter" idx="10"/>
+          </p:nvPr>
+        </p:nvSpPr>
+        <p:spPr/>
+        <p:txBody>
+          <a:bodyPr/>
+          <a:lstStyle/>
+          <a:p>
+            <a:fld id="{F7021451-1387-4CA6-816F-3879F97B5CBC}" type="slidenum">
+              <a:rPr lang="en-US"/>
+              <a:t>16</a:t>
+            </a:fld>
+            <a:endParaRPr lang="en-US"/>
+          </a:p>
+        </p:txBody>
+      </p:sp>
+    </p:spTree>
+    <p:extLst>
+      <p:ext uri="{BB962C8B-B14F-4D97-AF65-F5344CB8AC3E}">
+        <p14:creationId xmlns:p14="http://schemas.microsoft.com/office/powerpoint/2010/main" val="1024086991"/>
+      </p:ext>
+    </p:extLst>
+  </p:cSld>
+  <p:clrMapOvr>
+    <a:masterClrMapping/>
+  </p:clrMapOvr>
+</p:notes>
+</file>
+
 <file path=ppt/notesSlides/notesSlide2.xml><?xml version="1.0" encoding="utf-8"?>
 <p:notes xmlns:a="http://schemas.openxmlformats.org/drawingml/2006/main" xmlns:r="http://schemas.openxmlformats.org/officeDocument/2006/relationships" xmlns:p="http://schemas.openxmlformats.org/presentationml/2006/main">
   <p:cSld>
@@ -822,7 +912,7 @@
           <a:p>
             <a:r>
               <a:rPr lang="en-US" dirty="0"/>
-              <a:t>세 숫자가 결론입니다. 그리고 이 숫자를 어떻게 믿을 수 있는지가 이 발표의 나머지입니다.</a:t>
+              <a:t>새벽 당직자가 DB가 죽었다고 물어도 원본은 응답 지연 매뉴얼을 꺼냈습니다. 고친 부분을 하나씩 켜고 끄며 효과를 쟀고, 채점하는 AI도 검사했습니다. 결과 숫자는 오른쪽 다섯 개입니다.</a:t>
             </a:r>
             <a:endParaRPr lang="en-US" dirty="0"/>
           </a:p>
@@ -864,7 +954,7 @@
 </p:notes>
 </file>
 
-<file path=ppt/notesSlides/notesSlide4.xml><?xml version="1.0" encoding="utf-8"?>
+<file path=ppt/notesSlides/notesSlide3.xml><?xml version="1.0" encoding="utf-8"?>
 <p:notes xmlns:a="http://schemas.openxmlformats.org/drawingml/2006/main" xmlns:r="http://schemas.openxmlformats.org/officeDocument/2006/relationships" xmlns:p="http://schemas.openxmlformats.org/presentationml/2006/main">
   <p:cSld>
     <p:spTree>
@@ -910,7 +1000,7 @@
           <a:p>
             <a:r>
               <a:rPr lang="en-US" dirty="0"/>
-              <a:t>평가셋을 알림 문구와 같은 말로 묻는 질문과 자기 말로 묻는 질문으로 나눠 봤습니다. base는 자기 말로 물으면 거의 못 맞힙니다.</a:t>
+              <a:t>세 숫자가 결론입니다. 그리고 이 숫자를 어떻게 믿을 수 있는지가 이 발표의 나머지입니다.</a:t>
             </a:r>
             <a:endParaRPr lang="en-US" dirty="0"/>
           </a:p>
@@ -933,7 +1023,7 @@
           <a:p>
             <a:fld id="{F7021451-1387-4CA6-816F-3879F97B5CBC}" type="slidenum">
               <a:rPr lang="en-US"/>
-              <a:t>4</a:t>
+              <a:t>3</a:t>
             </a:fld>
             <a:endParaRPr lang="en-US"/>
           </a:p>
@@ -952,7 +1042,7 @@
 </p:notes>
 </file>
 
-<file path=ppt/notesSlides/notesSlide9.xml><?xml version="1.0" encoding="utf-8"?>
+<file path=ppt/notesSlides/notesSlide5.xml><?xml version="1.0" encoding="utf-8"?>
 <p:notes xmlns:a="http://schemas.openxmlformats.org/drawingml/2006/main" xmlns:r="http://schemas.openxmlformats.org/officeDocument/2006/relationships" xmlns:p="http://schemas.openxmlformats.org/presentationml/2006/main">
   <p:cSld>
     <p:spTree>
@@ -998,7 +1088,7 @@
           <a:p>
             <a:r>
               <a:rPr lang="en-US" dirty="0"/>
-              <a:t>이 표가 핵심입니다. RAG 행에 품질 별표가 몰려 있고, Judge 행에는 비용과 지연 별표만 있습니다.</a:t>
+              <a:t>평가셋을 알림 문구와 같은 말로 묻는 질문과 자기 말로 묻는 질문으로 나눠 봤습니다. base는 자기 말로 물으면 거의 못 맞힙니다.</a:t>
             </a:r>
             <a:endParaRPr lang="en-US" dirty="0"/>
           </a:p>
@@ -1021,7 +1111,7 @@
           <a:p>
             <a:fld id="{F7021451-1387-4CA6-816F-3879F97B5CBC}" type="slidenum">
               <a:rPr lang="en-US"/>
-              <a:t>9</a:t>
+              <a:t>5</a:t>
             </a:fld>
             <a:endParaRPr lang="en-US"/>
           </a:p>
@@ -1771,9 +1861,9 @@
 </p:sld>
 </file>
 
-<file path=ppt/slides/slide14.xml><?xml version="1.0" encoding="utf-8"?>
+<file path=ppt/slides/slide10.xml><?xml version="1.0" encoding="utf-8"?>
 <p:sld xmlns:a="http://schemas.openxmlformats.org/drawingml/2006/main" xmlns:r="http://schemas.openxmlformats.org/officeDocument/2006/relationships" xmlns:p="http://schemas.openxmlformats.org/presentationml/2006/main">
-  <p:cSld name="Slide 14">
+  <p:cSld name="Slide 10">
     <p:spTree>
       <p:nvGrpSpPr>
         <p:cNvPr id="1" name=""/>
@@ -1820,3049 +1910,6 @@
                   <a:schemeClr val="tx2"/>
                 </a:solidFill>
               </a:rPr>
-              <a:t>시연: 같은 질문, base와 final을 나란히</a:t>
-            </a:r>
-            <a:endParaRPr lang="en-US" sz="2800" dirty="0"/>
-          </a:p>
-        </p:txBody>
-      </p:sp>
-      <p:sp>
-        <p:nvSpPr>
-          <p:cNvPr id="3" name="demo-cmd"/>
-          <p:cNvSpPr/>
-          <p:nvPr/>
-        </p:nvSpPr>
-        <p:spPr>
-          <a:xfrm>
-            <a:off x="548640" y="1371600"/>
-            <a:ext cx="11064240" cy="914400"/>
-          </a:xfrm>
-          <a:prstGeom prst="roundRect">
-            <a:avLst>
-              <a:gd name="adj" fmla="val 12000"/>
-            </a:avLst>
-          </a:prstGeom>
-          <a:solidFill>
-            <a:schemeClr val="tx2"/>
-          </a:solidFill>
-          <a:ln w="12700">
-            <a:solidFill>
-              <a:schemeClr val="tx2"/>
-            </a:solidFill>
-            <a:prstDash val="solid"/>
-          </a:ln>
-        </p:spPr>
-      </p:sp>
-      <p:sp>
-        <p:nvSpPr>
-          <p:cNvPr id="4" name="Text 2"/>
-          <p:cNvSpPr txBox="1"/>
-          <p:nvPr/>
-        </p:nvSpPr>
-        <p:spPr>
-          <a:xfrm>
-            <a:off x="822960" y="1463040"/>
-            <a:ext cx="10515600" cy="731520"/>
-          </a:xfrm>
-          <a:prstGeom prst="rect">
-            <a:avLst/>
-          </a:prstGeom>
-          <a:noFill/>
-          <a:ln/>
-        </p:spPr>
-        <p:txBody>
-          <a:bodyPr wrap="square" lIns="0" tIns="0" rIns="0" bIns="0" rtlCol="0" anchor="ctr"/>
-          <a:lstStyle/>
-          <a:p>
-            <a:pPr indent="0" marL="0">
-              <a:buNone/>
-            </a:pPr>
-            <a:r>
-              <a:rPr lang="en-US" sz="1600" dirty="0">
-                <a:solidFill>
-                  <a:schemeClr val="bg1"/>
-                </a:solidFill>
-                <a:latin typeface="Courier New" pitchFamily="34" charset="0"/>
-                <a:ea typeface="Courier New" pitchFamily="34" charset="-122"/>
-                <a:cs typeface="Courier New" pitchFamily="34" charset="-120"/>
-              </a:rPr>
-              <a:t>.venv/bin/python scripts/demo_side_by_side.py --id Q01</a:t>
-            </a:r>
-            <a:endParaRPr lang="en-US" sz="1600" dirty="0"/>
-          </a:p>
-        </p:txBody>
-      </p:sp>
-      <p:sp>
-        <p:nvSpPr>
-          <p:cNvPr id="5" name="demo-base"/>
-          <p:cNvSpPr/>
-          <p:nvPr/>
-        </p:nvSpPr>
-        <p:spPr>
-          <a:xfrm>
-            <a:off x="548640" y="2560320"/>
-            <a:ext cx="5458968" cy="2926080"/>
-          </a:xfrm>
-          <a:prstGeom prst="roundRect">
-            <a:avLst>
-              <a:gd name="adj" fmla="val 3750"/>
-            </a:avLst>
-          </a:prstGeom>
-          <a:solidFill>
-            <a:schemeClr val="bg2"/>
-          </a:solidFill>
-          <a:ln w="12700">
-            <a:solidFill>
-              <a:schemeClr val="bg2"/>
-            </a:solidFill>
-            <a:prstDash val="solid"/>
-          </a:ln>
-        </p:spPr>
-      </p:sp>
-      <p:sp>
-        <p:nvSpPr>
-          <p:cNvPr id="6" name="Text 4"/>
-          <p:cNvSpPr txBox="1"/>
-          <p:nvPr/>
-        </p:nvSpPr>
-        <p:spPr>
-          <a:xfrm>
-            <a:off x="822960" y="2743200"/>
-            <a:ext cx="1828800" cy="411480"/>
-          </a:xfrm>
-          <a:prstGeom prst="rect">
-            <a:avLst/>
-          </a:prstGeom>
-          <a:noFill/>
-          <a:ln/>
-        </p:spPr>
-        <p:txBody>
-          <a:bodyPr wrap="square" lIns="0" tIns="0" rIns="0" bIns="0" rtlCol="0" anchor="ctr"/>
-          <a:lstStyle/>
-          <a:p>
-            <a:pPr indent="0" marL="0">
-              <a:buNone/>
-            </a:pPr>
-            <a:r>
-              <a:rPr lang="en-US" sz="1800" b="1" dirty="0">
-                <a:solidFill>
-                  <a:schemeClr val="tx2"/>
-                </a:solidFill>
-              </a:rPr>
-              <a:t>[base]</a:t>
-            </a:r>
-            <a:endParaRPr lang="en-US" sz="1800" dirty="0"/>
-          </a:p>
-        </p:txBody>
-      </p:sp>
-      <p:sp>
-        <p:nvSpPr>
-          <p:cNvPr id="7" name="Text 5"/>
-          <p:cNvSpPr txBox="1"/>
-          <p:nvPr/>
-        </p:nvSpPr>
-        <p:spPr>
-          <a:xfrm>
-            <a:off x="4572000" y="2743200"/>
-            <a:ext cx="1188720" cy="411480"/>
-          </a:xfrm>
-          <a:prstGeom prst="rect">
-            <a:avLst/>
-          </a:prstGeom>
-          <a:noFill/>
-          <a:ln/>
-        </p:spPr>
-        <p:txBody>
-          <a:bodyPr wrap="square" lIns="0" tIns="0" rIns="0" bIns="0" rtlCol="0" anchor="ctr"/>
-          <a:lstStyle/>
-          <a:p>
-            <a:pPr algn="r" indent="0" marL="0">
-              <a:buNone/>
-            </a:pPr>
-            <a:r>
-              <a:rPr lang="en-US" sz="1600" b="1" dirty="0">
-                <a:solidFill>
-                  <a:schemeClr val="accent1"/>
-                </a:solidFill>
-              </a:rPr>
-              <a:t>오답</a:t>
-            </a:r>
-            <a:endParaRPr lang="en-US" sz="1600" dirty="0"/>
-          </a:p>
-        </p:txBody>
-      </p:sp>
-      <p:sp>
-        <p:nvSpPr>
-          <p:cNvPr id="8" name="Text 6"/>
-          <p:cNvSpPr txBox="1"/>
-          <p:nvPr/>
-        </p:nvSpPr>
-        <p:spPr>
-          <a:xfrm>
-            <a:off x="822960" y="3291840"/>
-            <a:ext cx="4937760" cy="2011680"/>
-          </a:xfrm>
-          <a:prstGeom prst="rect">
-            <a:avLst/>
-          </a:prstGeom>
-          <a:noFill/>
-          <a:ln/>
-        </p:spPr>
-        <p:txBody>
-          <a:bodyPr wrap="square" lIns="0" tIns="0" rIns="0" bIns="0" rtlCol="0" anchor="t"/>
-          <a:lstStyle/>
-          <a:p>
-            <a:pPr indent="0" marL="0">
-              <a:spcAft>
-                <a:spcPts val="800"/>
-              </a:spcAft>
-              <a:buNone/>
-            </a:pPr>
-            <a:r>
-              <a:rPr lang="en-US" sz="1450" dirty="0">
-                <a:solidFill>
-                  <a:srgbClr val="8A94A3"/>
-                </a:solidFill>
-              </a:rPr>
-              <a:t>고른 런북  </a:t>
-            </a:r>
-            <a:pPr indent="0" marL="0">
-              <a:spcAft>
-                <a:spcPts val="800"/>
-              </a:spcAft>
-              <a:buNone/>
-            </a:pPr>
-            <a:r>
-              <a:rPr lang="en-US" sz="1450" b="1" dirty="0">
-                <a:solidFill>
-                  <a:schemeClr val="tx1"/>
-                </a:solidFill>
-              </a:rPr>
-              <a:t>high-latency (응답 지연 절차)</a:t>
-            </a:r>
-            <a:endParaRPr lang="en-US" sz="1450" dirty="0"/>
-          </a:p>
-          <a:p>
-            <a:pPr indent="0" marL="0">
-              <a:spcAft>
-                <a:spcPts val="800"/>
-              </a:spcAft>
-              <a:buNone/>
-            </a:pPr>
-            <a:r>
-              <a:rPr lang="en-US" sz="1450" dirty="0">
-                <a:solidFill>
-                  <a:srgbClr val="8A94A3"/>
-                </a:solidFill>
-              </a:rPr>
-              <a:t>답의 핵심  </a:t>
-            </a:r>
-            <a:pPr indent="0" marL="0">
-              <a:spcAft>
-                <a:spcPts val="800"/>
-              </a:spcAft>
-              <a:buNone/>
-            </a:pPr>
-            <a:r>
-              <a:rPr lang="en-US" sz="1450" dirty="0">
-                <a:solidFill>
-                  <a:schemeClr val="tx1"/>
-                </a:solidFill>
-              </a:rPr>
-              <a:t>커넥션 풀 늘리기, 트래픽 분산…</a:t>
-            </a:r>
-            <a:endParaRPr lang="en-US" sz="1450" dirty="0"/>
-          </a:p>
-        </p:txBody>
-      </p:sp>
-      <p:sp>
-        <p:nvSpPr>
-          <p:cNvPr id="9" name="demo-final"/>
-          <p:cNvSpPr/>
-          <p:nvPr/>
-        </p:nvSpPr>
-        <p:spPr>
-          <a:xfrm>
-            <a:off x="6153912" y="2560320"/>
-            <a:ext cx="5458968" cy="2926080"/>
-          </a:xfrm>
-          <a:prstGeom prst="roundRect">
-            <a:avLst>
-              <a:gd name="adj" fmla="val 3750"/>
-            </a:avLst>
-          </a:prstGeom>
-          <a:solidFill>
-            <a:schemeClr val="bg2"/>
-          </a:solidFill>
-          <a:ln w="12700">
-            <a:solidFill>
-              <a:schemeClr val="bg2"/>
-            </a:solidFill>
-            <a:prstDash val="solid"/>
-          </a:ln>
-        </p:spPr>
-      </p:sp>
-      <p:sp>
-        <p:nvSpPr>
-          <p:cNvPr id="10" name="Text 8"/>
-          <p:cNvSpPr txBox="1"/>
-          <p:nvPr/>
-        </p:nvSpPr>
-        <p:spPr>
-          <a:xfrm>
-            <a:off x="6428232" y="2743200"/>
-            <a:ext cx="1828800" cy="411480"/>
-          </a:xfrm>
-          <a:prstGeom prst="rect">
-            <a:avLst/>
-          </a:prstGeom>
-          <a:noFill/>
-          <a:ln/>
-        </p:spPr>
-        <p:txBody>
-          <a:bodyPr wrap="square" lIns="0" tIns="0" rIns="0" bIns="0" rtlCol="0" anchor="ctr"/>
-          <a:lstStyle/>
-          <a:p>
-            <a:pPr indent="0" marL="0">
-              <a:buNone/>
-            </a:pPr>
-            <a:r>
-              <a:rPr lang="en-US" sz="1800" b="1" dirty="0">
-                <a:solidFill>
-                  <a:schemeClr val="tx2"/>
-                </a:solidFill>
-              </a:rPr>
-              <a:t>[final]</a:t>
-            </a:r>
-            <a:endParaRPr lang="en-US" sz="1800" dirty="0"/>
-          </a:p>
-        </p:txBody>
-      </p:sp>
-      <p:sp>
-        <p:nvSpPr>
-          <p:cNvPr id="11" name="Text 9"/>
-          <p:cNvSpPr txBox="1"/>
-          <p:nvPr/>
-        </p:nvSpPr>
-        <p:spPr>
-          <a:xfrm>
-            <a:off x="10177272" y="2743200"/>
-            <a:ext cx="1188720" cy="411480"/>
-          </a:xfrm>
-          <a:prstGeom prst="rect">
-            <a:avLst/>
-          </a:prstGeom>
-          <a:noFill/>
-          <a:ln/>
-        </p:spPr>
-        <p:txBody>
-          <a:bodyPr wrap="square" lIns="0" tIns="0" rIns="0" bIns="0" rtlCol="0" anchor="ctr"/>
-          <a:lstStyle/>
-          <a:p>
-            <a:pPr algn="r" indent="0" marL="0">
-              <a:buNone/>
-            </a:pPr>
-            <a:r>
-              <a:rPr lang="en-US" sz="1600" b="1" dirty="0">
-                <a:solidFill>
-                  <a:schemeClr val="accent2"/>
-                </a:solidFill>
-              </a:rPr>
-              <a:t>정답 포함</a:t>
-            </a:r>
-            <a:endParaRPr lang="en-US" sz="1600" dirty="0"/>
-          </a:p>
-        </p:txBody>
-      </p:sp>
-      <p:sp>
-        <p:nvSpPr>
-          <p:cNvPr id="12" name="Text 10"/>
-          <p:cNvSpPr txBox="1"/>
-          <p:nvPr/>
-        </p:nvSpPr>
-        <p:spPr>
-          <a:xfrm>
-            <a:off x="6428232" y="3291840"/>
-            <a:ext cx="4937760" cy="2011680"/>
-          </a:xfrm>
-          <a:prstGeom prst="rect">
-            <a:avLst/>
-          </a:prstGeom>
-          <a:noFill/>
-          <a:ln/>
-        </p:spPr>
-        <p:txBody>
-          <a:bodyPr wrap="square" lIns="0" tIns="0" rIns="0" bIns="0" rtlCol="0" anchor="t"/>
-          <a:lstStyle/>
-          <a:p>
-            <a:pPr indent="0" marL="0">
-              <a:spcAft>
-                <a:spcPts val="800"/>
-              </a:spcAft>
-              <a:buNone/>
-            </a:pPr>
-            <a:r>
-              <a:rPr lang="en-US" sz="1450" dirty="0">
-                <a:solidFill>
-                  <a:srgbClr val="8A94A3"/>
-                </a:solidFill>
-              </a:rPr>
-              <a:t>고른 런북  </a:t>
-            </a:r>
-            <a:pPr indent="0" marL="0">
-              <a:spcAft>
-                <a:spcPts val="800"/>
-              </a:spcAft>
-              <a:buNone/>
-            </a:pPr>
-            <a:r>
-              <a:rPr lang="en-US" sz="1450" b="1" dirty="0">
-                <a:solidFill>
-                  <a:schemeClr val="tx1"/>
-                </a:solidFill>
-              </a:rPr>
-              <a:t>db-down (+disk-full 혼입)</a:t>
-            </a:r>
-            <a:endParaRPr lang="en-US" sz="1450" dirty="0"/>
-          </a:p>
-          <a:p>
-            <a:pPr indent="0" marL="0">
-              <a:spcAft>
-                <a:spcPts val="800"/>
-              </a:spcAft>
-              <a:buNone/>
-            </a:pPr>
-            <a:r>
-              <a:rPr lang="en-US" sz="1450" dirty="0">
-                <a:solidFill>
-                  <a:srgbClr val="8A94A3"/>
-                </a:solidFill>
-              </a:rPr>
-              <a:t>답의 핵심  </a:t>
-            </a:r>
-            <a:pPr indent="0" marL="0">
-              <a:spcAft>
-                <a:spcPts val="800"/>
-              </a:spcAft>
-              <a:buNone/>
-            </a:pPr>
-            <a:r>
-              <a:rPr lang="en-US" sz="1450" dirty="0">
-                <a:solidFill>
-                  <a:schemeClr val="tx1"/>
-                </a:solidFill>
-              </a:rPr>
-              <a:t>커넥션 풀 점검, 필요 시 failover 노드로 전환…</a:t>
-            </a:r>
-            <a:endParaRPr lang="en-US" sz="1450" dirty="0"/>
-          </a:p>
-        </p:txBody>
-      </p:sp>
-      <p:sp>
-        <p:nvSpPr>
-          <p:cNvPr id="13" name="Text 11"/>
-          <p:cNvSpPr txBox="1"/>
-          <p:nvPr/>
-        </p:nvSpPr>
-        <p:spPr>
-          <a:xfrm>
-            <a:off x="548640" y="5715000"/>
-            <a:ext cx="11064240" cy="274320"/>
-          </a:xfrm>
-          <a:prstGeom prst="rect">
-            <a:avLst/>
-          </a:prstGeom>
-          <a:noFill/>
-          <a:ln/>
-        </p:spPr>
-        <p:txBody>
-          <a:bodyPr wrap="square" lIns="0" tIns="0" rIns="0" bIns="0" rtlCol="0" anchor="ctr"/>
-          <a:lstStyle/>
-          <a:p>
-            <a:pPr indent="0" marL="0">
-              <a:buNone/>
-            </a:pPr>
-            <a:r>
-              <a:rPr lang="en-US" sz="1050" dirty="0">
-                <a:solidFill>
-                  <a:schemeClr val="accent3"/>
-                </a:solidFill>
-              </a:rPr>
-              <a:t>질문: "DB 프라이머리가 다운됐습니다. 대응 절차를 알려주세요." 화면 하나에 런북 정오·답변·지연·비용·근거 없는 수치. 기록 results/raw/demo_*.json</a:t>
-            </a:r>
-            <a:endParaRPr lang="en-US" sz="1050" dirty="0"/>
-          </a:p>
-        </p:txBody>
-      </p:sp>
-      <p:sp>
-        <p:nvSpPr>
-          <p:cNvPr id="25" name="Slide Number Placeholder 0"/>
-          <p:cNvSpPr>
-            <a:spLocks noGrp="1"/>
-          </p:cNvSpPr>
-          <p:nvPr>
-            <p:ph type="sldNum" sz="quarter" idx="4294967295"/>
-          </p:nvPr>
-        </p:nvSpPr>
-        <p:spPr>
-          <a:xfrm>
-            <a:off x="11155680" y="6400800"/>
-            <a:ext cx="457200" cy="274320"/>
-          </a:xfrm>
-          <a:prstGeom prst="rect">
-            <a:avLst/>
-          </a:prstGeom>
-          <a:extLst>
-            <a:ext uri="{C572A759-6A51-4108-AA02-DFA0A04FC94B}">
-              <ma14:wrappingTextBoxFlag xmlns:ma14="http://schemas.microsoft.com/office/mac/drawingml/2011/main" val="0"/>
-            </a:ext>
-          </a:extLst>
-        </p:spPr>
-        <p:txBody>
-          <a:bodyPr/>
-          <a:lstStyle>
-            <a:lvl1pPr>
-              <a:defRPr sz="1000">
-                <a:solidFill>
-                  <a:schemeClr val="accent3"/>
-                </a:solidFill>
-              </a:defRPr>
-            </a:lvl1pPr>
-          </a:lstStyle>
-          <a:p>
-            <a:pPr algn="r"/>
-            <a:fld id="{F7021451-1387-4CA6-816F-3879F97B5CBC}" type="slidenum">
-              <a:rPr b="0" lang="en-US"/>
-              <a:t>14</a:t>
-            </a:fld>
-            <a:endParaRPr lang="en-US"/>
-          </a:p>
-        </p:txBody>
-      </p:sp>
-    </p:spTree>
-  </p:cSld>
-  <p:clrMapOvr>
-    <a:masterClrMapping/>
-  </p:clrMapOvr>
-</p:sld>
-</file>
-
-<file path=ppt/slides/slide15.xml><?xml version="1.0" encoding="utf-8"?>
-<p:sld xmlns:a="http://schemas.openxmlformats.org/drawingml/2006/main" xmlns:r="http://schemas.openxmlformats.org/officeDocument/2006/relationships" xmlns:p="http://schemas.openxmlformats.org/presentationml/2006/main">
-  <p:cSld name="Slide 15">
-    <p:spTree>
-      <p:nvGrpSpPr>
-        <p:cNvPr id="1" name=""/>
-        <p:cNvGrpSpPr/>
-        <p:nvPr/>
-      </p:nvGrpSpPr>
-      <p:grpSpPr>
-        <a:xfrm>
-          <a:off x="0" y="0"/>
-          <a:ext cx="0" cy="0"/>
-          <a:chOff x="0" y="0"/>
-          <a:chExt cx="0" cy="0"/>
-        </a:xfrm>
-      </p:grpSpPr>
-      <p:sp>
-        <p:nvSpPr>
-          <p:cNvPr id="2" name="Text 0"/>
-          <p:cNvSpPr/>
-          <p:nvPr>
-            <p:ph idx="100" type="title" hasCustomPrompt="1"/>
-          </p:nvPr>
-        </p:nvSpPr>
-        <p:spPr>
-          <a:xfrm>
-            <a:off x="548640" y="320040"/>
-            <a:ext cx="11064240" cy="777240"/>
-          </a:xfrm>
-          <a:prstGeom prst="rect">
-            <a:avLst/>
-          </a:prstGeom>
-          <a:noFill/>
-          <a:ln/>
-        </p:spPr>
-        <p:txBody>
-          <a:bodyPr wrap="square" lIns="0" tIns="0" rIns="0" bIns="0" rtlCol="0" anchor="ctr"/>
-          <a:lstStyle/>
-          <a:p>
-            <a:pPr algn="l" indent="0" marL="0">
-              <a:buNone/>
-            </a:pPr>
-            <a:r>
-              <a:rPr lang="en-US" sz="2800" b="1" dirty="0">
-                <a:solidFill>
-                  <a:schemeClr val="tx2"/>
-                </a:solidFill>
-              </a:rPr>
-              <a:t>한계와 다음 개선</a:t>
-            </a:r>
-            <a:endParaRPr lang="en-US" sz="2800" dirty="0"/>
-          </a:p>
-        </p:txBody>
-      </p:sp>
-      <p:sp>
-        <p:nvSpPr>
-          <p:cNvPr id="3" name="lim-0"/>
-          <p:cNvSpPr/>
-          <p:nvPr/>
-        </p:nvSpPr>
-        <p:spPr>
-          <a:xfrm>
-            <a:off x="548640" y="1280160"/>
-            <a:ext cx="11064240" cy="1078992"/>
-          </a:xfrm>
-          <a:prstGeom prst="roundRect">
-            <a:avLst>
-              <a:gd name="adj" fmla="val 10169"/>
-            </a:avLst>
-          </a:prstGeom>
-          <a:solidFill>
-            <a:schemeClr val="bg2"/>
-          </a:solidFill>
-          <a:ln w="12700">
-            <a:solidFill>
-              <a:schemeClr val="bg2"/>
-            </a:solidFill>
-            <a:prstDash val="solid"/>
-          </a:ln>
-        </p:spPr>
-      </p:sp>
-      <p:sp>
-        <p:nvSpPr>
-          <p:cNvPr id="4" name="lim-dot-0"/>
-          <p:cNvSpPr/>
-          <p:nvPr/>
-        </p:nvSpPr>
-        <p:spPr>
-          <a:xfrm>
-            <a:off x="777240" y="1609344"/>
-            <a:ext cx="411480" cy="411480"/>
-          </a:xfrm>
-          <a:prstGeom prst="ellipse">
-            <a:avLst/>
-          </a:prstGeom>
-          <a:solidFill>
-            <a:schemeClr val="accent1"/>
-          </a:solidFill>
-          <a:ln w="12700">
-            <a:solidFill>
-              <a:schemeClr val="accent1"/>
-            </a:solidFill>
-            <a:prstDash val="solid"/>
-          </a:ln>
-        </p:spPr>
-      </p:sp>
-      <p:sp>
-        <p:nvSpPr>
-          <p:cNvPr id="5" name="Text 3"/>
-          <p:cNvSpPr txBox="1"/>
-          <p:nvPr/>
-        </p:nvSpPr>
-        <p:spPr>
-          <a:xfrm>
-            <a:off x="777240" y="1609344"/>
-            <a:ext cx="411480" cy="411480"/>
-          </a:xfrm>
-          <a:prstGeom prst="rect">
-            <a:avLst/>
-          </a:prstGeom>
-          <a:noFill/>
-          <a:ln/>
-        </p:spPr>
-        <p:txBody>
-          <a:bodyPr wrap="square" lIns="0" tIns="0" rIns="0" bIns="0" rtlCol="0" anchor="ctr"/>
-          <a:lstStyle/>
-          <a:p>
-            <a:pPr algn="ctr" indent="0" marL="0">
-              <a:buNone/>
-            </a:pPr>
-            <a:r>
-              <a:rPr lang="en-US" sz="1600" b="1" dirty="0">
-                <a:solidFill>
-                  <a:schemeClr val="bg1"/>
-                </a:solidFill>
-              </a:rPr>
-              <a:t>!</a:t>
-            </a:r>
-            <a:endParaRPr lang="en-US" sz="1600" dirty="0"/>
-          </a:p>
-        </p:txBody>
-      </p:sp>
-      <p:sp>
-        <p:nvSpPr>
-          <p:cNvPr id="6" name="Text 4"/>
-          <p:cNvSpPr txBox="1"/>
-          <p:nvPr/>
-        </p:nvSpPr>
-        <p:spPr>
-          <a:xfrm>
-            <a:off x="1417320" y="1389888"/>
-            <a:ext cx="4846320" cy="384048"/>
-          </a:xfrm>
-          <a:prstGeom prst="rect">
-            <a:avLst/>
-          </a:prstGeom>
-          <a:noFill/>
-          <a:ln/>
-        </p:spPr>
-        <p:txBody>
-          <a:bodyPr wrap="square" lIns="0" tIns="0" rIns="0" bIns="0" rtlCol="0" anchor="ctr"/>
-          <a:lstStyle/>
-          <a:p>
-            <a:pPr indent="0" marL="0">
-              <a:buNone/>
-            </a:pPr>
-            <a:r>
-              <a:rPr lang="en-US" sz="1600" b="1" dirty="0">
-                <a:solidFill>
-                  <a:schemeClr val="tx2"/>
-                </a:solidFill>
-              </a:rPr>
-              <a:t>일반화 격차</a:t>
-            </a:r>
-            <a:endParaRPr lang="en-US" sz="1600" dirty="0"/>
-          </a:p>
-        </p:txBody>
-      </p:sp>
-      <p:sp>
-        <p:nvSpPr>
-          <p:cNvPr id="7" name="Text 5"/>
-          <p:cNvSpPr txBox="1"/>
-          <p:nvPr/>
-        </p:nvSpPr>
-        <p:spPr>
-          <a:xfrm>
-            <a:off x="1417320" y="1792224"/>
-            <a:ext cx="4846320" cy="502920"/>
-          </a:xfrm>
-          <a:prstGeom prst="rect">
-            <a:avLst/>
-          </a:prstGeom>
-          <a:noFill/>
-          <a:ln/>
-        </p:spPr>
-        <p:txBody>
-          <a:bodyPr wrap="square" lIns="0" tIns="0" rIns="0" bIns="0" rtlCol="0" anchor="ctr"/>
-          <a:lstStyle/>
-          <a:p>
-            <a:pPr indent="0" marL="0">
-              <a:buNone/>
-            </a:pPr>
-            <a:r>
-              <a:rPr lang="en-US" sz="1250" dirty="0">
-                <a:solidFill>
-                  <a:schemeClr val="tx1"/>
-                </a:solidFill>
-              </a:rPr>
-              <a:t>RAG Recall@1이 dev 72% → holdout 52%. 자기 말로 묻는 holdout 질의는 33%</a:t>
-            </a:r>
-            <a:endParaRPr lang="en-US" sz="1250" dirty="0"/>
-          </a:p>
-        </p:txBody>
-      </p:sp>
-      <p:sp>
-        <p:nvSpPr>
-          <p:cNvPr id="8" name="Text 6"/>
-          <p:cNvSpPr txBox="1"/>
-          <p:nvPr/>
-        </p:nvSpPr>
-        <p:spPr>
-          <a:xfrm>
-            <a:off x="6492240" y="1389888"/>
-            <a:ext cx="4937760" cy="868680"/>
-          </a:xfrm>
-          <a:prstGeom prst="rect">
-            <a:avLst/>
-          </a:prstGeom>
-          <a:noFill/>
-          <a:ln/>
-        </p:spPr>
-        <p:txBody>
-          <a:bodyPr wrap="square" lIns="0" tIns="0" rIns="0" bIns="0" rtlCol="0" anchor="ctr"/>
-          <a:lstStyle/>
-          <a:p>
-            <a:pPr indent="0" marL="0">
-              <a:buNone/>
-            </a:pPr>
-            <a:r>
-              <a:rPr lang="en-US" sz="1350" dirty="0">
-                <a:solidFill>
-                  <a:schemeClr val="accent6"/>
-                </a:solidFill>
-              </a:rPr>
-              <a:t>다음: 런북 본문 외에 증상 예시 문장을 색인해 질문과 문서의 표현 차이를 줄임</a:t>
-            </a:r>
-            <a:endParaRPr lang="en-US" sz="1350" dirty="0"/>
-          </a:p>
-        </p:txBody>
-      </p:sp>
-      <p:sp>
-        <p:nvSpPr>
-          <p:cNvPr id="9" name="lim-1"/>
-          <p:cNvSpPr/>
-          <p:nvPr/>
-        </p:nvSpPr>
-        <p:spPr>
-          <a:xfrm>
-            <a:off x="548640" y="2487168"/>
-            <a:ext cx="11064240" cy="1078992"/>
-          </a:xfrm>
-          <a:prstGeom prst="roundRect">
-            <a:avLst>
-              <a:gd name="adj" fmla="val 10169"/>
-            </a:avLst>
-          </a:prstGeom>
-          <a:solidFill>
-            <a:schemeClr val="bg2"/>
-          </a:solidFill>
-          <a:ln w="12700">
-            <a:solidFill>
-              <a:schemeClr val="bg2"/>
-            </a:solidFill>
-            <a:prstDash val="solid"/>
-          </a:ln>
-        </p:spPr>
-      </p:sp>
-      <p:sp>
-        <p:nvSpPr>
-          <p:cNvPr id="10" name="lim-dot-1"/>
-          <p:cNvSpPr/>
-          <p:nvPr/>
-        </p:nvSpPr>
-        <p:spPr>
-          <a:xfrm>
-            <a:off x="777240" y="2816352"/>
-            <a:ext cx="411480" cy="411480"/>
-          </a:xfrm>
-          <a:prstGeom prst="ellipse">
-            <a:avLst/>
-          </a:prstGeom>
-          <a:solidFill>
-            <a:schemeClr val="accent1"/>
-          </a:solidFill>
-          <a:ln w="12700">
-            <a:solidFill>
-              <a:schemeClr val="accent1"/>
-            </a:solidFill>
-            <a:prstDash val="solid"/>
-          </a:ln>
-        </p:spPr>
-      </p:sp>
-      <p:sp>
-        <p:nvSpPr>
-          <p:cNvPr id="11" name="Text 9"/>
-          <p:cNvSpPr txBox="1"/>
-          <p:nvPr/>
-        </p:nvSpPr>
-        <p:spPr>
-          <a:xfrm>
-            <a:off x="777240" y="2816352"/>
-            <a:ext cx="411480" cy="411480"/>
-          </a:xfrm>
-          <a:prstGeom prst="rect">
-            <a:avLst/>
-          </a:prstGeom>
-          <a:noFill/>
-          <a:ln/>
-        </p:spPr>
-        <p:txBody>
-          <a:bodyPr wrap="square" lIns="0" tIns="0" rIns="0" bIns="0" rtlCol="0" anchor="ctr"/>
-          <a:lstStyle/>
-          <a:p>
-            <a:pPr algn="ctr" indent="0" marL="0">
-              <a:buNone/>
-            </a:pPr>
-            <a:r>
-              <a:rPr lang="en-US" sz="1600" b="1" dirty="0">
-                <a:solidFill>
-                  <a:schemeClr val="bg1"/>
-                </a:solidFill>
-              </a:rPr>
-              <a:t>!</a:t>
-            </a:r>
-            <a:endParaRPr lang="en-US" sz="1600" dirty="0"/>
-          </a:p>
-        </p:txBody>
-      </p:sp>
-      <p:sp>
-        <p:nvSpPr>
-          <p:cNvPr id="12" name="Text 10"/>
-          <p:cNvSpPr txBox="1"/>
-          <p:nvPr/>
-        </p:nvSpPr>
-        <p:spPr>
-          <a:xfrm>
-            <a:off x="1417320" y="2596896"/>
-            <a:ext cx="4846320" cy="384048"/>
-          </a:xfrm>
-          <a:prstGeom prst="rect">
-            <a:avLst/>
-          </a:prstGeom>
-          <a:noFill/>
-          <a:ln/>
-        </p:spPr>
-        <p:txBody>
-          <a:bodyPr wrap="square" lIns="0" tIns="0" rIns="0" bIns="0" rtlCol="0" anchor="ctr"/>
-          <a:lstStyle/>
-          <a:p>
-            <a:pPr indent="0" marL="0">
-              <a:buNone/>
-            </a:pPr>
-            <a:r>
-              <a:rPr lang="en-US" sz="1600" b="1" dirty="0">
-                <a:solidFill>
-                  <a:schemeClr val="tx2"/>
-                </a:solidFill>
-              </a:rPr>
-              <a:t>무관 런북 혼입이 남음</a:t>
-            </a:r>
-            <a:endParaRPr lang="en-US" sz="1600" dirty="0"/>
-          </a:p>
-        </p:txBody>
-      </p:sp>
-      <p:sp>
-        <p:nvSpPr>
-          <p:cNvPr id="13" name="Text 11"/>
-          <p:cNvSpPr txBox="1"/>
-          <p:nvPr/>
-        </p:nvSpPr>
-        <p:spPr>
-          <a:xfrm>
-            <a:off x="1417320" y="2999232"/>
-            <a:ext cx="4846320" cy="502920"/>
-          </a:xfrm>
-          <a:prstGeom prst="rect">
-            <a:avLst/>
-          </a:prstGeom>
-          <a:noFill/>
-          <a:ln/>
-        </p:spPr>
-        <p:txBody>
-          <a:bodyPr wrap="square" lIns="0" tIns="0" rIns="0" bIns="0" rtlCol="0" anchor="ctr"/>
-          <a:lstStyle/>
-          <a:p>
-            <a:pPr indent="0" marL="0">
-              <a:buNone/>
-            </a:pPr>
-            <a:r>
-              <a:rPr lang="en-US" sz="1250" dirty="0">
-                <a:solidFill>
-                  <a:schemeClr val="tx1"/>
-                </a:solidFill>
-              </a:rPr>
-              <a:t>final 혼입 35%. 1위와 점수가 가까운 런북을 함께 넣는 규칙, 맞는 런북이 없는 질문에도 런북이 들어가는 경우</a:t>
-            </a:r>
-            <a:endParaRPr lang="en-US" sz="1250" dirty="0"/>
-          </a:p>
-        </p:txBody>
-      </p:sp>
-      <p:sp>
-        <p:nvSpPr>
-          <p:cNvPr id="14" name="Text 12"/>
-          <p:cNvSpPr txBox="1"/>
-          <p:nvPr/>
-        </p:nvSpPr>
-        <p:spPr>
-          <a:xfrm>
-            <a:off x="6492240" y="2596896"/>
-            <a:ext cx="4937760" cy="868680"/>
-          </a:xfrm>
-          <a:prstGeom prst="rect">
-            <a:avLst/>
-          </a:prstGeom>
-          <a:noFill/>
-          <a:ln/>
-        </p:spPr>
-        <p:txBody>
-          <a:bodyPr wrap="square" lIns="0" tIns="0" rIns="0" bIns="0" rtlCol="0" anchor="ctr"/>
-          <a:lstStyle/>
-          <a:p>
-            <a:pPr indent="0" marL="0">
-              <a:buNone/>
-            </a:pPr>
-            <a:r>
-              <a:rPr lang="en-US" sz="1350" dirty="0">
-                <a:solidFill>
-                  <a:schemeClr val="accent6"/>
-                </a:solidFill>
-              </a:rPr>
-              <a:t>다음: 재순위(reranker), 질문 속 증상 수에 맞춘 투입 개수</a:t>
-            </a:r>
-            <a:endParaRPr lang="en-US" sz="1350" dirty="0"/>
-          </a:p>
-        </p:txBody>
-      </p:sp>
-      <p:sp>
-        <p:nvSpPr>
-          <p:cNvPr id="15" name="lim-2"/>
-          <p:cNvSpPr/>
-          <p:nvPr/>
-        </p:nvSpPr>
-        <p:spPr>
-          <a:xfrm>
-            <a:off x="548640" y="3694176"/>
-            <a:ext cx="11064240" cy="1078992"/>
-          </a:xfrm>
-          <a:prstGeom prst="roundRect">
-            <a:avLst>
-              <a:gd name="adj" fmla="val 10169"/>
-            </a:avLst>
-          </a:prstGeom>
-          <a:solidFill>
-            <a:schemeClr val="bg2"/>
-          </a:solidFill>
-          <a:ln w="12700">
-            <a:solidFill>
-              <a:schemeClr val="bg2"/>
-            </a:solidFill>
-            <a:prstDash val="solid"/>
-          </a:ln>
-        </p:spPr>
-      </p:sp>
-      <p:sp>
-        <p:nvSpPr>
-          <p:cNvPr id="16" name="lim-dot-2"/>
-          <p:cNvSpPr/>
-          <p:nvPr/>
-        </p:nvSpPr>
-        <p:spPr>
-          <a:xfrm>
-            <a:off x="777240" y="4023360"/>
-            <a:ext cx="411480" cy="411480"/>
-          </a:xfrm>
-          <a:prstGeom prst="ellipse">
-            <a:avLst/>
-          </a:prstGeom>
-          <a:solidFill>
-            <a:schemeClr val="accent1"/>
-          </a:solidFill>
-          <a:ln w="12700">
-            <a:solidFill>
-              <a:schemeClr val="accent1"/>
-            </a:solidFill>
-            <a:prstDash val="solid"/>
-          </a:ln>
-        </p:spPr>
-      </p:sp>
-      <p:sp>
-        <p:nvSpPr>
-          <p:cNvPr id="17" name="Text 15"/>
-          <p:cNvSpPr txBox="1"/>
-          <p:nvPr/>
-        </p:nvSpPr>
-        <p:spPr>
-          <a:xfrm>
-            <a:off x="777240" y="4023360"/>
-            <a:ext cx="411480" cy="411480"/>
-          </a:xfrm>
-          <a:prstGeom prst="rect">
-            <a:avLst/>
-          </a:prstGeom>
-          <a:noFill/>
-          <a:ln/>
-        </p:spPr>
-        <p:txBody>
-          <a:bodyPr wrap="square" lIns="0" tIns="0" rIns="0" bIns="0" rtlCol="0" anchor="ctr"/>
-          <a:lstStyle/>
-          <a:p>
-            <a:pPr algn="ctr" indent="0" marL="0">
-              <a:buNone/>
-            </a:pPr>
-            <a:r>
-              <a:rPr lang="en-US" sz="1600" b="1" dirty="0">
-                <a:solidFill>
-                  <a:schemeClr val="bg1"/>
-                </a:solidFill>
-              </a:rPr>
-              <a:t>!</a:t>
-            </a:r>
-            <a:endParaRPr lang="en-US" sz="1600" dirty="0"/>
-          </a:p>
-        </p:txBody>
-      </p:sp>
-      <p:sp>
-        <p:nvSpPr>
-          <p:cNvPr id="18" name="Text 16"/>
-          <p:cNvSpPr txBox="1"/>
-          <p:nvPr/>
-        </p:nvSpPr>
-        <p:spPr>
-          <a:xfrm>
-            <a:off x="1417320" y="3803904"/>
-            <a:ext cx="4846320" cy="384048"/>
-          </a:xfrm>
-          <a:prstGeom prst="rect">
-            <a:avLst/>
-          </a:prstGeom>
-          <a:noFill/>
-          <a:ln/>
-        </p:spPr>
-        <p:txBody>
-          <a:bodyPr wrap="square" lIns="0" tIns="0" rIns="0" bIns="0" rtlCol="0" anchor="ctr"/>
-          <a:lstStyle/>
-          <a:p>
-            <a:pPr indent="0" marL="0">
-              <a:buNone/>
-            </a:pPr>
-            <a:r>
-              <a:rPr lang="en-US" sz="1600" b="1" dirty="0">
-                <a:solidFill>
-                  <a:schemeClr val="tx2"/>
-                </a:solidFill>
-              </a:rPr>
-              <a:t>캐스케이드의 품질 대가</a:t>
-            </a:r>
-            <a:endParaRPr lang="en-US" sz="1600" dirty="0"/>
-          </a:p>
-        </p:txBody>
-      </p:sp>
-      <p:sp>
-        <p:nvSpPr>
-          <p:cNvPr id="19" name="Text 17"/>
-          <p:cNvSpPr txBox="1"/>
-          <p:nvPr/>
-        </p:nvSpPr>
-        <p:spPr>
-          <a:xfrm>
-            <a:off x="1417320" y="4206240"/>
-            <a:ext cx="4846320" cy="502920"/>
-          </a:xfrm>
-          <a:prstGeom prst="rect">
-            <a:avLst/>
-          </a:prstGeom>
-          <a:noFill/>
-          <a:ln/>
-        </p:spPr>
-        <p:txBody>
-          <a:bodyPr wrap="square" lIns="0" tIns="0" rIns="0" bIns="0" rtlCol="0" anchor="ctr"/>
-          <a:lstStyle/>
-          <a:p>
-            <a:pPr indent="0" marL="0">
-              <a:buNone/>
-            </a:pPr>
-            <a:r>
-              <a:rPr lang="en-US" sz="1250" dirty="0">
-                <a:solidFill>
-                  <a:schemeClr val="tx1"/>
-                </a:solidFill>
-              </a:rPr>
-              <a:t>어구 포함 -5%p (유의하지 않음). 저가 초안이 런북 문구를 덜 인용하는 것으로 추정 (미검증)</a:t>
-            </a:r>
-            <a:endParaRPr lang="en-US" sz="1250" dirty="0"/>
-          </a:p>
-        </p:txBody>
-      </p:sp>
-      <p:sp>
-        <p:nvSpPr>
-          <p:cNvPr id="20" name="Text 18"/>
-          <p:cNvSpPr txBox="1"/>
-          <p:nvPr/>
-        </p:nvSpPr>
-        <p:spPr>
-          <a:xfrm>
-            <a:off x="6492240" y="3803904"/>
-            <a:ext cx="4937760" cy="868680"/>
-          </a:xfrm>
-          <a:prstGeom prst="rect">
-            <a:avLst/>
-          </a:prstGeom>
-          <a:noFill/>
-          <a:ln/>
-        </p:spPr>
-        <p:txBody>
-          <a:bodyPr wrap="square" lIns="0" tIns="0" rIns="0" bIns="0" rtlCol="0" anchor="ctr"/>
-          <a:lstStyle/>
-          <a:p>
-            <a:pPr indent="0" marL="0">
-              <a:buNone/>
-            </a:pPr>
-            <a:r>
-              <a:rPr lang="en-US" sz="1350" dirty="0">
-                <a:solidFill>
-                  <a:schemeClr val="accent6"/>
-                </a:solidFill>
-              </a:rPr>
-              <a:t>다음: Judge 대신 결정적 어구 대조로 승급 기준을 정함</a:t>
-            </a:r>
-            <a:endParaRPr lang="en-US" sz="1350" dirty="0"/>
-          </a:p>
-        </p:txBody>
-      </p:sp>
-      <p:sp>
-        <p:nvSpPr>
-          <p:cNvPr id="21" name="lim-3"/>
-          <p:cNvSpPr/>
-          <p:nvPr/>
-        </p:nvSpPr>
-        <p:spPr>
-          <a:xfrm>
-            <a:off x="548640" y="4901184"/>
-            <a:ext cx="11064240" cy="1078992"/>
-          </a:xfrm>
-          <a:prstGeom prst="roundRect">
-            <a:avLst>
-              <a:gd name="adj" fmla="val 10169"/>
-            </a:avLst>
-          </a:prstGeom>
-          <a:solidFill>
-            <a:schemeClr val="bg2"/>
-          </a:solidFill>
-          <a:ln w="12700">
-            <a:solidFill>
-              <a:schemeClr val="bg2"/>
-            </a:solidFill>
-            <a:prstDash val="solid"/>
-          </a:ln>
-        </p:spPr>
-      </p:sp>
-      <p:sp>
-        <p:nvSpPr>
-          <p:cNvPr id="22" name="lim-dot-3"/>
-          <p:cNvSpPr/>
-          <p:nvPr/>
-        </p:nvSpPr>
-        <p:spPr>
-          <a:xfrm>
-            <a:off x="777240" y="5230368"/>
-            <a:ext cx="411480" cy="411480"/>
-          </a:xfrm>
-          <a:prstGeom prst="ellipse">
-            <a:avLst/>
-          </a:prstGeom>
-          <a:solidFill>
-            <a:schemeClr val="accent1"/>
-          </a:solidFill>
-          <a:ln w="12700">
-            <a:solidFill>
-              <a:schemeClr val="accent1"/>
-            </a:solidFill>
-            <a:prstDash val="solid"/>
-          </a:ln>
-        </p:spPr>
-      </p:sp>
-      <p:sp>
-        <p:nvSpPr>
-          <p:cNvPr id="23" name="Text 21"/>
-          <p:cNvSpPr txBox="1"/>
-          <p:nvPr/>
-        </p:nvSpPr>
-        <p:spPr>
-          <a:xfrm>
-            <a:off x="777240" y="5230368"/>
-            <a:ext cx="411480" cy="411480"/>
-          </a:xfrm>
-          <a:prstGeom prst="rect">
-            <a:avLst/>
-          </a:prstGeom>
-          <a:noFill/>
-          <a:ln/>
-        </p:spPr>
-        <p:txBody>
-          <a:bodyPr wrap="square" lIns="0" tIns="0" rIns="0" bIns="0" rtlCol="0" anchor="ctr"/>
-          <a:lstStyle/>
-          <a:p>
-            <a:pPr algn="ctr" indent="0" marL="0">
-              <a:buNone/>
-            </a:pPr>
-            <a:r>
-              <a:rPr lang="en-US" sz="1600" b="1" dirty="0">
-                <a:solidFill>
-                  <a:schemeClr val="bg1"/>
-                </a:solidFill>
-              </a:rPr>
-              <a:t>!</a:t>
-            </a:r>
-            <a:endParaRPr lang="en-US" sz="1600" dirty="0"/>
-          </a:p>
-        </p:txBody>
-      </p:sp>
-      <p:sp>
-        <p:nvSpPr>
-          <p:cNvPr id="24" name="Text 22"/>
-          <p:cNvSpPr txBox="1"/>
-          <p:nvPr/>
-        </p:nvSpPr>
-        <p:spPr>
-          <a:xfrm>
-            <a:off x="1417320" y="5010912"/>
-            <a:ext cx="4846320" cy="384048"/>
-          </a:xfrm>
-          <a:prstGeom prst="rect">
-            <a:avLst/>
-          </a:prstGeom>
-          <a:noFill/>
-          <a:ln/>
-        </p:spPr>
-        <p:txBody>
-          <a:bodyPr wrap="square" lIns="0" tIns="0" rIns="0" bIns="0" rtlCol="0" anchor="ctr"/>
-          <a:lstStyle/>
-          <a:p>
-            <a:pPr indent="0" marL="0">
-              <a:buNone/>
-            </a:pPr>
-            <a:r>
-              <a:rPr lang="en-US" sz="1600" b="1" dirty="0">
-                <a:solidFill>
-                  <a:schemeClr val="tx2"/>
-                </a:solidFill>
-              </a:rPr>
-              <a:t>평가 규모와 범위</a:t>
-            </a:r>
-            <a:endParaRPr lang="en-US" sz="1600" dirty="0"/>
-          </a:p>
-        </p:txBody>
-      </p:sp>
-      <p:sp>
-        <p:nvSpPr>
-          <p:cNvPr id="25" name="Text 23"/>
-          <p:cNvSpPr txBox="1"/>
-          <p:nvPr/>
-        </p:nvSpPr>
-        <p:spPr>
-          <a:xfrm>
-            <a:off x="1417320" y="5413248"/>
-            <a:ext cx="4846320" cy="502920"/>
-          </a:xfrm>
-          <a:prstGeom prst="rect">
-            <a:avLst/>
-          </a:prstGeom>
-          <a:noFill/>
-          <a:ln/>
-        </p:spPr>
-        <p:txBody>
-          <a:bodyPr wrap="square" lIns="0" tIns="0" rIns="0" bIns="0" rtlCol="0" anchor="ctr"/>
-          <a:lstStyle/>
-          <a:p>
-            <a:pPr indent="0" marL="0">
-              <a:buNone/>
-            </a:pPr>
-            <a:r>
-              <a:rPr lang="en-US" sz="1250" dirty="0">
-                <a:solidFill>
-                  <a:schemeClr val="tx1"/>
-                </a:solidFill>
-              </a:rPr>
-              <a:t>holdout 36건 x 3회 (1건 = 2.8%p). 평가 Judge 포화. 라우터는 개선 범위 밖</a:t>
-            </a:r>
-            <a:endParaRPr lang="en-US" sz="1250" dirty="0"/>
-          </a:p>
-        </p:txBody>
-      </p:sp>
-      <p:sp>
-        <p:nvSpPr>
-          <p:cNvPr id="26" name="Text 24"/>
-          <p:cNvSpPr txBox="1"/>
-          <p:nvPr/>
-        </p:nvSpPr>
-        <p:spPr>
-          <a:xfrm>
-            <a:off x="6492240" y="5010912"/>
-            <a:ext cx="4937760" cy="868680"/>
-          </a:xfrm>
-          <a:prstGeom prst="rect">
-            <a:avLst/>
-          </a:prstGeom>
-          <a:noFill/>
-          <a:ln/>
-        </p:spPr>
-        <p:txBody>
-          <a:bodyPr wrap="square" lIns="0" tIns="0" rIns="0" bIns="0" rtlCol="0" anchor="ctr"/>
-          <a:lstStyle/>
-          <a:p>
-            <a:pPr indent="0" marL="0">
-              <a:buNone/>
-            </a:pPr>
-            <a:r>
-              <a:rPr lang="en-US" sz="1350" dirty="0">
-                <a:solidFill>
-                  <a:schemeClr val="accent6"/>
-                </a:solidFill>
-              </a:rPr>
-              <a:t>다음: 질의 확대, 라우팅 개선을 같은 체계로 재측정</a:t>
-            </a:r>
-            <a:endParaRPr lang="en-US" sz="1350" dirty="0"/>
-          </a:p>
-        </p:txBody>
-      </p:sp>
-      <p:sp>
-        <p:nvSpPr>
-          <p:cNvPr id="25" name="Slide Number Placeholder 0"/>
-          <p:cNvSpPr>
-            <a:spLocks noGrp="1"/>
-          </p:cNvSpPr>
-          <p:nvPr>
-            <p:ph type="sldNum" sz="quarter" idx="4294967295"/>
-          </p:nvPr>
-        </p:nvSpPr>
-        <p:spPr>
-          <a:xfrm>
-            <a:off x="11155680" y="6400800"/>
-            <a:ext cx="457200" cy="274320"/>
-          </a:xfrm>
-          <a:prstGeom prst="rect">
-            <a:avLst/>
-          </a:prstGeom>
-          <a:extLst>
-            <a:ext uri="{C572A759-6A51-4108-AA02-DFA0A04FC94B}">
-              <ma14:wrappingTextBoxFlag xmlns:ma14="http://schemas.microsoft.com/office/mac/drawingml/2011/main" val="0"/>
-            </a:ext>
-          </a:extLst>
-        </p:spPr>
-        <p:txBody>
-          <a:bodyPr/>
-          <a:lstStyle>
-            <a:lvl1pPr>
-              <a:defRPr sz="1000">
-                <a:solidFill>
-                  <a:schemeClr val="accent3"/>
-                </a:solidFill>
-              </a:defRPr>
-            </a:lvl1pPr>
-          </a:lstStyle>
-          <a:p>
-            <a:pPr algn="r"/>
-            <a:fld id="{F7021451-1387-4CA6-816F-3879F97B5CBC}" type="slidenum">
-              <a:rPr b="0" lang="en-US"/>
-              <a:t>15</a:t>
-            </a:fld>
-            <a:endParaRPr lang="en-US"/>
-          </a:p>
-        </p:txBody>
-      </p:sp>
-    </p:spTree>
-  </p:cSld>
-  <p:clrMapOvr>
-    <a:masterClrMapping/>
-  </p:clrMapOvr>
-</p:sld>
-</file>
-
-<file path=ppt/slides/slide2.xml><?xml version="1.0" encoding="utf-8"?>
-<p:sld xmlns:a="http://schemas.openxmlformats.org/drawingml/2006/main" xmlns:r="http://schemas.openxmlformats.org/officeDocument/2006/relationships" xmlns:p="http://schemas.openxmlformats.org/presentationml/2006/main">
-  <p:cSld name="Slide 2">
-    <p:spTree>
-      <p:nvGrpSpPr>
-        <p:cNvPr id="1" name=""/>
-        <p:cNvGrpSpPr/>
-        <p:nvPr/>
-      </p:nvGrpSpPr>
-      <p:grpSpPr>
-        <a:xfrm>
-          <a:off x="0" y="0"/>
-          <a:ext cx="0" cy="0"/>
-          <a:chOff x="0" y="0"/>
-          <a:chExt cx="0" cy="0"/>
-        </a:xfrm>
-      </p:grpSpPr>
-      <p:sp>
-        <p:nvSpPr>
-          <p:cNvPr id="2" name="Text 0"/>
-          <p:cNvSpPr/>
-          <p:nvPr>
-            <p:ph idx="100" type="title" hasCustomPrompt="1"/>
-          </p:nvPr>
-        </p:nvSpPr>
-        <p:spPr>
-          <a:xfrm>
-            <a:off x="548640" y="320040"/>
-            <a:ext cx="11064240" cy="777240"/>
-          </a:xfrm>
-          <a:prstGeom prst="rect">
-            <a:avLst/>
-          </a:prstGeom>
-          <a:noFill/>
-          <a:ln/>
-        </p:spPr>
-        <p:txBody>
-          <a:bodyPr wrap="square" lIns="0" tIns="0" rIns="0" bIns="0" rtlCol="0" anchor="ctr"/>
-          <a:lstStyle/>
-          <a:p>
-            <a:pPr algn="l" indent="0" marL="0">
-              <a:buNone/>
-            </a:pPr>
-            <a:r>
-              <a:rPr lang="en-US" sz="2800" b="1" dirty="0">
-                <a:solidFill>
-                  <a:schemeClr val="tx2"/>
-                </a:solidFill>
-              </a:rPr>
-              <a:t>결론: 조치 정확도는 RAG가, 비용은 캐스케이드가 낮췄다</a:t>
-            </a:r>
-            <a:endParaRPr lang="en-US" sz="2800" dirty="0"/>
-          </a:p>
-        </p:txBody>
-      </p:sp>
-      <p:sp>
-        <p:nvSpPr>
-          <p:cNvPr id="3" name="stat-miss"/>
-          <p:cNvSpPr/>
-          <p:nvPr/>
-        </p:nvSpPr>
-        <p:spPr>
-          <a:xfrm>
-            <a:off x="548640" y="1371600"/>
-            <a:ext cx="3520440" cy="1828800"/>
-          </a:xfrm>
-          <a:prstGeom prst="roundRect">
-            <a:avLst>
-              <a:gd name="adj" fmla="val 6000"/>
-            </a:avLst>
-          </a:prstGeom>
-          <a:solidFill>
-            <a:schemeClr val="bg2"/>
-          </a:solidFill>
-          <a:ln w="12700">
-            <a:solidFill>
-              <a:schemeClr val="bg2"/>
-            </a:solidFill>
-            <a:prstDash val="solid"/>
-          </a:ln>
-        </p:spPr>
-      </p:sp>
-      <p:sp>
-        <p:nvSpPr>
-          <p:cNvPr id="4" name="Text 2"/>
-          <p:cNvSpPr txBox="1"/>
-          <p:nvPr/>
-        </p:nvSpPr>
-        <p:spPr>
-          <a:xfrm>
-            <a:off x="822960" y="1572768"/>
-            <a:ext cx="2971800" cy="868680"/>
-          </a:xfrm>
-          <a:prstGeom prst="rect">
-            <a:avLst/>
-          </a:prstGeom>
-          <a:noFill/>
-          <a:ln/>
-        </p:spPr>
-        <p:txBody>
-          <a:bodyPr wrap="square" lIns="0" tIns="0" rIns="0" bIns="0" rtlCol="0" anchor="ctr"/>
-          <a:lstStyle/>
-          <a:p>
-            <a:pPr indent="0" marL="0">
-              <a:buNone/>
-            </a:pPr>
-            <a:r>
-              <a:rPr lang="en-US" sz="3600" b="1" dirty="0">
-                <a:solidFill>
-                  <a:schemeClr val="accent2"/>
-                </a:solidFill>
-              </a:rPr>
-              <a:t>56% → 9%</a:t>
-            </a:r>
-            <a:endParaRPr lang="en-US" sz="3600" dirty="0"/>
-          </a:p>
-        </p:txBody>
-      </p:sp>
-      <p:sp>
-        <p:nvSpPr>
-          <p:cNvPr id="5" name="Text 3"/>
-          <p:cNvSpPr txBox="1"/>
-          <p:nvPr/>
-        </p:nvSpPr>
-        <p:spPr>
-          <a:xfrm>
-            <a:off x="822960" y="2468880"/>
-            <a:ext cx="2971800" cy="640080"/>
-          </a:xfrm>
-          <a:prstGeom prst="rect">
-            <a:avLst/>
-          </a:prstGeom>
-          <a:noFill/>
-          <a:ln/>
-        </p:spPr>
-        <p:txBody>
-          <a:bodyPr wrap="square" lIns="0" tIns="0" rIns="0" bIns="0" rtlCol="0" anchor="t"/>
-          <a:lstStyle/>
-          <a:p>
-            <a:pPr indent="0" marL="0">
-              <a:buNone/>
-            </a:pPr>
-            <a:r>
-              <a:rPr lang="en-US" sz="1350" dirty="0">
-                <a:solidFill>
-                  <a:schemeClr val="tx1"/>
-                </a:solidFill>
-              </a:rPr>
-              <a:t>정답 런북 누락률 (base → final)</a:t>
-            </a:r>
-            <a:endParaRPr lang="en-US" sz="1350" dirty="0"/>
-          </a:p>
-          <a:p>
-            <a:pPr indent="0" marL="0">
-              <a:buNone/>
-            </a:pPr>
-            <a:r>
-              <a:rPr lang="en-US" sz="1350" dirty="0">
-                <a:solidFill>
-                  <a:schemeClr val="tx1"/>
-                </a:solidFill>
-              </a:rPr>
-              <a:t>= 맞는 조치를 권고하지 못할 위험</a:t>
-            </a:r>
-            <a:endParaRPr lang="en-US" sz="1350" dirty="0"/>
-          </a:p>
-        </p:txBody>
-      </p:sp>
-      <p:sp>
-        <p:nvSpPr>
-          <p:cNvPr id="6" name="stat-cost"/>
-          <p:cNvSpPr/>
-          <p:nvPr/>
-        </p:nvSpPr>
-        <p:spPr>
-          <a:xfrm>
-            <a:off x="4334256" y="1371600"/>
-            <a:ext cx="3520440" cy="1828800"/>
-          </a:xfrm>
-          <a:prstGeom prst="roundRect">
-            <a:avLst>
-              <a:gd name="adj" fmla="val 6000"/>
-            </a:avLst>
-          </a:prstGeom>
-          <a:solidFill>
-            <a:schemeClr val="bg2"/>
-          </a:solidFill>
-          <a:ln w="12700">
-            <a:solidFill>
-              <a:schemeClr val="bg2"/>
-            </a:solidFill>
-            <a:prstDash val="solid"/>
-          </a:ln>
-        </p:spPr>
-      </p:sp>
-      <p:sp>
-        <p:nvSpPr>
-          <p:cNvPr id="7" name="Text 5"/>
-          <p:cNvSpPr txBox="1"/>
-          <p:nvPr/>
-        </p:nvSpPr>
-        <p:spPr>
-          <a:xfrm>
-            <a:off x="4608576" y="1572768"/>
-            <a:ext cx="2971800" cy="868680"/>
-          </a:xfrm>
-          <a:prstGeom prst="rect">
-            <a:avLst/>
-          </a:prstGeom>
-          <a:noFill/>
-          <a:ln/>
-        </p:spPr>
-        <p:txBody>
-          <a:bodyPr wrap="square" lIns="0" tIns="0" rIns="0" bIns="0" rtlCol="0" anchor="ctr"/>
-          <a:lstStyle/>
-          <a:p>
-            <a:pPr indent="0" marL="0">
-              <a:buNone/>
-            </a:pPr>
-            <a:r>
-              <a:rPr lang="en-US" sz="3600" b="1" dirty="0">
-                <a:solidFill>
-                  <a:schemeClr val="accent6"/>
-                </a:solidFill>
-              </a:rPr>
-              <a:t>-84%</a:t>
-            </a:r>
-            <a:endParaRPr lang="en-US" sz="3600" dirty="0"/>
-          </a:p>
-        </p:txBody>
-      </p:sp>
-      <p:sp>
-        <p:nvSpPr>
-          <p:cNvPr id="8" name="Text 6"/>
-          <p:cNvSpPr txBox="1"/>
-          <p:nvPr/>
-        </p:nvSpPr>
-        <p:spPr>
-          <a:xfrm>
-            <a:off x="4608576" y="2468880"/>
-            <a:ext cx="2971800" cy="640080"/>
-          </a:xfrm>
-          <a:prstGeom prst="rect">
-            <a:avLst/>
-          </a:prstGeom>
-          <a:noFill/>
-          <a:ln/>
-        </p:spPr>
-        <p:txBody>
-          <a:bodyPr wrap="square" lIns="0" tIns="0" rIns="0" bIns="0" rtlCol="0" anchor="t"/>
-          <a:lstStyle/>
-          <a:p>
-            <a:pPr indent="0" marL="0">
-              <a:buNone/>
-            </a:pPr>
-            <a:r>
-              <a:rPr lang="en-US" sz="1350" dirty="0">
-                <a:solidFill>
-                  <a:schemeClr val="tx1"/>
-                </a:solidFill>
-              </a:rPr>
-              <a:t>장애 1건당 처리 비용 $0.00343 → $0.00057</a:t>
-            </a:r>
-            <a:endParaRPr lang="en-US" sz="1350" dirty="0"/>
-          </a:p>
-          <a:p>
-            <a:pPr indent="0" marL="0">
-              <a:buNone/>
-            </a:pPr>
-            <a:r>
-              <a:rPr lang="en-US" sz="1350" dirty="0">
-                <a:solidFill>
-                  <a:schemeClr val="tx1"/>
-                </a:solidFill>
-              </a:rPr>
-              <a:t>(캐스케이드만 켜면 -73%)</a:t>
-            </a:r>
-            <a:endParaRPr lang="en-US" sz="1350" dirty="0"/>
-          </a:p>
-        </p:txBody>
-      </p:sp>
-      <p:sp>
-        <p:nvSpPr>
-          <p:cNvPr id="9" name="stat-judge"/>
-          <p:cNvSpPr/>
-          <p:nvPr/>
-        </p:nvSpPr>
-        <p:spPr>
-          <a:xfrm>
-            <a:off x="8119872" y="1371600"/>
-            <a:ext cx="3520440" cy="1828800"/>
-          </a:xfrm>
-          <a:prstGeom prst="roundRect">
-            <a:avLst>
-              <a:gd name="adj" fmla="val 6000"/>
-            </a:avLst>
-          </a:prstGeom>
-          <a:solidFill>
-            <a:schemeClr val="bg2"/>
-          </a:solidFill>
-          <a:ln w="12700">
-            <a:solidFill>
-              <a:schemeClr val="bg2"/>
-            </a:solidFill>
-            <a:prstDash val="solid"/>
-          </a:ln>
-        </p:spPr>
-      </p:sp>
-      <p:sp>
-        <p:nvSpPr>
-          <p:cNvPr id="10" name="Text 8"/>
-          <p:cNvSpPr txBox="1"/>
-          <p:nvPr/>
-        </p:nvSpPr>
-        <p:spPr>
-          <a:xfrm>
-            <a:off x="8394192" y="1572768"/>
-            <a:ext cx="2971800" cy="868680"/>
-          </a:xfrm>
-          <a:prstGeom prst="rect">
-            <a:avLst/>
-          </a:prstGeom>
-          <a:noFill/>
-          <a:ln/>
-        </p:spPr>
-        <p:txBody>
-          <a:bodyPr wrap="square" lIns="0" tIns="0" rIns="0" bIns="0" rtlCol="0" anchor="ctr"/>
-          <a:lstStyle/>
-          <a:p>
-            <a:pPr indent="0" marL="0">
-              <a:buNone/>
-            </a:pPr>
-            <a:r>
-              <a:rPr lang="en-US" sz="3600" b="1" dirty="0">
-                <a:solidFill>
-                  <a:schemeClr val="accent1"/>
-                </a:solidFill>
-              </a:rPr>
-              <a:t>개선 미확인</a:t>
-            </a:r>
-            <a:endParaRPr lang="en-US" sz="3600" dirty="0"/>
-          </a:p>
-        </p:txBody>
-      </p:sp>
-      <p:sp>
-        <p:nvSpPr>
-          <p:cNvPr id="11" name="Text 9"/>
-          <p:cNvSpPr txBox="1"/>
-          <p:nvPr/>
-        </p:nvSpPr>
-        <p:spPr>
-          <a:xfrm>
-            <a:off x="8394192" y="2468880"/>
-            <a:ext cx="2971800" cy="640080"/>
-          </a:xfrm>
-          <a:prstGeom prst="rect">
-            <a:avLst/>
-          </a:prstGeom>
-          <a:noFill/>
-          <a:ln/>
-        </p:spPr>
-        <p:txBody>
-          <a:bodyPr wrap="square" lIns="0" tIns="0" rIns="0" bIns="0" rtlCol="0" anchor="t"/>
-          <a:lstStyle/>
-          <a:p>
-            <a:pPr indent="0" marL="0">
-              <a:buNone/>
-            </a:pPr>
-            <a:r>
-              <a:rPr lang="en-US" sz="1350" dirty="0">
-                <a:solidFill>
-                  <a:schemeClr val="tx1"/>
-                </a:solidFill>
-              </a:rPr>
-              <a:t>LLM Judge 단독: 품질 향상 확인 안 됨</a:t>
-            </a:r>
-            <a:endParaRPr lang="en-US" sz="1350" dirty="0"/>
-          </a:p>
-          <a:p>
-            <a:pPr indent="0" marL="0">
-              <a:buNone/>
-            </a:pPr>
-            <a:r>
-              <a:rPr lang="en-US" sz="1350" dirty="0">
-                <a:solidFill>
-                  <a:schemeClr val="tx1"/>
-                </a:solidFill>
-              </a:rPr>
-              <a:t>지연은 +2.3초 (유의)</a:t>
-            </a:r>
-            <a:endParaRPr lang="en-US" sz="1350" dirty="0"/>
-          </a:p>
-        </p:txBody>
-      </p:sp>
-      <p:sp>
-        <p:nvSpPr>
-          <p:cNvPr id="12" name="method"/>
-          <p:cNvSpPr/>
-          <p:nvPr/>
-        </p:nvSpPr>
-        <p:spPr>
-          <a:xfrm>
-            <a:off x="548640" y="3520440"/>
-            <a:ext cx="11064240" cy="1783080"/>
-          </a:xfrm>
-          <a:prstGeom prst="roundRect">
-            <a:avLst>
-              <a:gd name="adj" fmla="val 6154"/>
-            </a:avLst>
-          </a:prstGeom>
-          <a:solidFill>
-            <a:schemeClr val="bg2"/>
-          </a:solidFill>
-          <a:ln w="12700">
-            <a:solidFill>
-              <a:schemeClr val="bg2"/>
-            </a:solidFill>
-            <a:prstDash val="solid"/>
-          </a:ln>
-        </p:spPr>
-      </p:sp>
-      <p:sp>
-        <p:nvSpPr>
-          <p:cNvPr id="13" name="Text 11"/>
-          <p:cNvSpPr txBox="1"/>
-          <p:nvPr/>
-        </p:nvSpPr>
-        <p:spPr>
-          <a:xfrm>
-            <a:off x="822960" y="3657600"/>
-            <a:ext cx="10515600" cy="1600200"/>
-          </a:xfrm>
-          <a:prstGeom prst="rect">
-            <a:avLst/>
-          </a:prstGeom>
-          <a:noFill/>
-          <a:ln/>
-        </p:spPr>
-        <p:txBody>
-          <a:bodyPr wrap="square" lIns="0" tIns="0" rIns="0" bIns="0" rtlCol="0" anchor="t"/>
-          <a:lstStyle/>
-          <a:p>
-            <a:pPr indent="0" marL="0">
-              <a:spcAft>
-                <a:spcPts val="500"/>
-              </a:spcAft>
-              <a:buNone/>
-            </a:pPr>
-            <a:r>
-              <a:rPr lang="en-US" sz="1600" b="1" dirty="0">
-                <a:solidFill>
-                  <a:srgbClr val="16202C"/>
-                </a:solidFill>
-              </a:rPr>
-              <a:t>어떻게 증명했나</a:t>
-            </a:r>
-            <a:endParaRPr lang="en-US" sz="1450" dirty="0"/>
-          </a:p>
-          <a:p>
-            <a:pPr marL="342900" indent="-342900">
-              <a:spcAft>
-                <a:spcPts val="500"/>
-              </a:spcAft>
-              <a:buSzPct val="100000"/>
-              <a:buChar char="•"/>
-            </a:pPr>
-            <a:r>
-              <a:rPr lang="en-US" sz="1450" dirty="0">
-                <a:solidFill>
-                  <a:schemeClr val="tx1"/>
-                </a:solidFill>
-              </a:rPr>
-              <a:t>평가셋 60건을 dev 24건(기준값 조정용)과 holdout 36건(조정 전에 고정, 최종 보고용)으로 나눴다. 이 덱의 수치는 모두 holdout.</a:t>
-            </a:r>
-            <a:endParaRPr lang="en-US" sz="1450" dirty="0"/>
-          </a:p>
-          <a:p>
-            <a:pPr marL="342900" indent="-342900">
-              <a:spcAft>
-                <a:spcPts val="500"/>
-              </a:spcAft>
-              <a:buSzPct val="100000"/>
-              <a:buChar char="•"/>
-            </a:pPr>
-            <a:r>
-              <a:rPr lang="en-US" sz="1450" dirty="0">
-                <a:solidFill>
-                  <a:schemeClr val="tx1"/>
-                </a:solidFill>
-              </a:rPr>
-              <a:t>개선을 하나씩 켠 7구성을 각 3회 반복하고, 구성 간 차이는 같은 질의끼리 짝지은 bootstrap 95% 신뢰구간으로 판정했다.</a:t>
-            </a:r>
-            <a:endParaRPr lang="en-US" sz="1450" dirty="0"/>
-          </a:p>
-          <a:p>
-            <a:pPr marL="342900" indent="-342900">
-              <a:spcAft>
-                <a:spcPts val="500"/>
-              </a:spcAft>
-              <a:buSzPct val="100000"/>
-              <a:buChar char="•"/>
-            </a:pPr>
-            <a:r>
-              <a:rPr lang="en-US" sz="1450" dirty="0">
-                <a:solidFill>
-                  <a:schemeClr val="tx1"/>
-                </a:solidFill>
-              </a:rPr>
-              <a:t>평가자(LLM Judge)가 관대할 수 있어, Judge와 무관한 결정적 지표(정답 런북 누락·혼입, 런북 어구 포함)로 결론을 냈다.</a:t>
-            </a:r>
-            <a:endParaRPr lang="en-US" sz="1450" dirty="0"/>
-          </a:p>
-        </p:txBody>
-      </p:sp>
-      <p:sp>
-        <p:nvSpPr>
-          <p:cNvPr id="14" name="Text 12"/>
-          <p:cNvSpPr txBox="1"/>
-          <p:nvPr/>
-        </p:nvSpPr>
-        <p:spPr>
-          <a:xfrm>
-            <a:off x="548640" y="6053328"/>
-            <a:ext cx="11064240" cy="274320"/>
-          </a:xfrm>
-          <a:prstGeom prst="rect">
-            <a:avLst/>
-          </a:prstGeom>
-          <a:noFill/>
-          <a:ln/>
-        </p:spPr>
-        <p:txBody>
-          <a:bodyPr wrap="square" lIns="0" tIns="0" rIns="0" bIns="0" rtlCol="0" anchor="ctr"/>
-          <a:lstStyle/>
-          <a:p>
-            <a:pPr indent="0" marL="0">
-              <a:buNone/>
-            </a:pPr>
-            <a:r>
-              <a:rPr lang="en-US" sz="1050" dirty="0">
-                <a:solidFill>
-                  <a:schemeClr val="accent3"/>
-                </a:solidFill>
-              </a:rPr>
-              <a:t>출처: results/*_latest.json (7구성 x 60건 x 3회 = 1,260회, 실행 오류 0), results/stats_holdout.json, eval/extra_metrics.py</a:t>
-            </a:r>
-            <a:endParaRPr lang="en-US" sz="1050" dirty="0"/>
-          </a:p>
-        </p:txBody>
-      </p:sp>
-      <p:sp>
-        <p:nvSpPr>
-          <p:cNvPr id="25" name="Slide Number Placeholder 0"/>
-          <p:cNvSpPr>
-            <a:spLocks noGrp="1"/>
-          </p:cNvSpPr>
-          <p:nvPr>
-            <p:ph type="sldNum" sz="quarter" idx="4294967295"/>
-          </p:nvPr>
-        </p:nvSpPr>
-        <p:spPr>
-          <a:xfrm>
-            <a:off x="11155680" y="6400800"/>
-            <a:ext cx="457200" cy="274320"/>
-          </a:xfrm>
-          <a:prstGeom prst="rect">
-            <a:avLst/>
-          </a:prstGeom>
-          <a:extLst>
-            <a:ext uri="{C572A759-6A51-4108-AA02-DFA0A04FC94B}">
-              <ma14:wrappingTextBoxFlag xmlns:ma14="http://schemas.microsoft.com/office/mac/drawingml/2011/main" val="0"/>
-            </a:ext>
-          </a:extLst>
-        </p:spPr>
-        <p:txBody>
-          <a:bodyPr/>
-          <a:lstStyle>
-            <a:lvl1pPr>
-              <a:defRPr sz="1000">
-                <a:solidFill>
-                  <a:schemeClr val="accent3"/>
-                </a:solidFill>
-              </a:defRPr>
-            </a:lvl1pPr>
-          </a:lstStyle>
-          <a:p>
-            <a:pPr algn="r"/>
-            <a:fld id="{F7021451-1387-4CA6-816F-3879F97B5CBC}" type="slidenum">
-              <a:rPr b="0" lang="en-US"/>
-              <a:t>2</a:t>
-            </a:fld>
-            <a:endParaRPr lang="en-US"/>
-          </a:p>
-        </p:txBody>
-      </p:sp>
-    </p:spTree>
-  </p:cSld>
-  <p:clrMapOvr>
-    <a:masterClrMapping/>
-  </p:clrMapOvr>
-</p:sld>
-</file>
-
-<file path=ppt/slides/slide4.xml><?xml version="1.0" encoding="utf-8"?>
-<p:sld xmlns:a="http://schemas.openxmlformats.org/drawingml/2006/main" xmlns:r="http://schemas.openxmlformats.org/officeDocument/2006/relationships" xmlns:p="http://schemas.openxmlformats.org/presentationml/2006/main">
-  <p:cSld name="Slide 4">
-    <p:spTree>
-      <p:nvGrpSpPr>
-        <p:cNvPr id="1" name=""/>
-        <p:cNvGrpSpPr/>
-        <p:nvPr/>
-      </p:nvGrpSpPr>
-      <p:grpSpPr>
-        <a:xfrm>
-          <a:off x="0" y="0"/>
-          <a:ext cx="0" cy="0"/>
-          <a:chOff x="0" y="0"/>
-          <a:chExt cx="0" cy="0"/>
-        </a:xfrm>
-      </p:grpSpPr>
-      <p:sp>
-        <p:nvSpPr>
-          <p:cNvPr id="2" name="Text 0"/>
-          <p:cNvSpPr/>
-          <p:nvPr>
-            <p:ph idx="100" type="title" hasCustomPrompt="1"/>
-          </p:nvPr>
-        </p:nvSpPr>
-        <p:spPr>
-          <a:xfrm>
-            <a:off x="548640" y="320040"/>
-            <a:ext cx="11064240" cy="777240"/>
-          </a:xfrm>
-          <a:prstGeom prst="rect">
-            <a:avLst/>
-          </a:prstGeom>
-          <a:noFill/>
-          <a:ln/>
-        </p:spPr>
-        <p:txBody>
-          <a:bodyPr wrap="square" lIns="0" tIns="0" rIns="0" bIns="0" rtlCol="0" anchor="ctr"/>
-          <a:lstStyle/>
-          <a:p>
-            <a:pPr algn="l" indent="0" marL="0">
-              <a:buNone/>
-            </a:pPr>
-            <a:r>
-              <a:rPr lang="en-US" sz="2800" b="1" dirty="0">
-                <a:solidFill>
-                  <a:schemeClr val="tx2"/>
-                </a:solidFill>
-              </a:rPr>
-              <a:t>문제 1: base는 질문을 읽지 않고, 알림 키워드로 런북을 고른다</a:t>
-            </a:r>
-            <a:endParaRPr lang="en-US" sz="2800" dirty="0"/>
-          </a:p>
-        </p:txBody>
-      </p:sp>
-      <p:sp>
-        <p:nvSpPr>
-          <p:cNvPr id="3" name="flow-0"/>
-          <p:cNvSpPr/>
-          <p:nvPr/>
-        </p:nvSpPr>
-        <p:spPr>
-          <a:xfrm>
-            <a:off x="548640" y="1371600"/>
-            <a:ext cx="2468880" cy="1737360"/>
-          </a:xfrm>
-          <a:prstGeom prst="roundRect">
-            <a:avLst>
-              <a:gd name="adj" fmla="val 6316"/>
-            </a:avLst>
-          </a:prstGeom>
-          <a:solidFill>
-            <a:schemeClr val="bg2"/>
-          </a:solidFill>
-          <a:ln w="12700">
-            <a:solidFill>
-              <a:schemeClr val="bg2"/>
-            </a:solidFill>
-            <a:prstDash val="solid"/>
-          </a:ln>
-        </p:spPr>
-      </p:sp>
-      <p:sp>
-        <p:nvSpPr>
-          <p:cNvPr id="4" name="Text 2"/>
-          <p:cNvSpPr txBox="1"/>
-          <p:nvPr/>
-        </p:nvSpPr>
-        <p:spPr>
-          <a:xfrm>
-            <a:off x="731520" y="1508760"/>
-            <a:ext cx="2103120" cy="365760"/>
-          </a:xfrm>
-          <a:prstGeom prst="rect">
-            <a:avLst/>
-          </a:prstGeom>
-          <a:noFill/>
-          <a:ln/>
-        </p:spPr>
-        <p:txBody>
-          <a:bodyPr wrap="square" lIns="0" tIns="0" rIns="0" bIns="0" rtlCol="0" anchor="ctr"/>
-          <a:lstStyle/>
-          <a:p>
-            <a:pPr indent="0" marL="0">
-              <a:buNone/>
-            </a:pPr>
-            <a:r>
-              <a:rPr lang="en-US" sz="1400" b="1" dirty="0">
-                <a:solidFill>
-                  <a:schemeClr val="tx2"/>
-                </a:solidFill>
-              </a:rPr>
-              <a:t>사용자 질의</a:t>
-            </a:r>
-            <a:endParaRPr lang="en-US" sz="1400" dirty="0"/>
-          </a:p>
-        </p:txBody>
-      </p:sp>
-      <p:sp>
-        <p:nvSpPr>
-          <p:cNvPr id="5" name="Text 3"/>
-          <p:cNvSpPr txBox="1"/>
-          <p:nvPr/>
-        </p:nvSpPr>
-        <p:spPr>
-          <a:xfrm>
-            <a:off x="731520" y="1920240"/>
-            <a:ext cx="2103120" cy="1097280"/>
-          </a:xfrm>
-          <a:prstGeom prst="rect">
-            <a:avLst/>
-          </a:prstGeom>
-          <a:noFill/>
-          <a:ln/>
-        </p:spPr>
-        <p:txBody>
-          <a:bodyPr wrap="square" lIns="0" tIns="0" rIns="0" bIns="0" rtlCol="0" anchor="t"/>
-          <a:lstStyle/>
-          <a:p>
-            <a:pPr indent="0" marL="0">
-              <a:buNone/>
-            </a:pPr>
-            <a:r>
-              <a:rPr lang="en-US" sz="1500" dirty="0">
-                <a:solidFill>
-                  <a:schemeClr val="tx1"/>
-                </a:solidFill>
-              </a:rPr>
-              <a:t>"DB 프라이머리가</a:t>
-            </a:r>
-            <a:endParaRPr lang="en-US" sz="1500" dirty="0"/>
-          </a:p>
-          <a:p>
-            <a:pPr indent="0" marL="0">
-              <a:buNone/>
-            </a:pPr>
-            <a:r>
-              <a:rPr lang="en-US" sz="1500" dirty="0">
-                <a:solidFill>
-                  <a:schemeClr val="tx1"/>
-                </a:solidFill>
-              </a:rPr>
-              <a:t>다운됐습니다"</a:t>
-            </a:r>
-            <a:endParaRPr lang="en-US" sz="1500" dirty="0"/>
-          </a:p>
-        </p:txBody>
-      </p:sp>
-      <p:sp>
-        <p:nvSpPr>
-          <p:cNvPr id="6" name="arrow-0"/>
-          <p:cNvSpPr/>
-          <p:nvPr/>
-        </p:nvSpPr>
-        <p:spPr>
-          <a:xfrm>
-            <a:off x="3063240" y="2057400"/>
-            <a:ext cx="274320" cy="365760"/>
-          </a:xfrm>
-          <a:prstGeom prst="rightArrow">
-            <a:avLst/>
-          </a:prstGeom>
-          <a:solidFill>
-            <a:schemeClr val="accent3"/>
-          </a:solidFill>
-          <a:ln w="12700">
-            <a:solidFill>
-              <a:schemeClr val="accent3"/>
-            </a:solidFill>
-            <a:prstDash val="solid"/>
-          </a:ln>
-        </p:spPr>
-      </p:sp>
-      <p:sp>
-        <p:nvSpPr>
-          <p:cNvPr id="7" name="flow-1"/>
-          <p:cNvSpPr/>
-          <p:nvPr/>
-        </p:nvSpPr>
-        <p:spPr>
-          <a:xfrm>
-            <a:off x="3383280" y="1371600"/>
-            <a:ext cx="2468880" cy="1737360"/>
-          </a:xfrm>
-          <a:prstGeom prst="roundRect">
-            <a:avLst>
-              <a:gd name="adj" fmla="val 6316"/>
-            </a:avLst>
-          </a:prstGeom>
-          <a:solidFill>
-            <a:schemeClr val="bg2"/>
-          </a:solidFill>
-          <a:ln w="12700">
-            <a:solidFill>
-              <a:schemeClr val="bg2"/>
-            </a:solidFill>
-            <a:prstDash val="solid"/>
-          </a:ln>
-        </p:spPr>
-      </p:sp>
-      <p:sp>
-        <p:nvSpPr>
-          <p:cNvPr id="8" name="Text 6"/>
-          <p:cNvSpPr txBox="1"/>
-          <p:nvPr/>
-        </p:nvSpPr>
-        <p:spPr>
-          <a:xfrm>
-            <a:off x="3566160" y="1508760"/>
-            <a:ext cx="2103120" cy="365760"/>
-          </a:xfrm>
-          <a:prstGeom prst="rect">
-            <a:avLst/>
-          </a:prstGeom>
-          <a:noFill/>
-          <a:ln/>
-        </p:spPr>
-        <p:txBody>
-          <a:bodyPr wrap="square" lIns="0" tIns="0" rIns="0" bIns="0" rtlCol="0" anchor="ctr"/>
-          <a:lstStyle/>
-          <a:p>
-            <a:pPr indent="0" marL="0">
-              <a:buNone/>
-            </a:pPr>
-            <a:r>
-              <a:rPr lang="en-US" sz="1400" b="1" dirty="0">
-                <a:solidFill>
-                  <a:schemeClr val="tx2"/>
-                </a:solidFill>
-              </a:rPr>
-              <a:t>planner</a:t>
-            </a:r>
-            <a:endParaRPr lang="en-US" sz="1400" dirty="0"/>
-          </a:p>
-        </p:txBody>
-      </p:sp>
-      <p:sp>
-        <p:nvSpPr>
-          <p:cNvPr id="9" name="Text 7"/>
-          <p:cNvSpPr txBox="1"/>
-          <p:nvPr/>
-        </p:nvSpPr>
-        <p:spPr>
-          <a:xfrm>
-            <a:off x="3566160" y="1920240"/>
-            <a:ext cx="2103120" cy="1097280"/>
-          </a:xfrm>
-          <a:prstGeom prst="rect">
-            <a:avLst/>
-          </a:prstGeom>
-          <a:noFill/>
-          <a:ln/>
-        </p:spPr>
-        <p:txBody>
-          <a:bodyPr wrap="square" lIns="0" tIns="0" rIns="0" bIns="0" rtlCol="0" anchor="t"/>
-          <a:lstStyle/>
-          <a:p>
-            <a:pPr indent="0" marL="0">
-              <a:buNone/>
-            </a:pPr>
-            <a:r>
-              <a:rPr lang="en-US" sz="1500" dirty="0">
-                <a:solidFill>
-                  <a:schemeClr val="tx1"/>
-                </a:solidFill>
-              </a:rPr>
-              <a:t>시스템명 없음</a:t>
-            </a:r>
-            <a:endParaRPr lang="en-US" sz="1500" dirty="0"/>
-          </a:p>
-          <a:p>
-            <a:pPr indent="0" marL="0">
-              <a:buNone/>
-            </a:pPr>
-            <a:r>
-              <a:rPr lang="en-US" sz="1500" dirty="0">
-                <a:solidFill>
-                  <a:schemeClr val="tx1"/>
-                </a:solidFill>
-              </a:rPr>
-              <a:t>→ auth-service 폴백</a:t>
-            </a:r>
-            <a:endParaRPr lang="en-US" sz="1500" dirty="0"/>
-          </a:p>
-        </p:txBody>
-      </p:sp>
-      <p:sp>
-        <p:nvSpPr>
-          <p:cNvPr id="10" name="arrow-1"/>
-          <p:cNvSpPr/>
-          <p:nvPr/>
-        </p:nvSpPr>
-        <p:spPr>
-          <a:xfrm>
-            <a:off x="5897880" y="2057400"/>
-            <a:ext cx="274320" cy="365760"/>
-          </a:xfrm>
-          <a:prstGeom prst="rightArrow">
-            <a:avLst/>
-          </a:prstGeom>
-          <a:solidFill>
-            <a:schemeClr val="accent3"/>
-          </a:solidFill>
-          <a:ln w="12700">
-            <a:solidFill>
-              <a:schemeClr val="accent3"/>
-            </a:solidFill>
-            <a:prstDash val="solid"/>
-          </a:ln>
-        </p:spPr>
-      </p:sp>
-      <p:sp>
-        <p:nvSpPr>
-          <p:cNvPr id="11" name="flow-2"/>
-          <p:cNvSpPr/>
-          <p:nvPr/>
-        </p:nvSpPr>
-        <p:spPr>
-          <a:xfrm>
-            <a:off x="6217920" y="1371600"/>
-            <a:ext cx="2468880" cy="1737360"/>
-          </a:xfrm>
-          <a:prstGeom prst="roundRect">
-            <a:avLst>
-              <a:gd name="adj" fmla="val 6316"/>
-            </a:avLst>
-          </a:prstGeom>
-          <a:solidFill>
-            <a:schemeClr val="bg2"/>
-          </a:solidFill>
-          <a:ln w="12700">
-            <a:solidFill>
-              <a:schemeClr val="bg2"/>
-            </a:solidFill>
-            <a:prstDash val="solid"/>
-          </a:ln>
-        </p:spPr>
-      </p:sp>
-      <p:sp>
-        <p:nvSpPr>
-          <p:cNvPr id="12" name="Text 10"/>
-          <p:cNvSpPr txBox="1"/>
-          <p:nvPr/>
-        </p:nvSpPr>
-        <p:spPr>
-          <a:xfrm>
-            <a:off x="6400800" y="1508760"/>
-            <a:ext cx="2103120" cy="365760"/>
-          </a:xfrm>
-          <a:prstGeom prst="rect">
-            <a:avLst/>
-          </a:prstGeom>
-          <a:noFill/>
-          <a:ln/>
-        </p:spPr>
-        <p:txBody>
-          <a:bodyPr wrap="square" lIns="0" tIns="0" rIns="0" bIns="0" rtlCol="0" anchor="ctr"/>
-          <a:lstStyle/>
-          <a:p>
-            <a:pPr indent="0" marL="0">
-              <a:buNone/>
-            </a:pPr>
-            <a:r>
-              <a:rPr lang="en-US" sz="1400" b="1" dirty="0">
-                <a:solidFill>
-                  <a:schemeClr val="tx2"/>
-                </a:solidFill>
-              </a:rPr>
-              <a:t>모니터링 알림</a:t>
-            </a:r>
-            <a:endParaRPr lang="en-US" sz="1400" dirty="0"/>
-          </a:p>
-        </p:txBody>
-      </p:sp>
-      <p:sp>
-        <p:nvSpPr>
-          <p:cNvPr id="13" name="Text 11"/>
-          <p:cNvSpPr txBox="1"/>
-          <p:nvPr/>
-        </p:nvSpPr>
-        <p:spPr>
-          <a:xfrm>
-            <a:off x="6400800" y="1920240"/>
-            <a:ext cx="2103120" cy="1097280"/>
-          </a:xfrm>
-          <a:prstGeom prst="rect">
-            <a:avLst/>
-          </a:prstGeom>
-          <a:noFill/>
-          <a:ln/>
-        </p:spPr>
-        <p:txBody>
-          <a:bodyPr wrap="square" lIns="0" tIns="0" rIns="0" bIns="0" rtlCol="0" anchor="t"/>
-          <a:lstStyle/>
-          <a:p>
-            <a:pPr indent="0" marL="0">
-              <a:buNone/>
-            </a:pPr>
-            <a:r>
-              <a:rPr lang="en-US" sz="1500" dirty="0">
-                <a:solidFill>
-                  <a:schemeClr val="tx1"/>
-                </a:solidFill>
-              </a:rPr>
-              <a:t>"p95 latency 2.4s"</a:t>
-            </a:r>
-            <a:endParaRPr lang="en-US" sz="1500" dirty="0"/>
-          </a:p>
-          <a:p>
-            <a:pPr indent="0" marL="0">
-              <a:buNone/>
-            </a:pPr>
-            <a:r>
-              <a:rPr lang="en-US" sz="1500" dirty="0">
-                <a:solidFill>
-                  <a:schemeClr val="tx1"/>
-                </a:solidFill>
-              </a:rPr>
-              <a:t>키워드 'latency' 일치</a:t>
-            </a:r>
-            <a:endParaRPr lang="en-US" sz="1500" dirty="0"/>
-          </a:p>
-        </p:txBody>
-      </p:sp>
-      <p:sp>
-        <p:nvSpPr>
-          <p:cNvPr id="14" name="arrow-2"/>
-          <p:cNvSpPr/>
-          <p:nvPr/>
-        </p:nvSpPr>
-        <p:spPr>
-          <a:xfrm>
-            <a:off x="8732520" y="2057400"/>
-            <a:ext cx="274320" cy="365760"/>
-          </a:xfrm>
-          <a:prstGeom prst="rightArrow">
-            <a:avLst/>
-          </a:prstGeom>
-          <a:solidFill>
-            <a:schemeClr val="accent3"/>
-          </a:solidFill>
-          <a:ln w="12700">
-            <a:solidFill>
-              <a:schemeClr val="accent3"/>
-            </a:solidFill>
-            <a:prstDash val="solid"/>
-          </a:ln>
-        </p:spPr>
-      </p:sp>
-      <p:sp>
-        <p:nvSpPr>
-          <p:cNvPr id="15" name="flow-3"/>
-          <p:cNvSpPr/>
-          <p:nvPr/>
-        </p:nvSpPr>
-        <p:spPr>
-          <a:xfrm>
-            <a:off x="9052560" y="1371600"/>
-            <a:ext cx="2468880" cy="1737360"/>
-          </a:xfrm>
-          <a:prstGeom prst="roundRect">
-            <a:avLst>
-              <a:gd name="adj" fmla="val 6316"/>
-            </a:avLst>
-          </a:prstGeom>
-          <a:solidFill>
-            <a:schemeClr val="accent1"/>
-          </a:solidFill>
-          <a:ln w="12700">
-            <a:solidFill>
-              <a:schemeClr val="accent1"/>
-            </a:solidFill>
-            <a:prstDash val="solid"/>
-          </a:ln>
-        </p:spPr>
-      </p:sp>
-      <p:sp>
-        <p:nvSpPr>
-          <p:cNvPr id="16" name="Text 14"/>
-          <p:cNvSpPr txBox="1"/>
-          <p:nvPr/>
-        </p:nvSpPr>
-        <p:spPr>
-          <a:xfrm>
-            <a:off x="9235440" y="1508760"/>
-            <a:ext cx="2103120" cy="365760"/>
-          </a:xfrm>
-          <a:prstGeom prst="rect">
-            <a:avLst/>
-          </a:prstGeom>
-          <a:noFill/>
-          <a:ln/>
-        </p:spPr>
-        <p:txBody>
-          <a:bodyPr wrap="square" lIns="0" tIns="0" rIns="0" bIns="0" rtlCol="0" anchor="ctr"/>
-          <a:lstStyle/>
-          <a:p>
-            <a:pPr indent="0" marL="0">
-              <a:buNone/>
-            </a:pPr>
-            <a:r>
-              <a:rPr lang="en-US" sz="1400" b="1" dirty="0">
-                <a:solidFill>
-                  <a:schemeClr val="bg1"/>
-                </a:solidFill>
-              </a:rPr>
-              <a:t>선택된 런북</a:t>
-            </a:r>
-            <a:endParaRPr lang="en-US" sz="1400" dirty="0"/>
-          </a:p>
-        </p:txBody>
-      </p:sp>
-      <p:sp>
-        <p:nvSpPr>
-          <p:cNvPr id="17" name="Text 15"/>
-          <p:cNvSpPr txBox="1"/>
-          <p:nvPr/>
-        </p:nvSpPr>
-        <p:spPr>
-          <a:xfrm>
-            <a:off x="9235440" y="1920240"/>
-            <a:ext cx="2103120" cy="1097280"/>
-          </a:xfrm>
-          <a:prstGeom prst="rect">
-            <a:avLst/>
-          </a:prstGeom>
-          <a:noFill/>
-          <a:ln/>
-        </p:spPr>
-        <p:txBody>
-          <a:bodyPr wrap="square" lIns="0" tIns="0" rIns="0" bIns="0" rtlCol="0" anchor="t"/>
-          <a:lstStyle/>
-          <a:p>
-            <a:pPr indent="0" marL="0">
-              <a:buNone/>
-            </a:pPr>
-            <a:r>
-              <a:rPr lang="en-US" sz="1500" dirty="0">
-                <a:solidFill>
-                  <a:schemeClr val="bg1"/>
-                </a:solidFill>
-              </a:rPr>
-              <a:t>high-latency</a:t>
-            </a:r>
-            <a:endParaRPr lang="en-US" sz="1500" dirty="0"/>
-          </a:p>
-          <a:p>
-            <a:pPr indent="0" marL="0">
-              <a:buNone/>
-            </a:pPr>
-            <a:r>
-              <a:rPr lang="en-US" sz="1500" dirty="0">
-                <a:solidFill>
-                  <a:schemeClr val="bg1"/>
-                </a:solidFill>
-              </a:rPr>
-              <a:t>(응답 지연 절차)</a:t>
-            </a:r>
-            <a:endParaRPr lang="en-US" sz="1500" dirty="0"/>
-          </a:p>
-        </p:txBody>
-      </p:sp>
-      <p:sp>
-        <p:nvSpPr>
-          <p:cNvPr id="18" name="stat-basemiss"/>
-          <p:cNvSpPr/>
-          <p:nvPr/>
-        </p:nvSpPr>
-        <p:spPr>
-          <a:xfrm>
-            <a:off x="548640" y="3429000"/>
-            <a:ext cx="3520440" cy="1828800"/>
-          </a:xfrm>
-          <a:prstGeom prst="roundRect">
-            <a:avLst>
-              <a:gd name="adj" fmla="val 6000"/>
-            </a:avLst>
-          </a:prstGeom>
-          <a:solidFill>
-            <a:schemeClr val="bg2"/>
-          </a:solidFill>
-          <a:ln w="12700">
-            <a:solidFill>
-              <a:schemeClr val="bg2"/>
-            </a:solidFill>
-            <a:prstDash val="solid"/>
-          </a:ln>
-        </p:spPr>
-      </p:sp>
-      <p:sp>
-        <p:nvSpPr>
-          <p:cNvPr id="19" name="Text 17"/>
-          <p:cNvSpPr txBox="1"/>
-          <p:nvPr/>
-        </p:nvSpPr>
-        <p:spPr>
-          <a:xfrm>
-            <a:off x="822960" y="3630168"/>
-            <a:ext cx="2971800" cy="868680"/>
-          </a:xfrm>
-          <a:prstGeom prst="rect">
-            <a:avLst/>
-          </a:prstGeom>
-          <a:noFill/>
-          <a:ln/>
-        </p:spPr>
-        <p:txBody>
-          <a:bodyPr wrap="square" lIns="0" tIns="0" rIns="0" bIns="0" rtlCol="0" anchor="ctr"/>
-          <a:lstStyle/>
-          <a:p>
-            <a:pPr indent="0" marL="0">
-              <a:buNone/>
-            </a:pPr>
-            <a:r>
-              <a:rPr lang="en-US" sz="3600" b="1" dirty="0">
-                <a:solidFill>
-                  <a:schemeClr val="accent1"/>
-                </a:solidFill>
-              </a:rPr>
-              <a:t>56%</a:t>
-            </a:r>
-            <a:endParaRPr lang="en-US" sz="3600" dirty="0"/>
-          </a:p>
-        </p:txBody>
-      </p:sp>
-      <p:sp>
-        <p:nvSpPr>
-          <p:cNvPr id="20" name="Text 18"/>
-          <p:cNvSpPr txBox="1"/>
-          <p:nvPr/>
-        </p:nvSpPr>
-        <p:spPr>
-          <a:xfrm>
-            <a:off x="822960" y="4526280"/>
-            <a:ext cx="2971800" cy="640080"/>
-          </a:xfrm>
-          <a:prstGeom prst="rect">
-            <a:avLst/>
-          </a:prstGeom>
-          <a:noFill/>
-          <a:ln/>
-        </p:spPr>
-        <p:txBody>
-          <a:bodyPr wrap="square" lIns="0" tIns="0" rIns="0" bIns="0" rtlCol="0" anchor="t"/>
-          <a:lstStyle/>
-          <a:p>
-            <a:pPr indent="0" marL="0">
-              <a:buNone/>
-            </a:pPr>
-            <a:r>
-              <a:rPr lang="en-US" sz="1350" dirty="0">
-                <a:solidFill>
-                  <a:schemeClr val="tx1"/>
-                </a:solidFill>
-              </a:rPr>
-              <a:t>holdout에서 base가 정답 런북을</a:t>
-            </a:r>
-            <a:endParaRPr lang="en-US" sz="1350" dirty="0"/>
-          </a:p>
-          <a:p>
-            <a:pPr indent="0" marL="0">
-              <a:buNone/>
-            </a:pPr>
-            <a:r>
-              <a:rPr lang="en-US" sz="1350" dirty="0">
-                <a:solidFill>
-                  <a:schemeClr val="tx1"/>
-                </a:solidFill>
-              </a:rPr>
-              <a:t>근거에 못 넣은 비율</a:t>
-            </a:r>
-            <a:endParaRPr lang="en-US" sz="1350" dirty="0"/>
-          </a:p>
-        </p:txBody>
-      </p:sp>
-      <p:sp>
-        <p:nvSpPr>
-          <p:cNvPr id="21" name="stat-bias"/>
-          <p:cNvSpPr/>
-          <p:nvPr/>
-        </p:nvSpPr>
-        <p:spPr>
-          <a:xfrm>
-            <a:off x="4334256" y="3429000"/>
-            <a:ext cx="3520440" cy="1828800"/>
-          </a:xfrm>
-          <a:prstGeom prst="roundRect">
-            <a:avLst>
-              <a:gd name="adj" fmla="val 6000"/>
-            </a:avLst>
-          </a:prstGeom>
-          <a:solidFill>
-            <a:schemeClr val="bg2"/>
-          </a:solidFill>
-          <a:ln w="12700">
-            <a:solidFill>
-              <a:schemeClr val="bg2"/>
-            </a:solidFill>
-            <a:prstDash val="solid"/>
-          </a:ln>
-        </p:spPr>
-      </p:sp>
-      <p:sp>
-        <p:nvSpPr>
-          <p:cNvPr id="22" name="Text 20"/>
-          <p:cNvSpPr txBox="1"/>
-          <p:nvPr/>
-        </p:nvSpPr>
-        <p:spPr>
-          <a:xfrm>
-            <a:off x="4608576" y="3630168"/>
-            <a:ext cx="2971800" cy="868680"/>
-          </a:xfrm>
-          <a:prstGeom prst="rect">
-            <a:avLst/>
-          </a:prstGeom>
-          <a:noFill/>
-          <a:ln/>
-        </p:spPr>
-        <p:txBody>
-          <a:bodyPr wrap="square" lIns="0" tIns="0" rIns="0" bIns="0" rtlCol="0" anchor="ctr"/>
-          <a:lstStyle/>
-          <a:p>
-            <a:pPr indent="0" marL="0">
-              <a:buNone/>
-            </a:pPr>
-            <a:r>
-              <a:rPr lang="en-US" sz="3600" b="1" dirty="0">
-                <a:solidFill>
-                  <a:schemeClr val="accent1"/>
-                </a:solidFill>
-              </a:rPr>
-              <a:t>78% vs 11%</a:t>
-            </a:r>
-            <a:endParaRPr lang="en-US" sz="3600" dirty="0"/>
-          </a:p>
-        </p:txBody>
-      </p:sp>
-      <p:sp>
-        <p:nvSpPr>
-          <p:cNvPr id="23" name="Text 21"/>
-          <p:cNvSpPr txBox="1"/>
-          <p:nvPr/>
-        </p:nvSpPr>
-        <p:spPr>
-          <a:xfrm>
-            <a:off x="4608576" y="4526280"/>
-            <a:ext cx="2971800" cy="640080"/>
-          </a:xfrm>
-          <a:prstGeom prst="rect">
-            <a:avLst/>
-          </a:prstGeom>
-          <a:noFill/>
-          <a:ln/>
-        </p:spPr>
-        <p:txBody>
-          <a:bodyPr wrap="square" lIns="0" tIns="0" rIns="0" bIns="0" rtlCol="0" anchor="t"/>
-          <a:lstStyle/>
-          <a:p>
-            <a:pPr indent="0" marL="0">
-              <a:buNone/>
-            </a:pPr>
-            <a:r>
-              <a:rPr lang="en-US" sz="1350" dirty="0">
-                <a:solidFill>
-                  <a:schemeClr val="tx1"/>
-                </a:solidFill>
-              </a:rPr>
-              <a:t>알림 문구대로 물을 때 vs 자기 말로</a:t>
-            </a:r>
-            <a:endParaRPr lang="en-US" sz="1350" dirty="0"/>
-          </a:p>
-          <a:p>
-            <a:pPr indent="0" marL="0">
-              <a:buNone/>
-            </a:pPr>
-            <a:r>
-              <a:rPr lang="en-US" sz="1350" dirty="0">
-                <a:solidFill>
-                  <a:schemeClr val="tx1"/>
-                </a:solidFill>
-              </a:rPr>
-              <a:t>물을 때 base Recall@1 (편향 검증)</a:t>
-            </a:r>
-            <a:endParaRPr lang="en-US" sz="1350" dirty="0"/>
-          </a:p>
-        </p:txBody>
-      </p:sp>
-      <p:sp>
-        <p:nvSpPr>
-          <p:cNvPr id="24" name="Text 22"/>
-          <p:cNvSpPr txBox="1"/>
-          <p:nvPr/>
-        </p:nvSpPr>
-        <p:spPr>
-          <a:xfrm>
-            <a:off x="8229600" y="3429000"/>
-            <a:ext cx="3410712" cy="2377440"/>
-          </a:xfrm>
-          <a:prstGeom prst="rect">
-            <a:avLst/>
-          </a:prstGeom>
-          <a:noFill/>
-          <a:ln/>
-        </p:spPr>
-        <p:txBody>
-          <a:bodyPr wrap="square" lIns="0" tIns="0" rIns="0" bIns="0" rtlCol="0" anchor="t"/>
-          <a:lstStyle/>
-          <a:p>
-            <a:pPr indent="0" marL="0">
-              <a:spcAft>
-                <a:spcPts val="500"/>
-              </a:spcAft>
-              <a:buNone/>
-            </a:pPr>
-            <a:r>
-              <a:rPr lang="en-US" sz="1350" b="1" dirty="0">
-                <a:solidFill>
-                  <a:schemeClr val="tx1"/>
-                </a:solidFill>
-              </a:rPr>
-              <a:t>원인 (src/agent/graph.py:192-213)</a:t>
-            </a:r>
-            <a:endParaRPr lang="en-US" sz="1350" dirty="0"/>
-          </a:p>
-          <a:p>
-            <a:pPr marL="342900" indent="-342900">
-              <a:spcAft>
-                <a:spcPts val="500"/>
-              </a:spcAft>
-              <a:buSzPct val="100000"/>
-              <a:buChar char="•"/>
-            </a:pPr>
-            <a:r>
-              <a:rPr lang="en-US" sz="1350" dirty="0">
-                <a:solidFill>
-                  <a:schemeClr val="tx1"/>
-                </a:solidFill>
-              </a:rPr>
-              <a:t>조사한 시스템의 알림 문구에서 키워드를 순서대로 찾아 첫 일치로 런북 1개를 고른다.</a:t>
-            </a:r>
-            <a:endParaRPr lang="en-US" sz="1350" dirty="0"/>
-          </a:p>
-          <a:p>
-            <a:pPr marL="342900" indent="-342900">
-              <a:spcAft>
-                <a:spcPts val="500"/>
-              </a:spcAft>
-              <a:buSzPct val="100000"/>
-              <a:buChar char="•"/>
-            </a:pPr>
-            <a:r>
-              <a:rPr lang="en-US" sz="1350" dirty="0">
-                <a:solidFill>
-                  <a:schemeClr val="tx1"/>
-                </a:solidFill>
-              </a:rPr>
-              <a:t>질의 문장은 쓰지 않는다. 당직자가 알림과 다른 말로 물으면 거의 맞히지 못한다.</a:t>
-            </a:r>
-            <a:endParaRPr lang="en-US" sz="1350" dirty="0"/>
-          </a:p>
-        </p:txBody>
-      </p:sp>
-      <p:sp>
-        <p:nvSpPr>
-          <p:cNvPr id="25" name="Text 23"/>
-          <p:cNvSpPr txBox="1"/>
-          <p:nvPr/>
-        </p:nvSpPr>
-        <p:spPr>
-          <a:xfrm>
-            <a:off x="548640" y="6053328"/>
-            <a:ext cx="11064240" cy="274320"/>
-          </a:xfrm>
-          <a:prstGeom prst="rect">
-            <a:avLst/>
-          </a:prstGeom>
-          <a:noFill/>
-          <a:ln/>
-        </p:spPr>
-        <p:txBody>
-          <a:bodyPr wrap="square" lIns="0" tIns="0" rIns="0" bIns="0" rtlCol="0" anchor="ctr"/>
-          <a:lstStyle/>
-          <a:p>
-            <a:pPr indent="0" marL="0">
-              <a:buNone/>
-            </a:pPr>
-            <a:r>
-              <a:rPr lang="en-US" sz="1050" dirty="0">
-                <a:solidFill>
-                  <a:schemeClr val="accent3"/>
-                </a:solidFill>
-              </a:rPr>
-              <a:t>holdout 정상 질의 aligned 9건 / paraphrased 9건, 3회 평균</a:t>
-            </a:r>
-            <a:endParaRPr lang="en-US" sz="1050" dirty="0"/>
-          </a:p>
-        </p:txBody>
-      </p:sp>
-      <p:sp>
-        <p:nvSpPr>
-          <p:cNvPr id="25" name="Slide Number Placeholder 0"/>
-          <p:cNvSpPr>
-            <a:spLocks noGrp="1"/>
-          </p:cNvSpPr>
-          <p:nvPr>
-            <p:ph type="sldNum" sz="quarter" idx="4294967295"/>
-          </p:nvPr>
-        </p:nvSpPr>
-        <p:spPr>
-          <a:xfrm>
-            <a:off x="11155680" y="6400800"/>
-            <a:ext cx="457200" cy="274320"/>
-          </a:xfrm>
-          <a:prstGeom prst="rect">
-            <a:avLst/>
-          </a:prstGeom>
-          <a:extLst>
-            <a:ext uri="{C572A759-6A51-4108-AA02-DFA0A04FC94B}">
-              <ma14:wrappingTextBoxFlag xmlns:ma14="http://schemas.microsoft.com/office/mac/drawingml/2011/main" val="0"/>
-            </a:ext>
-          </a:extLst>
-        </p:spPr>
-        <p:txBody>
-          <a:bodyPr/>
-          <a:lstStyle>
-            <a:lvl1pPr>
-              <a:defRPr sz="1000">
-                <a:solidFill>
-                  <a:schemeClr val="accent3"/>
-                </a:solidFill>
-              </a:defRPr>
-            </a:lvl1pPr>
-          </a:lstStyle>
-          <a:p>
-            <a:pPr algn="r"/>
-            <a:fld id="{F7021451-1387-4CA6-816F-3879F97B5CBC}" type="slidenum">
-              <a:rPr b="0" lang="en-US"/>
-              <a:t>4</a:t>
-            </a:fld>
-            <a:endParaRPr lang="en-US"/>
-          </a:p>
-        </p:txBody>
-      </p:sp>
-    </p:spTree>
-  </p:cSld>
-  <p:clrMapOvr>
-    <a:masterClrMapping/>
-  </p:clrMapOvr>
-</p:sld>
-</file>
-
-<file path=ppt/slides/slide9.xml><?xml version="1.0" encoding="utf-8"?>
-<p:sld xmlns:a="http://schemas.openxmlformats.org/drawingml/2006/main" xmlns:r="http://schemas.openxmlformats.org/officeDocument/2006/relationships" xmlns:p="http://schemas.openxmlformats.org/presentationml/2006/main">
-  <p:cSld name="Slide 9">
-    <p:spTree>
-      <p:nvGrpSpPr>
-        <p:cNvPr id="1" name=""/>
-        <p:cNvGrpSpPr/>
-        <p:nvPr/>
-      </p:nvGrpSpPr>
-      <p:grpSpPr>
-        <a:xfrm>
-          <a:off x="0" y="0"/>
-          <a:ext cx="0" cy="0"/>
-          <a:chOff x="0" y="0"/>
-          <a:chExt cx="0" cy="0"/>
-        </a:xfrm>
-      </p:grpSpPr>
-      <p:sp>
-        <p:nvSpPr>
-          <p:cNvPr id="2" name="Text 0"/>
-          <p:cNvSpPr/>
-          <p:nvPr>
-            <p:ph idx="100" type="title" hasCustomPrompt="1"/>
-          </p:nvPr>
-        </p:nvSpPr>
-        <p:spPr>
-          <a:xfrm>
-            <a:off x="548640" y="320040"/>
-            <a:ext cx="11064240" cy="777240"/>
-          </a:xfrm>
-          <a:prstGeom prst="rect">
-            <a:avLst/>
-          </a:prstGeom>
-          <a:noFill/>
-          <a:ln/>
-        </p:spPr>
-        <p:txBody>
-          <a:bodyPr wrap="square" lIns="0" tIns="0" rIns="0" bIns="0" rtlCol="0" anchor="ctr"/>
-          <a:lstStyle/>
-          <a:p>
-            <a:pPr algn="l" indent="0" marL="0">
-              <a:buNone/>
-            </a:pPr>
-            <a:r>
-              <a:rPr lang="en-US" sz="2800" b="1" dirty="0">
-                <a:solidFill>
-                  <a:schemeClr val="tx2"/>
-                </a:solidFill>
-              </a:rPr>
               <a:t>Before/After 2: 개선별 기여도 — 같은 질의끼리 짝지어 비교했다</a:t>
             </a:r>
             <a:endParaRPr lang="en-US" sz="2800" dirty="0"/>
@@ -4871,7 +1918,7 @@
       </p:sp>
       <p:graphicFrame>
         <p:nvGraphicFramePr>
-          <p:cNvPr id="10" name="contrib-table"/>
+          <p:cNvPr id="11" name="contrib-table"/>
           <p:cNvGraphicFramePr>
             <a:graphicFrameLocks noGrp="1"/>
           </p:cNvGraphicFramePr>
@@ -8360,7 +5407,3242 @@
             <a:pPr algn="r"/>
             <a:fld id="{F7021451-1387-4CA6-816F-3879F97B5CBC}" type="slidenum">
               <a:rPr b="0" lang="en-US"/>
-              <a:t>9</a:t>
+              <a:t>10</a:t>
+            </a:fld>
+            <a:endParaRPr lang="en-US"/>
+          </a:p>
+        </p:txBody>
+      </p:sp>
+    </p:spTree>
+  </p:cSld>
+  <p:clrMapOvr>
+    <a:masterClrMapping/>
+  </p:clrMapOvr>
+</p:sld>
+</file>
+
+<file path=ppt/slides/slide15.xml><?xml version="1.0" encoding="utf-8"?>
+<p:sld xmlns:a="http://schemas.openxmlformats.org/drawingml/2006/main" xmlns:r="http://schemas.openxmlformats.org/officeDocument/2006/relationships" xmlns:p="http://schemas.openxmlformats.org/presentationml/2006/main">
+  <p:cSld name="Slide 15">
+    <p:spTree>
+      <p:nvGrpSpPr>
+        <p:cNvPr id="1" name=""/>
+        <p:cNvGrpSpPr/>
+        <p:nvPr/>
+      </p:nvGrpSpPr>
+      <p:grpSpPr>
+        <a:xfrm>
+          <a:off x="0" y="0"/>
+          <a:ext cx="0" cy="0"/>
+          <a:chOff x="0" y="0"/>
+          <a:chExt cx="0" cy="0"/>
+        </a:xfrm>
+      </p:grpSpPr>
+      <p:sp>
+        <p:nvSpPr>
+          <p:cNvPr id="2" name="Text 0"/>
+          <p:cNvSpPr/>
+          <p:nvPr>
+            <p:ph idx="100" type="title" hasCustomPrompt="1"/>
+          </p:nvPr>
+        </p:nvSpPr>
+        <p:spPr>
+          <a:xfrm>
+            <a:off x="548640" y="320040"/>
+            <a:ext cx="11064240" cy="777240"/>
+          </a:xfrm>
+          <a:prstGeom prst="rect">
+            <a:avLst/>
+          </a:prstGeom>
+          <a:noFill/>
+          <a:ln/>
+        </p:spPr>
+        <p:txBody>
+          <a:bodyPr wrap="square" lIns="0" tIns="0" rIns="0" bIns="0" rtlCol="0" anchor="ctr"/>
+          <a:lstStyle/>
+          <a:p>
+            <a:pPr algn="l" indent="0" marL="0">
+              <a:buNone/>
+            </a:pPr>
+            <a:r>
+              <a:rPr lang="en-US" sz="2800" b="1" dirty="0">
+                <a:solidFill>
+                  <a:schemeClr val="tx2"/>
+                </a:solidFill>
+              </a:rPr>
+              <a:t>시연: 같은 질문, base와 final을 나란히</a:t>
+            </a:r>
+            <a:endParaRPr lang="en-US" sz="2800" dirty="0"/>
+          </a:p>
+        </p:txBody>
+      </p:sp>
+      <p:sp>
+        <p:nvSpPr>
+          <p:cNvPr id="3" name="demo-cmd"/>
+          <p:cNvSpPr/>
+          <p:nvPr/>
+        </p:nvSpPr>
+        <p:spPr>
+          <a:xfrm>
+            <a:off x="548640" y="1371600"/>
+            <a:ext cx="11064240" cy="914400"/>
+          </a:xfrm>
+          <a:prstGeom prst="roundRect">
+            <a:avLst>
+              <a:gd name="adj" fmla="val 12000"/>
+            </a:avLst>
+          </a:prstGeom>
+          <a:solidFill>
+            <a:schemeClr val="tx2"/>
+          </a:solidFill>
+          <a:ln w="12700">
+            <a:solidFill>
+              <a:schemeClr val="tx2"/>
+            </a:solidFill>
+            <a:prstDash val="solid"/>
+          </a:ln>
+        </p:spPr>
+      </p:sp>
+      <p:sp>
+        <p:nvSpPr>
+          <p:cNvPr id="4" name="Text 2"/>
+          <p:cNvSpPr txBox="1"/>
+          <p:nvPr/>
+        </p:nvSpPr>
+        <p:spPr>
+          <a:xfrm>
+            <a:off x="822960" y="1463040"/>
+            <a:ext cx="10515600" cy="731520"/>
+          </a:xfrm>
+          <a:prstGeom prst="rect">
+            <a:avLst/>
+          </a:prstGeom>
+          <a:noFill/>
+          <a:ln/>
+        </p:spPr>
+        <p:txBody>
+          <a:bodyPr wrap="square" lIns="0" tIns="0" rIns="0" bIns="0" rtlCol="0" anchor="ctr"/>
+          <a:lstStyle/>
+          <a:p>
+            <a:pPr indent="0" marL="0">
+              <a:buNone/>
+            </a:pPr>
+            <a:r>
+              <a:rPr lang="en-US" sz="1600" dirty="0">
+                <a:solidFill>
+                  <a:schemeClr val="bg1"/>
+                </a:solidFill>
+                <a:latin typeface="Courier New" pitchFamily="34" charset="0"/>
+                <a:ea typeface="Courier New" pitchFamily="34" charset="-122"/>
+                <a:cs typeface="Courier New" pitchFamily="34" charset="-120"/>
+              </a:rPr>
+              <a:t>.venv/bin/python scripts/demo_side_by_side.py --id Q01</a:t>
+            </a:r>
+            <a:endParaRPr lang="en-US" sz="1600" dirty="0"/>
+          </a:p>
+        </p:txBody>
+      </p:sp>
+      <p:sp>
+        <p:nvSpPr>
+          <p:cNvPr id="5" name="demo-base"/>
+          <p:cNvSpPr/>
+          <p:nvPr/>
+        </p:nvSpPr>
+        <p:spPr>
+          <a:xfrm>
+            <a:off x="548640" y="2560320"/>
+            <a:ext cx="5458968" cy="2926080"/>
+          </a:xfrm>
+          <a:prstGeom prst="roundRect">
+            <a:avLst>
+              <a:gd name="adj" fmla="val 3750"/>
+            </a:avLst>
+          </a:prstGeom>
+          <a:solidFill>
+            <a:schemeClr val="bg2"/>
+          </a:solidFill>
+          <a:ln w="12700">
+            <a:solidFill>
+              <a:schemeClr val="bg2"/>
+            </a:solidFill>
+            <a:prstDash val="solid"/>
+          </a:ln>
+        </p:spPr>
+      </p:sp>
+      <p:sp>
+        <p:nvSpPr>
+          <p:cNvPr id="6" name="Text 4"/>
+          <p:cNvSpPr txBox="1"/>
+          <p:nvPr/>
+        </p:nvSpPr>
+        <p:spPr>
+          <a:xfrm>
+            <a:off x="822960" y="2743200"/>
+            <a:ext cx="1828800" cy="411480"/>
+          </a:xfrm>
+          <a:prstGeom prst="rect">
+            <a:avLst/>
+          </a:prstGeom>
+          <a:noFill/>
+          <a:ln/>
+        </p:spPr>
+        <p:txBody>
+          <a:bodyPr wrap="square" lIns="0" tIns="0" rIns="0" bIns="0" rtlCol="0" anchor="ctr"/>
+          <a:lstStyle/>
+          <a:p>
+            <a:pPr indent="0" marL="0">
+              <a:buNone/>
+            </a:pPr>
+            <a:r>
+              <a:rPr lang="en-US" sz="1800" b="1" dirty="0">
+                <a:solidFill>
+                  <a:schemeClr val="tx2"/>
+                </a:solidFill>
+              </a:rPr>
+              <a:t>[base]</a:t>
+            </a:r>
+            <a:endParaRPr lang="en-US" sz="1800" dirty="0"/>
+          </a:p>
+        </p:txBody>
+      </p:sp>
+      <p:sp>
+        <p:nvSpPr>
+          <p:cNvPr id="7" name="Text 5"/>
+          <p:cNvSpPr txBox="1"/>
+          <p:nvPr/>
+        </p:nvSpPr>
+        <p:spPr>
+          <a:xfrm>
+            <a:off x="4572000" y="2743200"/>
+            <a:ext cx="1188720" cy="411480"/>
+          </a:xfrm>
+          <a:prstGeom prst="rect">
+            <a:avLst/>
+          </a:prstGeom>
+          <a:noFill/>
+          <a:ln/>
+        </p:spPr>
+        <p:txBody>
+          <a:bodyPr wrap="square" lIns="0" tIns="0" rIns="0" bIns="0" rtlCol="0" anchor="ctr"/>
+          <a:lstStyle/>
+          <a:p>
+            <a:pPr algn="r" indent="0" marL="0">
+              <a:buNone/>
+            </a:pPr>
+            <a:r>
+              <a:rPr lang="en-US" sz="1600" b="1" dirty="0">
+                <a:solidFill>
+                  <a:schemeClr val="accent1"/>
+                </a:solidFill>
+              </a:rPr>
+              <a:t>오답</a:t>
+            </a:r>
+            <a:endParaRPr lang="en-US" sz="1600" dirty="0"/>
+          </a:p>
+        </p:txBody>
+      </p:sp>
+      <p:sp>
+        <p:nvSpPr>
+          <p:cNvPr id="8" name="Text 6"/>
+          <p:cNvSpPr txBox="1"/>
+          <p:nvPr/>
+        </p:nvSpPr>
+        <p:spPr>
+          <a:xfrm>
+            <a:off x="822960" y="3291840"/>
+            <a:ext cx="4937760" cy="2011680"/>
+          </a:xfrm>
+          <a:prstGeom prst="rect">
+            <a:avLst/>
+          </a:prstGeom>
+          <a:noFill/>
+          <a:ln/>
+        </p:spPr>
+        <p:txBody>
+          <a:bodyPr wrap="square" lIns="0" tIns="0" rIns="0" bIns="0" rtlCol="0" anchor="t"/>
+          <a:lstStyle/>
+          <a:p>
+            <a:pPr indent="0" marL="0">
+              <a:spcAft>
+                <a:spcPts val="800"/>
+              </a:spcAft>
+              <a:buNone/>
+            </a:pPr>
+            <a:r>
+              <a:rPr lang="en-US" sz="1450" dirty="0">
+                <a:solidFill>
+                  <a:srgbClr val="8A94A3"/>
+                </a:solidFill>
+              </a:rPr>
+              <a:t>고른 런북  </a:t>
+            </a:r>
+            <a:pPr indent="0" marL="0">
+              <a:spcAft>
+                <a:spcPts val="800"/>
+              </a:spcAft>
+              <a:buNone/>
+            </a:pPr>
+            <a:r>
+              <a:rPr lang="en-US" sz="1450" b="1" dirty="0">
+                <a:solidFill>
+                  <a:schemeClr val="tx1"/>
+                </a:solidFill>
+              </a:rPr>
+              <a:t>high-latency (응답 지연 절차)</a:t>
+            </a:r>
+            <a:endParaRPr lang="en-US" sz="1450" dirty="0"/>
+          </a:p>
+          <a:p>
+            <a:pPr indent="0" marL="0">
+              <a:spcAft>
+                <a:spcPts val="800"/>
+              </a:spcAft>
+              <a:buNone/>
+            </a:pPr>
+            <a:r>
+              <a:rPr lang="en-US" sz="1450" dirty="0">
+                <a:solidFill>
+                  <a:srgbClr val="8A94A3"/>
+                </a:solidFill>
+              </a:rPr>
+              <a:t>답의 핵심  </a:t>
+            </a:r>
+            <a:pPr indent="0" marL="0">
+              <a:spcAft>
+                <a:spcPts val="800"/>
+              </a:spcAft>
+              <a:buNone/>
+            </a:pPr>
+            <a:r>
+              <a:rPr lang="en-US" sz="1450" dirty="0">
+                <a:solidFill>
+                  <a:schemeClr val="tx1"/>
+                </a:solidFill>
+              </a:rPr>
+              <a:t>커넥션 풀 늘리기, 트래픽 분산…</a:t>
+            </a:r>
+            <a:endParaRPr lang="en-US" sz="1450" dirty="0"/>
+          </a:p>
+        </p:txBody>
+      </p:sp>
+      <p:sp>
+        <p:nvSpPr>
+          <p:cNvPr id="9" name="demo-final"/>
+          <p:cNvSpPr/>
+          <p:nvPr/>
+        </p:nvSpPr>
+        <p:spPr>
+          <a:xfrm>
+            <a:off x="6153912" y="2560320"/>
+            <a:ext cx="5458968" cy="2926080"/>
+          </a:xfrm>
+          <a:prstGeom prst="roundRect">
+            <a:avLst>
+              <a:gd name="adj" fmla="val 3750"/>
+            </a:avLst>
+          </a:prstGeom>
+          <a:solidFill>
+            <a:schemeClr val="bg2"/>
+          </a:solidFill>
+          <a:ln w="12700">
+            <a:solidFill>
+              <a:schemeClr val="bg2"/>
+            </a:solidFill>
+            <a:prstDash val="solid"/>
+          </a:ln>
+        </p:spPr>
+      </p:sp>
+      <p:sp>
+        <p:nvSpPr>
+          <p:cNvPr id="10" name="Text 8"/>
+          <p:cNvSpPr txBox="1"/>
+          <p:nvPr/>
+        </p:nvSpPr>
+        <p:spPr>
+          <a:xfrm>
+            <a:off x="6428232" y="2743200"/>
+            <a:ext cx="1828800" cy="411480"/>
+          </a:xfrm>
+          <a:prstGeom prst="rect">
+            <a:avLst/>
+          </a:prstGeom>
+          <a:noFill/>
+          <a:ln/>
+        </p:spPr>
+        <p:txBody>
+          <a:bodyPr wrap="square" lIns="0" tIns="0" rIns="0" bIns="0" rtlCol="0" anchor="ctr"/>
+          <a:lstStyle/>
+          <a:p>
+            <a:pPr indent="0" marL="0">
+              <a:buNone/>
+            </a:pPr>
+            <a:r>
+              <a:rPr lang="en-US" sz="1800" b="1" dirty="0">
+                <a:solidFill>
+                  <a:schemeClr val="tx2"/>
+                </a:solidFill>
+              </a:rPr>
+              <a:t>[final]</a:t>
+            </a:r>
+            <a:endParaRPr lang="en-US" sz="1800" dirty="0"/>
+          </a:p>
+        </p:txBody>
+      </p:sp>
+      <p:sp>
+        <p:nvSpPr>
+          <p:cNvPr id="11" name="Text 9"/>
+          <p:cNvSpPr txBox="1"/>
+          <p:nvPr/>
+        </p:nvSpPr>
+        <p:spPr>
+          <a:xfrm>
+            <a:off x="10177272" y="2743200"/>
+            <a:ext cx="1188720" cy="411480"/>
+          </a:xfrm>
+          <a:prstGeom prst="rect">
+            <a:avLst/>
+          </a:prstGeom>
+          <a:noFill/>
+          <a:ln/>
+        </p:spPr>
+        <p:txBody>
+          <a:bodyPr wrap="square" lIns="0" tIns="0" rIns="0" bIns="0" rtlCol="0" anchor="ctr"/>
+          <a:lstStyle/>
+          <a:p>
+            <a:pPr algn="r" indent="0" marL="0">
+              <a:buNone/>
+            </a:pPr>
+            <a:r>
+              <a:rPr lang="en-US" sz="1600" b="1" dirty="0">
+                <a:solidFill>
+                  <a:schemeClr val="accent2"/>
+                </a:solidFill>
+              </a:rPr>
+              <a:t>정답 포함</a:t>
+            </a:r>
+            <a:endParaRPr lang="en-US" sz="1600" dirty="0"/>
+          </a:p>
+        </p:txBody>
+      </p:sp>
+      <p:sp>
+        <p:nvSpPr>
+          <p:cNvPr id="12" name="Text 10"/>
+          <p:cNvSpPr txBox="1"/>
+          <p:nvPr/>
+        </p:nvSpPr>
+        <p:spPr>
+          <a:xfrm>
+            <a:off x="6428232" y="3291840"/>
+            <a:ext cx="4937760" cy="2011680"/>
+          </a:xfrm>
+          <a:prstGeom prst="rect">
+            <a:avLst/>
+          </a:prstGeom>
+          <a:noFill/>
+          <a:ln/>
+        </p:spPr>
+        <p:txBody>
+          <a:bodyPr wrap="square" lIns="0" tIns="0" rIns="0" bIns="0" rtlCol="0" anchor="t"/>
+          <a:lstStyle/>
+          <a:p>
+            <a:pPr indent="0" marL="0">
+              <a:spcAft>
+                <a:spcPts val="800"/>
+              </a:spcAft>
+              <a:buNone/>
+            </a:pPr>
+            <a:r>
+              <a:rPr lang="en-US" sz="1450" dirty="0">
+                <a:solidFill>
+                  <a:srgbClr val="8A94A3"/>
+                </a:solidFill>
+              </a:rPr>
+              <a:t>고른 런북  </a:t>
+            </a:r>
+            <a:pPr indent="0" marL="0">
+              <a:spcAft>
+                <a:spcPts val="800"/>
+              </a:spcAft>
+              <a:buNone/>
+            </a:pPr>
+            <a:r>
+              <a:rPr lang="en-US" sz="1450" b="1" dirty="0">
+                <a:solidFill>
+                  <a:schemeClr val="tx1"/>
+                </a:solidFill>
+              </a:rPr>
+              <a:t>db-down (+disk-full 혼입)</a:t>
+            </a:r>
+            <a:endParaRPr lang="en-US" sz="1450" dirty="0"/>
+          </a:p>
+          <a:p>
+            <a:pPr indent="0" marL="0">
+              <a:spcAft>
+                <a:spcPts val="800"/>
+              </a:spcAft>
+              <a:buNone/>
+            </a:pPr>
+            <a:r>
+              <a:rPr lang="en-US" sz="1450" dirty="0">
+                <a:solidFill>
+                  <a:srgbClr val="8A94A3"/>
+                </a:solidFill>
+              </a:rPr>
+              <a:t>답의 핵심  </a:t>
+            </a:r>
+            <a:pPr indent="0" marL="0">
+              <a:spcAft>
+                <a:spcPts val="800"/>
+              </a:spcAft>
+              <a:buNone/>
+            </a:pPr>
+            <a:r>
+              <a:rPr lang="en-US" sz="1450" dirty="0">
+                <a:solidFill>
+                  <a:schemeClr val="tx1"/>
+                </a:solidFill>
+              </a:rPr>
+              <a:t>커넥션 풀 점검, 필요 시 failover 노드로 전환…</a:t>
+            </a:r>
+            <a:endParaRPr lang="en-US" sz="1450" dirty="0"/>
+          </a:p>
+        </p:txBody>
+      </p:sp>
+      <p:sp>
+        <p:nvSpPr>
+          <p:cNvPr id="13" name="Text 11"/>
+          <p:cNvSpPr txBox="1"/>
+          <p:nvPr/>
+        </p:nvSpPr>
+        <p:spPr>
+          <a:xfrm>
+            <a:off x="548640" y="5715000"/>
+            <a:ext cx="11064240" cy="274320"/>
+          </a:xfrm>
+          <a:prstGeom prst="rect">
+            <a:avLst/>
+          </a:prstGeom>
+          <a:noFill/>
+          <a:ln/>
+        </p:spPr>
+        <p:txBody>
+          <a:bodyPr wrap="square" lIns="0" tIns="0" rIns="0" bIns="0" rtlCol="0" anchor="ctr"/>
+          <a:lstStyle/>
+          <a:p>
+            <a:pPr indent="0" marL="0">
+              <a:buNone/>
+            </a:pPr>
+            <a:r>
+              <a:rPr lang="en-US" sz="1050" dirty="0">
+                <a:solidFill>
+                  <a:schemeClr val="accent3"/>
+                </a:solidFill>
+              </a:rPr>
+              <a:t>질문: "DB 프라이머리가 다운됐습니다. 대응 절차를 알려주세요." 화면 하나에 런북 정오·답변·지연·비용·근거 없는 수치. 기록 results/raw/demo_*.json</a:t>
+            </a:r>
+            <a:endParaRPr lang="en-US" sz="1050" dirty="0"/>
+          </a:p>
+        </p:txBody>
+      </p:sp>
+      <p:sp>
+        <p:nvSpPr>
+          <p:cNvPr id="25" name="Slide Number Placeholder 0"/>
+          <p:cNvSpPr>
+            <a:spLocks noGrp="1"/>
+          </p:cNvSpPr>
+          <p:nvPr>
+            <p:ph type="sldNum" sz="quarter" idx="4294967295"/>
+          </p:nvPr>
+        </p:nvSpPr>
+        <p:spPr>
+          <a:xfrm>
+            <a:off x="11155680" y="6400800"/>
+            <a:ext cx="457200" cy="274320"/>
+          </a:xfrm>
+          <a:prstGeom prst="rect">
+            <a:avLst/>
+          </a:prstGeom>
+          <a:extLst>
+            <a:ext uri="{C572A759-6A51-4108-AA02-DFA0A04FC94B}">
+              <ma14:wrappingTextBoxFlag xmlns:ma14="http://schemas.microsoft.com/office/mac/drawingml/2011/main" val="0"/>
+            </a:ext>
+          </a:extLst>
+        </p:spPr>
+        <p:txBody>
+          <a:bodyPr/>
+          <a:lstStyle>
+            <a:lvl1pPr>
+              <a:defRPr sz="1000">
+                <a:solidFill>
+                  <a:schemeClr val="accent3"/>
+                </a:solidFill>
+              </a:defRPr>
+            </a:lvl1pPr>
+          </a:lstStyle>
+          <a:p>
+            <a:pPr algn="r"/>
+            <a:fld id="{F7021451-1387-4CA6-816F-3879F97B5CBC}" type="slidenum">
+              <a:rPr b="0" lang="en-US"/>
+              <a:t>15</a:t>
+            </a:fld>
+            <a:endParaRPr lang="en-US"/>
+          </a:p>
+        </p:txBody>
+      </p:sp>
+    </p:spTree>
+  </p:cSld>
+  <p:clrMapOvr>
+    <a:masterClrMapping/>
+  </p:clrMapOvr>
+</p:sld>
+</file>
+
+<file path=ppt/slides/slide16.xml><?xml version="1.0" encoding="utf-8"?>
+<p:sld xmlns:a="http://schemas.openxmlformats.org/drawingml/2006/main" xmlns:r="http://schemas.openxmlformats.org/officeDocument/2006/relationships" xmlns:p="http://schemas.openxmlformats.org/presentationml/2006/main">
+  <p:cSld name="Slide 16">
+    <p:spTree>
+      <p:nvGrpSpPr>
+        <p:cNvPr id="1" name=""/>
+        <p:cNvGrpSpPr/>
+        <p:nvPr/>
+      </p:nvGrpSpPr>
+      <p:grpSpPr>
+        <a:xfrm>
+          <a:off x="0" y="0"/>
+          <a:ext cx="0" cy="0"/>
+          <a:chOff x="0" y="0"/>
+          <a:chExt cx="0" cy="0"/>
+        </a:xfrm>
+      </p:grpSpPr>
+      <p:sp>
+        <p:nvSpPr>
+          <p:cNvPr id="2" name="Text 0"/>
+          <p:cNvSpPr/>
+          <p:nvPr>
+            <p:ph idx="100" type="title" hasCustomPrompt="1"/>
+          </p:nvPr>
+        </p:nvSpPr>
+        <p:spPr>
+          <a:xfrm>
+            <a:off x="548640" y="320040"/>
+            <a:ext cx="11064240" cy="777240"/>
+          </a:xfrm>
+          <a:prstGeom prst="rect">
+            <a:avLst/>
+          </a:prstGeom>
+          <a:noFill/>
+          <a:ln/>
+        </p:spPr>
+        <p:txBody>
+          <a:bodyPr wrap="square" lIns="0" tIns="0" rIns="0" bIns="0" rtlCol="0" anchor="ctr"/>
+          <a:lstStyle/>
+          <a:p>
+            <a:pPr algn="l" indent="0" marL="0">
+              <a:buNone/>
+            </a:pPr>
+            <a:r>
+              <a:rPr lang="en-US" sz="2800" b="1" dirty="0">
+                <a:solidFill>
+                  <a:schemeClr val="tx2"/>
+                </a:solidFill>
+              </a:rPr>
+              <a:t>한계와 다음 개선</a:t>
+            </a:r>
+            <a:endParaRPr lang="en-US" sz="2800" dirty="0"/>
+          </a:p>
+        </p:txBody>
+      </p:sp>
+      <p:sp>
+        <p:nvSpPr>
+          <p:cNvPr id="3" name="lim-0"/>
+          <p:cNvSpPr/>
+          <p:nvPr/>
+        </p:nvSpPr>
+        <p:spPr>
+          <a:xfrm>
+            <a:off x="548640" y="1280160"/>
+            <a:ext cx="11064240" cy="1078992"/>
+          </a:xfrm>
+          <a:prstGeom prst="roundRect">
+            <a:avLst>
+              <a:gd name="adj" fmla="val 10169"/>
+            </a:avLst>
+          </a:prstGeom>
+          <a:solidFill>
+            <a:schemeClr val="bg2"/>
+          </a:solidFill>
+          <a:ln w="12700">
+            <a:solidFill>
+              <a:schemeClr val="bg2"/>
+            </a:solidFill>
+            <a:prstDash val="solid"/>
+          </a:ln>
+        </p:spPr>
+      </p:sp>
+      <p:sp>
+        <p:nvSpPr>
+          <p:cNvPr id="4" name="lim-dot-0"/>
+          <p:cNvSpPr/>
+          <p:nvPr/>
+        </p:nvSpPr>
+        <p:spPr>
+          <a:xfrm>
+            <a:off x="777240" y="1609344"/>
+            <a:ext cx="411480" cy="411480"/>
+          </a:xfrm>
+          <a:prstGeom prst="ellipse">
+            <a:avLst/>
+          </a:prstGeom>
+          <a:solidFill>
+            <a:schemeClr val="accent1"/>
+          </a:solidFill>
+          <a:ln w="12700">
+            <a:solidFill>
+              <a:schemeClr val="accent1"/>
+            </a:solidFill>
+            <a:prstDash val="solid"/>
+          </a:ln>
+        </p:spPr>
+      </p:sp>
+      <p:sp>
+        <p:nvSpPr>
+          <p:cNvPr id="5" name="Text 3"/>
+          <p:cNvSpPr txBox="1"/>
+          <p:nvPr/>
+        </p:nvSpPr>
+        <p:spPr>
+          <a:xfrm>
+            <a:off x="777240" y="1609344"/>
+            <a:ext cx="411480" cy="411480"/>
+          </a:xfrm>
+          <a:prstGeom prst="rect">
+            <a:avLst/>
+          </a:prstGeom>
+          <a:noFill/>
+          <a:ln/>
+        </p:spPr>
+        <p:txBody>
+          <a:bodyPr wrap="square" lIns="0" tIns="0" rIns="0" bIns="0" rtlCol="0" anchor="ctr"/>
+          <a:lstStyle/>
+          <a:p>
+            <a:pPr algn="ctr" indent="0" marL="0">
+              <a:buNone/>
+            </a:pPr>
+            <a:r>
+              <a:rPr lang="en-US" sz="1600" b="1" dirty="0">
+                <a:solidFill>
+                  <a:schemeClr val="bg1"/>
+                </a:solidFill>
+              </a:rPr>
+              <a:t>!</a:t>
+            </a:r>
+            <a:endParaRPr lang="en-US" sz="1600" dirty="0"/>
+          </a:p>
+        </p:txBody>
+      </p:sp>
+      <p:sp>
+        <p:nvSpPr>
+          <p:cNvPr id="6" name="Text 4"/>
+          <p:cNvSpPr txBox="1"/>
+          <p:nvPr/>
+        </p:nvSpPr>
+        <p:spPr>
+          <a:xfrm>
+            <a:off x="1417320" y="1389888"/>
+            <a:ext cx="4846320" cy="384048"/>
+          </a:xfrm>
+          <a:prstGeom prst="rect">
+            <a:avLst/>
+          </a:prstGeom>
+          <a:noFill/>
+          <a:ln/>
+        </p:spPr>
+        <p:txBody>
+          <a:bodyPr wrap="square" lIns="0" tIns="0" rIns="0" bIns="0" rtlCol="0" anchor="ctr"/>
+          <a:lstStyle/>
+          <a:p>
+            <a:pPr indent="0" marL="0">
+              <a:buNone/>
+            </a:pPr>
+            <a:r>
+              <a:rPr lang="en-US" sz="1600" b="1" dirty="0">
+                <a:solidFill>
+                  <a:schemeClr val="tx2"/>
+                </a:solidFill>
+              </a:rPr>
+              <a:t>일반화 격차</a:t>
+            </a:r>
+            <a:endParaRPr lang="en-US" sz="1600" dirty="0"/>
+          </a:p>
+        </p:txBody>
+      </p:sp>
+      <p:sp>
+        <p:nvSpPr>
+          <p:cNvPr id="7" name="Text 5"/>
+          <p:cNvSpPr txBox="1"/>
+          <p:nvPr/>
+        </p:nvSpPr>
+        <p:spPr>
+          <a:xfrm>
+            <a:off x="1417320" y="1792224"/>
+            <a:ext cx="4846320" cy="502920"/>
+          </a:xfrm>
+          <a:prstGeom prst="rect">
+            <a:avLst/>
+          </a:prstGeom>
+          <a:noFill/>
+          <a:ln/>
+        </p:spPr>
+        <p:txBody>
+          <a:bodyPr wrap="square" lIns="0" tIns="0" rIns="0" bIns="0" rtlCol="0" anchor="ctr"/>
+          <a:lstStyle/>
+          <a:p>
+            <a:pPr indent="0" marL="0">
+              <a:buNone/>
+            </a:pPr>
+            <a:r>
+              <a:rPr lang="en-US" sz="1250" dirty="0">
+                <a:solidFill>
+                  <a:schemeClr val="tx1"/>
+                </a:solidFill>
+              </a:rPr>
+              <a:t>RAG Recall@1이 dev 72% → holdout 52%. 자기 말로 묻는 holdout 질의는 33%</a:t>
+            </a:r>
+            <a:endParaRPr lang="en-US" sz="1250" dirty="0"/>
+          </a:p>
+        </p:txBody>
+      </p:sp>
+      <p:sp>
+        <p:nvSpPr>
+          <p:cNvPr id="8" name="Text 6"/>
+          <p:cNvSpPr txBox="1"/>
+          <p:nvPr/>
+        </p:nvSpPr>
+        <p:spPr>
+          <a:xfrm>
+            <a:off x="6492240" y="1389888"/>
+            <a:ext cx="4937760" cy="868680"/>
+          </a:xfrm>
+          <a:prstGeom prst="rect">
+            <a:avLst/>
+          </a:prstGeom>
+          <a:noFill/>
+          <a:ln/>
+        </p:spPr>
+        <p:txBody>
+          <a:bodyPr wrap="square" lIns="0" tIns="0" rIns="0" bIns="0" rtlCol="0" anchor="ctr"/>
+          <a:lstStyle/>
+          <a:p>
+            <a:pPr indent="0" marL="0">
+              <a:buNone/>
+            </a:pPr>
+            <a:r>
+              <a:rPr lang="en-US" sz="1350" dirty="0">
+                <a:solidFill>
+                  <a:schemeClr val="accent6"/>
+                </a:solidFill>
+              </a:rPr>
+              <a:t>다음: 런북 본문 외에 증상 예시 문장을 색인해 질문과 문서의 표현 차이를 줄임</a:t>
+            </a:r>
+            <a:endParaRPr lang="en-US" sz="1350" dirty="0"/>
+          </a:p>
+        </p:txBody>
+      </p:sp>
+      <p:sp>
+        <p:nvSpPr>
+          <p:cNvPr id="9" name="lim-1"/>
+          <p:cNvSpPr/>
+          <p:nvPr/>
+        </p:nvSpPr>
+        <p:spPr>
+          <a:xfrm>
+            <a:off x="548640" y="2487168"/>
+            <a:ext cx="11064240" cy="1078992"/>
+          </a:xfrm>
+          <a:prstGeom prst="roundRect">
+            <a:avLst>
+              <a:gd name="adj" fmla="val 10169"/>
+            </a:avLst>
+          </a:prstGeom>
+          <a:solidFill>
+            <a:schemeClr val="bg2"/>
+          </a:solidFill>
+          <a:ln w="12700">
+            <a:solidFill>
+              <a:schemeClr val="bg2"/>
+            </a:solidFill>
+            <a:prstDash val="solid"/>
+          </a:ln>
+        </p:spPr>
+      </p:sp>
+      <p:sp>
+        <p:nvSpPr>
+          <p:cNvPr id="10" name="lim-dot-1"/>
+          <p:cNvSpPr/>
+          <p:nvPr/>
+        </p:nvSpPr>
+        <p:spPr>
+          <a:xfrm>
+            <a:off x="777240" y="2816352"/>
+            <a:ext cx="411480" cy="411480"/>
+          </a:xfrm>
+          <a:prstGeom prst="ellipse">
+            <a:avLst/>
+          </a:prstGeom>
+          <a:solidFill>
+            <a:schemeClr val="accent1"/>
+          </a:solidFill>
+          <a:ln w="12700">
+            <a:solidFill>
+              <a:schemeClr val="accent1"/>
+            </a:solidFill>
+            <a:prstDash val="solid"/>
+          </a:ln>
+        </p:spPr>
+      </p:sp>
+      <p:sp>
+        <p:nvSpPr>
+          <p:cNvPr id="11" name="Text 9"/>
+          <p:cNvSpPr txBox="1"/>
+          <p:nvPr/>
+        </p:nvSpPr>
+        <p:spPr>
+          <a:xfrm>
+            <a:off x="777240" y="2816352"/>
+            <a:ext cx="411480" cy="411480"/>
+          </a:xfrm>
+          <a:prstGeom prst="rect">
+            <a:avLst/>
+          </a:prstGeom>
+          <a:noFill/>
+          <a:ln/>
+        </p:spPr>
+        <p:txBody>
+          <a:bodyPr wrap="square" lIns="0" tIns="0" rIns="0" bIns="0" rtlCol="0" anchor="ctr"/>
+          <a:lstStyle/>
+          <a:p>
+            <a:pPr algn="ctr" indent="0" marL="0">
+              <a:buNone/>
+            </a:pPr>
+            <a:r>
+              <a:rPr lang="en-US" sz="1600" b="1" dirty="0">
+                <a:solidFill>
+                  <a:schemeClr val="bg1"/>
+                </a:solidFill>
+              </a:rPr>
+              <a:t>!</a:t>
+            </a:r>
+            <a:endParaRPr lang="en-US" sz="1600" dirty="0"/>
+          </a:p>
+        </p:txBody>
+      </p:sp>
+      <p:sp>
+        <p:nvSpPr>
+          <p:cNvPr id="12" name="Text 10"/>
+          <p:cNvSpPr txBox="1"/>
+          <p:nvPr/>
+        </p:nvSpPr>
+        <p:spPr>
+          <a:xfrm>
+            <a:off x="1417320" y="2596896"/>
+            <a:ext cx="4846320" cy="384048"/>
+          </a:xfrm>
+          <a:prstGeom prst="rect">
+            <a:avLst/>
+          </a:prstGeom>
+          <a:noFill/>
+          <a:ln/>
+        </p:spPr>
+        <p:txBody>
+          <a:bodyPr wrap="square" lIns="0" tIns="0" rIns="0" bIns="0" rtlCol="0" anchor="ctr"/>
+          <a:lstStyle/>
+          <a:p>
+            <a:pPr indent="0" marL="0">
+              <a:buNone/>
+            </a:pPr>
+            <a:r>
+              <a:rPr lang="en-US" sz="1600" b="1" dirty="0">
+                <a:solidFill>
+                  <a:schemeClr val="tx2"/>
+                </a:solidFill>
+              </a:rPr>
+              <a:t>무관 런북 혼입이 남음</a:t>
+            </a:r>
+            <a:endParaRPr lang="en-US" sz="1600" dirty="0"/>
+          </a:p>
+        </p:txBody>
+      </p:sp>
+      <p:sp>
+        <p:nvSpPr>
+          <p:cNvPr id="13" name="Text 11"/>
+          <p:cNvSpPr txBox="1"/>
+          <p:nvPr/>
+        </p:nvSpPr>
+        <p:spPr>
+          <a:xfrm>
+            <a:off x="1417320" y="2999232"/>
+            <a:ext cx="4846320" cy="502920"/>
+          </a:xfrm>
+          <a:prstGeom prst="rect">
+            <a:avLst/>
+          </a:prstGeom>
+          <a:noFill/>
+          <a:ln/>
+        </p:spPr>
+        <p:txBody>
+          <a:bodyPr wrap="square" lIns="0" tIns="0" rIns="0" bIns="0" rtlCol="0" anchor="ctr"/>
+          <a:lstStyle/>
+          <a:p>
+            <a:pPr indent="0" marL="0">
+              <a:buNone/>
+            </a:pPr>
+            <a:r>
+              <a:rPr lang="en-US" sz="1250" dirty="0">
+                <a:solidFill>
+                  <a:schemeClr val="tx1"/>
+                </a:solidFill>
+              </a:rPr>
+              <a:t>final 혼입 35%. 1위와 점수가 가까운 런북을 함께 넣는 규칙, 맞는 런북이 없는 질문에도 런북이 들어가는 경우</a:t>
+            </a:r>
+            <a:endParaRPr lang="en-US" sz="1250" dirty="0"/>
+          </a:p>
+        </p:txBody>
+      </p:sp>
+      <p:sp>
+        <p:nvSpPr>
+          <p:cNvPr id="14" name="Text 12"/>
+          <p:cNvSpPr txBox="1"/>
+          <p:nvPr/>
+        </p:nvSpPr>
+        <p:spPr>
+          <a:xfrm>
+            <a:off x="6492240" y="2596896"/>
+            <a:ext cx="4937760" cy="868680"/>
+          </a:xfrm>
+          <a:prstGeom prst="rect">
+            <a:avLst/>
+          </a:prstGeom>
+          <a:noFill/>
+          <a:ln/>
+        </p:spPr>
+        <p:txBody>
+          <a:bodyPr wrap="square" lIns="0" tIns="0" rIns="0" bIns="0" rtlCol="0" anchor="ctr"/>
+          <a:lstStyle/>
+          <a:p>
+            <a:pPr indent="0" marL="0">
+              <a:buNone/>
+            </a:pPr>
+            <a:r>
+              <a:rPr lang="en-US" sz="1350" dirty="0">
+                <a:solidFill>
+                  <a:schemeClr val="accent6"/>
+                </a:solidFill>
+              </a:rPr>
+              <a:t>다음: 재순위(reranker), 질문 속 증상 수에 맞춘 투입 개수</a:t>
+            </a:r>
+            <a:endParaRPr lang="en-US" sz="1350" dirty="0"/>
+          </a:p>
+        </p:txBody>
+      </p:sp>
+      <p:sp>
+        <p:nvSpPr>
+          <p:cNvPr id="15" name="lim-2"/>
+          <p:cNvSpPr/>
+          <p:nvPr/>
+        </p:nvSpPr>
+        <p:spPr>
+          <a:xfrm>
+            <a:off x="548640" y="3694176"/>
+            <a:ext cx="11064240" cy="1078992"/>
+          </a:xfrm>
+          <a:prstGeom prst="roundRect">
+            <a:avLst>
+              <a:gd name="adj" fmla="val 10169"/>
+            </a:avLst>
+          </a:prstGeom>
+          <a:solidFill>
+            <a:schemeClr val="bg2"/>
+          </a:solidFill>
+          <a:ln w="12700">
+            <a:solidFill>
+              <a:schemeClr val="bg2"/>
+            </a:solidFill>
+            <a:prstDash val="solid"/>
+          </a:ln>
+        </p:spPr>
+      </p:sp>
+      <p:sp>
+        <p:nvSpPr>
+          <p:cNvPr id="16" name="lim-dot-2"/>
+          <p:cNvSpPr/>
+          <p:nvPr/>
+        </p:nvSpPr>
+        <p:spPr>
+          <a:xfrm>
+            <a:off x="777240" y="4023360"/>
+            <a:ext cx="411480" cy="411480"/>
+          </a:xfrm>
+          <a:prstGeom prst="ellipse">
+            <a:avLst/>
+          </a:prstGeom>
+          <a:solidFill>
+            <a:schemeClr val="accent1"/>
+          </a:solidFill>
+          <a:ln w="12700">
+            <a:solidFill>
+              <a:schemeClr val="accent1"/>
+            </a:solidFill>
+            <a:prstDash val="solid"/>
+          </a:ln>
+        </p:spPr>
+      </p:sp>
+      <p:sp>
+        <p:nvSpPr>
+          <p:cNvPr id="17" name="Text 15"/>
+          <p:cNvSpPr txBox="1"/>
+          <p:nvPr/>
+        </p:nvSpPr>
+        <p:spPr>
+          <a:xfrm>
+            <a:off x="777240" y="4023360"/>
+            <a:ext cx="411480" cy="411480"/>
+          </a:xfrm>
+          <a:prstGeom prst="rect">
+            <a:avLst/>
+          </a:prstGeom>
+          <a:noFill/>
+          <a:ln/>
+        </p:spPr>
+        <p:txBody>
+          <a:bodyPr wrap="square" lIns="0" tIns="0" rIns="0" bIns="0" rtlCol="0" anchor="ctr"/>
+          <a:lstStyle/>
+          <a:p>
+            <a:pPr algn="ctr" indent="0" marL="0">
+              <a:buNone/>
+            </a:pPr>
+            <a:r>
+              <a:rPr lang="en-US" sz="1600" b="1" dirty="0">
+                <a:solidFill>
+                  <a:schemeClr val="bg1"/>
+                </a:solidFill>
+              </a:rPr>
+              <a:t>!</a:t>
+            </a:r>
+            <a:endParaRPr lang="en-US" sz="1600" dirty="0"/>
+          </a:p>
+        </p:txBody>
+      </p:sp>
+      <p:sp>
+        <p:nvSpPr>
+          <p:cNvPr id="18" name="Text 16"/>
+          <p:cNvSpPr txBox="1"/>
+          <p:nvPr/>
+        </p:nvSpPr>
+        <p:spPr>
+          <a:xfrm>
+            <a:off x="1417320" y="3803904"/>
+            <a:ext cx="4846320" cy="384048"/>
+          </a:xfrm>
+          <a:prstGeom prst="rect">
+            <a:avLst/>
+          </a:prstGeom>
+          <a:noFill/>
+          <a:ln/>
+        </p:spPr>
+        <p:txBody>
+          <a:bodyPr wrap="square" lIns="0" tIns="0" rIns="0" bIns="0" rtlCol="0" anchor="ctr"/>
+          <a:lstStyle/>
+          <a:p>
+            <a:pPr indent="0" marL="0">
+              <a:buNone/>
+            </a:pPr>
+            <a:r>
+              <a:rPr lang="en-US" sz="1600" b="1" dirty="0">
+                <a:solidFill>
+                  <a:schemeClr val="tx2"/>
+                </a:solidFill>
+              </a:rPr>
+              <a:t>캐스케이드의 품질 대가</a:t>
+            </a:r>
+            <a:endParaRPr lang="en-US" sz="1600" dirty="0"/>
+          </a:p>
+        </p:txBody>
+      </p:sp>
+      <p:sp>
+        <p:nvSpPr>
+          <p:cNvPr id="19" name="Text 17"/>
+          <p:cNvSpPr txBox="1"/>
+          <p:nvPr/>
+        </p:nvSpPr>
+        <p:spPr>
+          <a:xfrm>
+            <a:off x="1417320" y="4206240"/>
+            <a:ext cx="4846320" cy="502920"/>
+          </a:xfrm>
+          <a:prstGeom prst="rect">
+            <a:avLst/>
+          </a:prstGeom>
+          <a:noFill/>
+          <a:ln/>
+        </p:spPr>
+        <p:txBody>
+          <a:bodyPr wrap="square" lIns="0" tIns="0" rIns="0" bIns="0" rtlCol="0" anchor="ctr"/>
+          <a:lstStyle/>
+          <a:p>
+            <a:pPr indent="0" marL="0">
+              <a:buNone/>
+            </a:pPr>
+            <a:r>
+              <a:rPr lang="en-US" sz="1250" dirty="0">
+                <a:solidFill>
+                  <a:schemeClr val="tx1"/>
+                </a:solidFill>
+              </a:rPr>
+              <a:t>어구 포함 -5%p (유의하지 않음). 저가 초안이 런북 문구를 덜 인용하는 것으로 추정 (미검증)</a:t>
+            </a:r>
+            <a:endParaRPr lang="en-US" sz="1250" dirty="0"/>
+          </a:p>
+        </p:txBody>
+      </p:sp>
+      <p:sp>
+        <p:nvSpPr>
+          <p:cNvPr id="20" name="Text 18"/>
+          <p:cNvSpPr txBox="1"/>
+          <p:nvPr/>
+        </p:nvSpPr>
+        <p:spPr>
+          <a:xfrm>
+            <a:off x="6492240" y="3803904"/>
+            <a:ext cx="4937760" cy="868680"/>
+          </a:xfrm>
+          <a:prstGeom prst="rect">
+            <a:avLst/>
+          </a:prstGeom>
+          <a:noFill/>
+          <a:ln/>
+        </p:spPr>
+        <p:txBody>
+          <a:bodyPr wrap="square" lIns="0" tIns="0" rIns="0" bIns="0" rtlCol="0" anchor="ctr"/>
+          <a:lstStyle/>
+          <a:p>
+            <a:pPr indent="0" marL="0">
+              <a:buNone/>
+            </a:pPr>
+            <a:r>
+              <a:rPr lang="en-US" sz="1350" dirty="0">
+                <a:solidFill>
+                  <a:schemeClr val="accent6"/>
+                </a:solidFill>
+              </a:rPr>
+              <a:t>다음: Judge 대신 결정적 어구 대조로 승급 기준을 정함</a:t>
+            </a:r>
+            <a:endParaRPr lang="en-US" sz="1350" dirty="0"/>
+          </a:p>
+        </p:txBody>
+      </p:sp>
+      <p:sp>
+        <p:nvSpPr>
+          <p:cNvPr id="21" name="lim-3"/>
+          <p:cNvSpPr/>
+          <p:nvPr/>
+        </p:nvSpPr>
+        <p:spPr>
+          <a:xfrm>
+            <a:off x="548640" y="4901184"/>
+            <a:ext cx="11064240" cy="1078992"/>
+          </a:xfrm>
+          <a:prstGeom prst="roundRect">
+            <a:avLst>
+              <a:gd name="adj" fmla="val 10169"/>
+            </a:avLst>
+          </a:prstGeom>
+          <a:solidFill>
+            <a:schemeClr val="bg2"/>
+          </a:solidFill>
+          <a:ln w="12700">
+            <a:solidFill>
+              <a:schemeClr val="bg2"/>
+            </a:solidFill>
+            <a:prstDash val="solid"/>
+          </a:ln>
+        </p:spPr>
+      </p:sp>
+      <p:sp>
+        <p:nvSpPr>
+          <p:cNvPr id="22" name="lim-dot-3"/>
+          <p:cNvSpPr/>
+          <p:nvPr/>
+        </p:nvSpPr>
+        <p:spPr>
+          <a:xfrm>
+            <a:off x="777240" y="5230368"/>
+            <a:ext cx="411480" cy="411480"/>
+          </a:xfrm>
+          <a:prstGeom prst="ellipse">
+            <a:avLst/>
+          </a:prstGeom>
+          <a:solidFill>
+            <a:schemeClr val="accent1"/>
+          </a:solidFill>
+          <a:ln w="12700">
+            <a:solidFill>
+              <a:schemeClr val="accent1"/>
+            </a:solidFill>
+            <a:prstDash val="solid"/>
+          </a:ln>
+        </p:spPr>
+      </p:sp>
+      <p:sp>
+        <p:nvSpPr>
+          <p:cNvPr id="23" name="Text 21"/>
+          <p:cNvSpPr txBox="1"/>
+          <p:nvPr/>
+        </p:nvSpPr>
+        <p:spPr>
+          <a:xfrm>
+            <a:off x="777240" y="5230368"/>
+            <a:ext cx="411480" cy="411480"/>
+          </a:xfrm>
+          <a:prstGeom prst="rect">
+            <a:avLst/>
+          </a:prstGeom>
+          <a:noFill/>
+          <a:ln/>
+        </p:spPr>
+        <p:txBody>
+          <a:bodyPr wrap="square" lIns="0" tIns="0" rIns="0" bIns="0" rtlCol="0" anchor="ctr"/>
+          <a:lstStyle/>
+          <a:p>
+            <a:pPr algn="ctr" indent="0" marL="0">
+              <a:buNone/>
+            </a:pPr>
+            <a:r>
+              <a:rPr lang="en-US" sz="1600" b="1" dirty="0">
+                <a:solidFill>
+                  <a:schemeClr val="bg1"/>
+                </a:solidFill>
+              </a:rPr>
+              <a:t>!</a:t>
+            </a:r>
+            <a:endParaRPr lang="en-US" sz="1600" dirty="0"/>
+          </a:p>
+        </p:txBody>
+      </p:sp>
+      <p:sp>
+        <p:nvSpPr>
+          <p:cNvPr id="24" name="Text 22"/>
+          <p:cNvSpPr txBox="1"/>
+          <p:nvPr/>
+        </p:nvSpPr>
+        <p:spPr>
+          <a:xfrm>
+            <a:off x="1417320" y="5010912"/>
+            <a:ext cx="4846320" cy="384048"/>
+          </a:xfrm>
+          <a:prstGeom prst="rect">
+            <a:avLst/>
+          </a:prstGeom>
+          <a:noFill/>
+          <a:ln/>
+        </p:spPr>
+        <p:txBody>
+          <a:bodyPr wrap="square" lIns="0" tIns="0" rIns="0" bIns="0" rtlCol="0" anchor="ctr"/>
+          <a:lstStyle/>
+          <a:p>
+            <a:pPr indent="0" marL="0">
+              <a:buNone/>
+            </a:pPr>
+            <a:r>
+              <a:rPr lang="en-US" sz="1600" b="1" dirty="0">
+                <a:solidFill>
+                  <a:schemeClr val="tx2"/>
+                </a:solidFill>
+              </a:rPr>
+              <a:t>평가 규모와 범위</a:t>
+            </a:r>
+            <a:endParaRPr lang="en-US" sz="1600" dirty="0"/>
+          </a:p>
+        </p:txBody>
+      </p:sp>
+      <p:sp>
+        <p:nvSpPr>
+          <p:cNvPr id="25" name="Text 23"/>
+          <p:cNvSpPr txBox="1"/>
+          <p:nvPr/>
+        </p:nvSpPr>
+        <p:spPr>
+          <a:xfrm>
+            <a:off x="1417320" y="5413248"/>
+            <a:ext cx="4846320" cy="502920"/>
+          </a:xfrm>
+          <a:prstGeom prst="rect">
+            <a:avLst/>
+          </a:prstGeom>
+          <a:noFill/>
+          <a:ln/>
+        </p:spPr>
+        <p:txBody>
+          <a:bodyPr wrap="square" lIns="0" tIns="0" rIns="0" bIns="0" rtlCol="0" anchor="ctr"/>
+          <a:lstStyle/>
+          <a:p>
+            <a:pPr indent="0" marL="0">
+              <a:buNone/>
+            </a:pPr>
+            <a:r>
+              <a:rPr lang="en-US" sz="1250" dirty="0">
+                <a:solidFill>
+                  <a:schemeClr val="tx1"/>
+                </a:solidFill>
+              </a:rPr>
+              <a:t>holdout 36건 x 3회 (1건 = 2.8%p). 평가 Judge 포화. 라우터는 개선 범위 밖</a:t>
+            </a:r>
+            <a:endParaRPr lang="en-US" sz="1250" dirty="0"/>
+          </a:p>
+        </p:txBody>
+      </p:sp>
+      <p:sp>
+        <p:nvSpPr>
+          <p:cNvPr id="26" name="Text 24"/>
+          <p:cNvSpPr txBox="1"/>
+          <p:nvPr/>
+        </p:nvSpPr>
+        <p:spPr>
+          <a:xfrm>
+            <a:off x="6492240" y="5010912"/>
+            <a:ext cx="4937760" cy="868680"/>
+          </a:xfrm>
+          <a:prstGeom prst="rect">
+            <a:avLst/>
+          </a:prstGeom>
+          <a:noFill/>
+          <a:ln/>
+        </p:spPr>
+        <p:txBody>
+          <a:bodyPr wrap="square" lIns="0" tIns="0" rIns="0" bIns="0" rtlCol="0" anchor="ctr"/>
+          <a:lstStyle/>
+          <a:p>
+            <a:pPr indent="0" marL="0">
+              <a:buNone/>
+            </a:pPr>
+            <a:r>
+              <a:rPr lang="en-US" sz="1350" dirty="0">
+                <a:solidFill>
+                  <a:schemeClr val="accent6"/>
+                </a:solidFill>
+              </a:rPr>
+              <a:t>다음: 질의 확대, 라우팅 개선을 같은 체계로 재측정</a:t>
+            </a:r>
+            <a:endParaRPr lang="en-US" sz="1350" dirty="0"/>
+          </a:p>
+        </p:txBody>
+      </p:sp>
+      <p:sp>
+        <p:nvSpPr>
+          <p:cNvPr id="25" name="Slide Number Placeholder 0"/>
+          <p:cNvSpPr>
+            <a:spLocks noGrp="1"/>
+          </p:cNvSpPr>
+          <p:nvPr>
+            <p:ph type="sldNum" sz="quarter" idx="4294967295"/>
+          </p:nvPr>
+        </p:nvSpPr>
+        <p:spPr>
+          <a:xfrm>
+            <a:off x="11155680" y="6400800"/>
+            <a:ext cx="457200" cy="274320"/>
+          </a:xfrm>
+          <a:prstGeom prst="rect">
+            <a:avLst/>
+          </a:prstGeom>
+          <a:extLst>
+            <a:ext uri="{C572A759-6A51-4108-AA02-DFA0A04FC94B}">
+              <ma14:wrappingTextBoxFlag xmlns:ma14="http://schemas.microsoft.com/office/mac/drawingml/2011/main" val="0"/>
+            </a:ext>
+          </a:extLst>
+        </p:spPr>
+        <p:txBody>
+          <a:bodyPr/>
+          <a:lstStyle>
+            <a:lvl1pPr>
+              <a:defRPr sz="1000">
+                <a:solidFill>
+                  <a:schemeClr val="accent3"/>
+                </a:solidFill>
+              </a:defRPr>
+            </a:lvl1pPr>
+          </a:lstStyle>
+          <a:p>
+            <a:pPr algn="r"/>
+            <a:fld id="{F7021451-1387-4CA6-816F-3879F97B5CBC}" type="slidenum">
+              <a:rPr b="0" lang="en-US"/>
+              <a:t>16</a:t>
+            </a:fld>
+            <a:endParaRPr lang="en-US"/>
+          </a:p>
+        </p:txBody>
+      </p:sp>
+    </p:spTree>
+  </p:cSld>
+  <p:clrMapOvr>
+    <a:masterClrMapping/>
+  </p:clrMapOvr>
+</p:sld>
+</file>
+
+<file path=ppt/slides/slide2.xml><?xml version="1.0" encoding="utf-8"?>
+<p:sld xmlns:a="http://schemas.openxmlformats.org/drawingml/2006/main" xmlns:r="http://schemas.openxmlformats.org/officeDocument/2006/relationships" xmlns:p="http://schemas.openxmlformats.org/presentationml/2006/main">
+  <p:cSld name="Slide 2">
+    <p:spTree>
+      <p:nvGrpSpPr>
+        <p:cNvPr id="1" name=""/>
+        <p:cNvGrpSpPr/>
+        <p:nvPr/>
+      </p:nvGrpSpPr>
+      <p:grpSpPr>
+        <a:xfrm>
+          <a:off x="0" y="0"/>
+          <a:ext cx="0" cy="0"/>
+          <a:chOff x="0" y="0"/>
+          <a:chExt cx="0" cy="0"/>
+        </a:xfrm>
+      </p:grpSpPr>
+      <p:sp>
+        <p:nvSpPr>
+          <p:cNvPr id="2" name="Text 0"/>
+          <p:cNvSpPr/>
+          <p:nvPr>
+            <p:ph idx="100" type="title" hasCustomPrompt="1"/>
+          </p:nvPr>
+        </p:nvSpPr>
+        <p:spPr>
+          <a:xfrm>
+            <a:off x="548640" y="320040"/>
+            <a:ext cx="11064240" cy="777240"/>
+          </a:xfrm>
+          <a:prstGeom prst="rect">
+            <a:avLst/>
+          </a:prstGeom>
+          <a:noFill/>
+          <a:ln/>
+        </p:spPr>
+        <p:txBody>
+          <a:bodyPr wrap="square" lIns="0" tIns="0" rIns="0" bIns="0" rtlCol="0" anchor="ctr"/>
+          <a:lstStyle/>
+          <a:p>
+            <a:pPr algn="l" indent="0" marL="0">
+              <a:buNone/>
+            </a:pPr>
+            <a:r>
+              <a:rPr lang="en-US" sz="2800" b="1" dirty="0">
+                <a:solidFill>
+                  <a:schemeClr val="tx2"/>
+                </a:solidFill>
+              </a:rPr>
+              <a:t>한 장 요약: 무엇을 고쳤고, 무엇이 효과였나</a:t>
+            </a:r>
+            <a:endParaRPr lang="en-US" sz="2800" dirty="0"/>
+          </a:p>
+        </p:txBody>
+      </p:sp>
+      <p:pic>
+        <p:nvPicPr>
+          <p:cNvPr id="3" name="summary-webtoon" descr="4컷 웹툰: 새벽 당직, 스위치 켜기, 맞는 매뉴얼, 채점관 검사">    </p:cNvPr>
+          <p:cNvPicPr>
+            <a:picLocks noChangeAspect="1"/>
+          </p:cNvPicPr>
+          <p:nvPr/>
+        </p:nvPicPr>
+        <p:blipFill>
+          <a:blip r:embed="rId1"/>
+          <a:stretch>
+            <a:fillRect/>
+          </a:stretch>
+        </p:blipFill>
+        <p:spPr>
+          <a:xfrm>
+            <a:off x="1898119" y="1234440"/>
+            <a:ext cx="4434840" cy="4434840"/>
+          </a:xfrm>
+          <a:prstGeom prst="rect">
+            <a:avLst/>
+          </a:prstGeom>
+        </p:spPr>
+      </p:pic>
+      <p:pic>
+        <p:nvPicPr>
+          <p:cNvPr id="4" name="summary-infographic" descr="결과 숫자 5개 인포그래픽">    </p:cNvPr>
+          <p:cNvPicPr>
+            <a:picLocks noChangeAspect="1"/>
+          </p:cNvPicPr>
+          <p:nvPr/>
+        </p:nvPicPr>
+        <p:blipFill>
+          <a:blip r:embed="rId2"/>
+          <a:stretch>
+            <a:fillRect/>
+          </a:stretch>
+        </p:blipFill>
+        <p:spPr>
+          <a:xfrm>
+            <a:off x="6744439" y="1234440"/>
+            <a:ext cx="3549137" cy="4434840"/>
+          </a:xfrm>
+          <a:prstGeom prst="rect">
+            <a:avLst/>
+          </a:prstGeom>
+        </p:spPr>
+      </p:pic>
+      <p:sp>
+        <p:nvSpPr>
+          <p:cNvPr id="5" name="Text 1"/>
+          <p:cNvSpPr txBox="1"/>
+          <p:nvPr/>
+        </p:nvSpPr>
+        <p:spPr>
+          <a:xfrm>
+            <a:off x="548640" y="5852160"/>
+            <a:ext cx="11064240" cy="274320"/>
+          </a:xfrm>
+          <a:prstGeom prst="rect">
+            <a:avLst/>
+          </a:prstGeom>
+          <a:noFill/>
+          <a:ln/>
+        </p:spPr>
+        <p:txBody>
+          <a:bodyPr wrap="square" lIns="0" tIns="0" rIns="0" bIns="0" rtlCol="0" anchor="ctr"/>
+          <a:lstStyle/>
+          <a:p>
+            <a:pPr indent="0" marL="0">
+              <a:buNone/>
+            </a:pPr>
+            <a:r>
+              <a:rPr lang="en-US" sz="1050" dirty="0">
+                <a:solidFill>
+                  <a:schemeClr val="accent3"/>
+                </a:solidFill>
+              </a:rPr>
+              <a:t>그림은 ChatGPT로 생성 · 그림 속 숫자는 results/*_latest.json, 실제 API 벤치 실측값</a:t>
+            </a:r>
+            <a:endParaRPr lang="en-US" sz="1050" dirty="0"/>
+          </a:p>
+        </p:txBody>
+      </p:sp>
+      <p:sp>
+        <p:nvSpPr>
+          <p:cNvPr id="25" name="Slide Number Placeholder 0"/>
+          <p:cNvSpPr>
+            <a:spLocks noGrp="1"/>
+          </p:cNvSpPr>
+          <p:nvPr>
+            <p:ph type="sldNum" sz="quarter" idx="4294967295"/>
+          </p:nvPr>
+        </p:nvSpPr>
+        <p:spPr>
+          <a:xfrm>
+            <a:off x="11155680" y="6400800"/>
+            <a:ext cx="457200" cy="274320"/>
+          </a:xfrm>
+          <a:prstGeom prst="rect">
+            <a:avLst/>
+          </a:prstGeom>
+          <a:extLst>
+            <a:ext uri="{C572A759-6A51-4108-AA02-DFA0A04FC94B}">
+              <ma14:wrappingTextBoxFlag xmlns:ma14="http://schemas.microsoft.com/office/mac/drawingml/2011/main" val="0"/>
+            </a:ext>
+          </a:extLst>
+        </p:spPr>
+        <p:txBody>
+          <a:bodyPr/>
+          <a:lstStyle>
+            <a:lvl1pPr>
+              <a:defRPr sz="1000">
+                <a:solidFill>
+                  <a:schemeClr val="accent3"/>
+                </a:solidFill>
+              </a:defRPr>
+            </a:lvl1pPr>
+          </a:lstStyle>
+          <a:p>
+            <a:pPr algn="r"/>
+            <a:fld id="{F7021451-1387-4CA6-816F-3879F97B5CBC}" type="slidenum">
+              <a:rPr b="0" lang="en-US"/>
+              <a:t>2</a:t>
+            </a:fld>
+            <a:endParaRPr lang="en-US"/>
+          </a:p>
+        </p:txBody>
+      </p:sp>
+    </p:spTree>
+  </p:cSld>
+  <p:clrMapOvr>
+    <a:masterClrMapping/>
+  </p:clrMapOvr>
+</p:sld>
+</file>
+
+<file path=ppt/slides/slide3.xml><?xml version="1.0" encoding="utf-8"?>
+<p:sld xmlns:a="http://schemas.openxmlformats.org/drawingml/2006/main" xmlns:r="http://schemas.openxmlformats.org/officeDocument/2006/relationships" xmlns:p="http://schemas.openxmlformats.org/presentationml/2006/main">
+  <p:cSld name="Slide 3">
+    <p:spTree>
+      <p:nvGrpSpPr>
+        <p:cNvPr id="1" name=""/>
+        <p:cNvGrpSpPr/>
+        <p:nvPr/>
+      </p:nvGrpSpPr>
+      <p:grpSpPr>
+        <a:xfrm>
+          <a:off x="0" y="0"/>
+          <a:ext cx="0" cy="0"/>
+          <a:chOff x="0" y="0"/>
+          <a:chExt cx="0" cy="0"/>
+        </a:xfrm>
+      </p:grpSpPr>
+      <p:sp>
+        <p:nvSpPr>
+          <p:cNvPr id="2" name="Text 0"/>
+          <p:cNvSpPr/>
+          <p:nvPr>
+            <p:ph idx="100" type="title" hasCustomPrompt="1"/>
+          </p:nvPr>
+        </p:nvSpPr>
+        <p:spPr>
+          <a:xfrm>
+            <a:off x="548640" y="320040"/>
+            <a:ext cx="11064240" cy="777240"/>
+          </a:xfrm>
+          <a:prstGeom prst="rect">
+            <a:avLst/>
+          </a:prstGeom>
+          <a:noFill/>
+          <a:ln/>
+        </p:spPr>
+        <p:txBody>
+          <a:bodyPr wrap="square" lIns="0" tIns="0" rIns="0" bIns="0" rtlCol="0" anchor="ctr"/>
+          <a:lstStyle/>
+          <a:p>
+            <a:pPr algn="l" indent="0" marL="0">
+              <a:buNone/>
+            </a:pPr>
+            <a:r>
+              <a:rPr lang="en-US" sz="2800" b="1" dirty="0">
+                <a:solidFill>
+                  <a:schemeClr val="tx2"/>
+                </a:solidFill>
+              </a:rPr>
+              <a:t>결론: 조치 정확도는 RAG가, 비용은 캐스케이드가 낮췄다</a:t>
+            </a:r>
+            <a:endParaRPr lang="en-US" sz="2800" dirty="0"/>
+          </a:p>
+        </p:txBody>
+      </p:sp>
+      <p:sp>
+        <p:nvSpPr>
+          <p:cNvPr id="3" name="stat-miss"/>
+          <p:cNvSpPr/>
+          <p:nvPr/>
+        </p:nvSpPr>
+        <p:spPr>
+          <a:xfrm>
+            <a:off x="548640" y="1371600"/>
+            <a:ext cx="3520440" cy="1828800"/>
+          </a:xfrm>
+          <a:prstGeom prst="roundRect">
+            <a:avLst>
+              <a:gd name="adj" fmla="val 6000"/>
+            </a:avLst>
+          </a:prstGeom>
+          <a:solidFill>
+            <a:schemeClr val="bg2"/>
+          </a:solidFill>
+          <a:ln w="12700">
+            <a:solidFill>
+              <a:schemeClr val="bg2"/>
+            </a:solidFill>
+            <a:prstDash val="solid"/>
+          </a:ln>
+        </p:spPr>
+      </p:sp>
+      <p:sp>
+        <p:nvSpPr>
+          <p:cNvPr id="4" name="Text 2"/>
+          <p:cNvSpPr txBox="1"/>
+          <p:nvPr/>
+        </p:nvSpPr>
+        <p:spPr>
+          <a:xfrm>
+            <a:off x="822960" y="1572768"/>
+            <a:ext cx="2971800" cy="868680"/>
+          </a:xfrm>
+          <a:prstGeom prst="rect">
+            <a:avLst/>
+          </a:prstGeom>
+          <a:noFill/>
+          <a:ln/>
+        </p:spPr>
+        <p:txBody>
+          <a:bodyPr wrap="square" lIns="0" tIns="0" rIns="0" bIns="0" rtlCol="0" anchor="ctr"/>
+          <a:lstStyle/>
+          <a:p>
+            <a:pPr indent="0" marL="0">
+              <a:buNone/>
+            </a:pPr>
+            <a:r>
+              <a:rPr lang="en-US" sz="3600" b="1" dirty="0">
+                <a:solidFill>
+                  <a:schemeClr val="accent2"/>
+                </a:solidFill>
+              </a:rPr>
+              <a:t>56% → 9%</a:t>
+            </a:r>
+            <a:endParaRPr lang="en-US" sz="3600" dirty="0"/>
+          </a:p>
+        </p:txBody>
+      </p:sp>
+      <p:sp>
+        <p:nvSpPr>
+          <p:cNvPr id="5" name="Text 3"/>
+          <p:cNvSpPr txBox="1"/>
+          <p:nvPr/>
+        </p:nvSpPr>
+        <p:spPr>
+          <a:xfrm>
+            <a:off x="822960" y="2468880"/>
+            <a:ext cx="2971800" cy="640080"/>
+          </a:xfrm>
+          <a:prstGeom prst="rect">
+            <a:avLst/>
+          </a:prstGeom>
+          <a:noFill/>
+          <a:ln/>
+        </p:spPr>
+        <p:txBody>
+          <a:bodyPr wrap="square" lIns="0" tIns="0" rIns="0" bIns="0" rtlCol="0" anchor="t"/>
+          <a:lstStyle/>
+          <a:p>
+            <a:pPr indent="0" marL="0">
+              <a:buNone/>
+            </a:pPr>
+            <a:r>
+              <a:rPr lang="en-US" sz="1350" dirty="0">
+                <a:solidFill>
+                  <a:schemeClr val="tx1"/>
+                </a:solidFill>
+              </a:rPr>
+              <a:t>정답 런북 누락률 (base → final)</a:t>
+            </a:r>
+            <a:endParaRPr lang="en-US" sz="1350" dirty="0"/>
+          </a:p>
+          <a:p>
+            <a:pPr indent="0" marL="0">
+              <a:buNone/>
+            </a:pPr>
+            <a:r>
+              <a:rPr lang="en-US" sz="1350" dirty="0">
+                <a:solidFill>
+                  <a:schemeClr val="tx1"/>
+                </a:solidFill>
+              </a:rPr>
+              <a:t>= 맞는 조치를 권고하지 못할 위험</a:t>
+            </a:r>
+            <a:endParaRPr lang="en-US" sz="1350" dirty="0"/>
+          </a:p>
+        </p:txBody>
+      </p:sp>
+      <p:sp>
+        <p:nvSpPr>
+          <p:cNvPr id="6" name="stat-cost"/>
+          <p:cNvSpPr/>
+          <p:nvPr/>
+        </p:nvSpPr>
+        <p:spPr>
+          <a:xfrm>
+            <a:off x="4334256" y="1371600"/>
+            <a:ext cx="3520440" cy="1828800"/>
+          </a:xfrm>
+          <a:prstGeom prst="roundRect">
+            <a:avLst>
+              <a:gd name="adj" fmla="val 6000"/>
+            </a:avLst>
+          </a:prstGeom>
+          <a:solidFill>
+            <a:schemeClr val="bg2"/>
+          </a:solidFill>
+          <a:ln w="12700">
+            <a:solidFill>
+              <a:schemeClr val="bg2"/>
+            </a:solidFill>
+            <a:prstDash val="solid"/>
+          </a:ln>
+        </p:spPr>
+      </p:sp>
+      <p:sp>
+        <p:nvSpPr>
+          <p:cNvPr id="7" name="Text 5"/>
+          <p:cNvSpPr txBox="1"/>
+          <p:nvPr/>
+        </p:nvSpPr>
+        <p:spPr>
+          <a:xfrm>
+            <a:off x="4608576" y="1572768"/>
+            <a:ext cx="2971800" cy="868680"/>
+          </a:xfrm>
+          <a:prstGeom prst="rect">
+            <a:avLst/>
+          </a:prstGeom>
+          <a:noFill/>
+          <a:ln/>
+        </p:spPr>
+        <p:txBody>
+          <a:bodyPr wrap="square" lIns="0" tIns="0" rIns="0" bIns="0" rtlCol="0" anchor="ctr"/>
+          <a:lstStyle/>
+          <a:p>
+            <a:pPr indent="0" marL="0">
+              <a:buNone/>
+            </a:pPr>
+            <a:r>
+              <a:rPr lang="en-US" sz="3600" b="1" dirty="0">
+                <a:solidFill>
+                  <a:schemeClr val="accent6"/>
+                </a:solidFill>
+              </a:rPr>
+              <a:t>-84%</a:t>
+            </a:r>
+            <a:endParaRPr lang="en-US" sz="3600" dirty="0"/>
+          </a:p>
+        </p:txBody>
+      </p:sp>
+      <p:sp>
+        <p:nvSpPr>
+          <p:cNvPr id="8" name="Text 6"/>
+          <p:cNvSpPr txBox="1"/>
+          <p:nvPr/>
+        </p:nvSpPr>
+        <p:spPr>
+          <a:xfrm>
+            <a:off x="4608576" y="2468880"/>
+            <a:ext cx="2971800" cy="640080"/>
+          </a:xfrm>
+          <a:prstGeom prst="rect">
+            <a:avLst/>
+          </a:prstGeom>
+          <a:noFill/>
+          <a:ln/>
+        </p:spPr>
+        <p:txBody>
+          <a:bodyPr wrap="square" lIns="0" tIns="0" rIns="0" bIns="0" rtlCol="0" anchor="t"/>
+          <a:lstStyle/>
+          <a:p>
+            <a:pPr indent="0" marL="0">
+              <a:buNone/>
+            </a:pPr>
+            <a:r>
+              <a:rPr lang="en-US" sz="1350" dirty="0">
+                <a:solidFill>
+                  <a:schemeClr val="tx1"/>
+                </a:solidFill>
+              </a:rPr>
+              <a:t>장애 1건당 처리 비용 $0.00343 → $0.00057</a:t>
+            </a:r>
+            <a:endParaRPr lang="en-US" sz="1350" dirty="0"/>
+          </a:p>
+          <a:p>
+            <a:pPr indent="0" marL="0">
+              <a:buNone/>
+            </a:pPr>
+            <a:r>
+              <a:rPr lang="en-US" sz="1350" dirty="0">
+                <a:solidFill>
+                  <a:schemeClr val="tx1"/>
+                </a:solidFill>
+              </a:rPr>
+              <a:t>(캐스케이드만 켜면 -73%)</a:t>
+            </a:r>
+            <a:endParaRPr lang="en-US" sz="1350" dirty="0"/>
+          </a:p>
+        </p:txBody>
+      </p:sp>
+      <p:sp>
+        <p:nvSpPr>
+          <p:cNvPr id="9" name="stat-judge"/>
+          <p:cNvSpPr/>
+          <p:nvPr/>
+        </p:nvSpPr>
+        <p:spPr>
+          <a:xfrm>
+            <a:off x="8119872" y="1371600"/>
+            <a:ext cx="3520440" cy="1828800"/>
+          </a:xfrm>
+          <a:prstGeom prst="roundRect">
+            <a:avLst>
+              <a:gd name="adj" fmla="val 6000"/>
+            </a:avLst>
+          </a:prstGeom>
+          <a:solidFill>
+            <a:schemeClr val="bg2"/>
+          </a:solidFill>
+          <a:ln w="12700">
+            <a:solidFill>
+              <a:schemeClr val="bg2"/>
+            </a:solidFill>
+            <a:prstDash val="solid"/>
+          </a:ln>
+        </p:spPr>
+      </p:sp>
+      <p:sp>
+        <p:nvSpPr>
+          <p:cNvPr id="10" name="Text 8"/>
+          <p:cNvSpPr txBox="1"/>
+          <p:nvPr/>
+        </p:nvSpPr>
+        <p:spPr>
+          <a:xfrm>
+            <a:off x="8394192" y="1572768"/>
+            <a:ext cx="2971800" cy="868680"/>
+          </a:xfrm>
+          <a:prstGeom prst="rect">
+            <a:avLst/>
+          </a:prstGeom>
+          <a:noFill/>
+          <a:ln/>
+        </p:spPr>
+        <p:txBody>
+          <a:bodyPr wrap="square" lIns="0" tIns="0" rIns="0" bIns="0" rtlCol="0" anchor="ctr"/>
+          <a:lstStyle/>
+          <a:p>
+            <a:pPr indent="0" marL="0">
+              <a:buNone/>
+            </a:pPr>
+            <a:r>
+              <a:rPr lang="en-US" sz="3600" b="1" dirty="0">
+                <a:solidFill>
+                  <a:schemeClr val="accent1"/>
+                </a:solidFill>
+              </a:rPr>
+              <a:t>개선 미확인</a:t>
+            </a:r>
+            <a:endParaRPr lang="en-US" sz="3600" dirty="0"/>
+          </a:p>
+        </p:txBody>
+      </p:sp>
+      <p:sp>
+        <p:nvSpPr>
+          <p:cNvPr id="11" name="Text 9"/>
+          <p:cNvSpPr txBox="1"/>
+          <p:nvPr/>
+        </p:nvSpPr>
+        <p:spPr>
+          <a:xfrm>
+            <a:off x="8394192" y="2468880"/>
+            <a:ext cx="2971800" cy="640080"/>
+          </a:xfrm>
+          <a:prstGeom prst="rect">
+            <a:avLst/>
+          </a:prstGeom>
+          <a:noFill/>
+          <a:ln/>
+        </p:spPr>
+        <p:txBody>
+          <a:bodyPr wrap="square" lIns="0" tIns="0" rIns="0" bIns="0" rtlCol="0" anchor="t"/>
+          <a:lstStyle/>
+          <a:p>
+            <a:pPr indent="0" marL="0">
+              <a:buNone/>
+            </a:pPr>
+            <a:r>
+              <a:rPr lang="en-US" sz="1350" dirty="0">
+                <a:solidFill>
+                  <a:schemeClr val="tx1"/>
+                </a:solidFill>
+              </a:rPr>
+              <a:t>LLM Judge 단독: 품질 향상 확인 안 됨</a:t>
+            </a:r>
+            <a:endParaRPr lang="en-US" sz="1350" dirty="0"/>
+          </a:p>
+          <a:p>
+            <a:pPr indent="0" marL="0">
+              <a:buNone/>
+            </a:pPr>
+            <a:r>
+              <a:rPr lang="en-US" sz="1350" dirty="0">
+                <a:solidFill>
+                  <a:schemeClr val="tx1"/>
+                </a:solidFill>
+              </a:rPr>
+              <a:t>지연은 +2.3초 (유의)</a:t>
+            </a:r>
+            <a:endParaRPr lang="en-US" sz="1350" dirty="0"/>
+          </a:p>
+        </p:txBody>
+      </p:sp>
+      <p:sp>
+        <p:nvSpPr>
+          <p:cNvPr id="12" name="method"/>
+          <p:cNvSpPr/>
+          <p:nvPr/>
+        </p:nvSpPr>
+        <p:spPr>
+          <a:xfrm>
+            <a:off x="548640" y="3520440"/>
+            <a:ext cx="11064240" cy="1783080"/>
+          </a:xfrm>
+          <a:prstGeom prst="roundRect">
+            <a:avLst>
+              <a:gd name="adj" fmla="val 6154"/>
+            </a:avLst>
+          </a:prstGeom>
+          <a:solidFill>
+            <a:schemeClr val="bg2"/>
+          </a:solidFill>
+          <a:ln w="12700">
+            <a:solidFill>
+              <a:schemeClr val="bg2"/>
+            </a:solidFill>
+            <a:prstDash val="solid"/>
+          </a:ln>
+        </p:spPr>
+      </p:sp>
+      <p:sp>
+        <p:nvSpPr>
+          <p:cNvPr id="13" name="Text 11"/>
+          <p:cNvSpPr txBox="1"/>
+          <p:nvPr/>
+        </p:nvSpPr>
+        <p:spPr>
+          <a:xfrm>
+            <a:off x="822960" y="3657600"/>
+            <a:ext cx="10515600" cy="1600200"/>
+          </a:xfrm>
+          <a:prstGeom prst="rect">
+            <a:avLst/>
+          </a:prstGeom>
+          <a:noFill/>
+          <a:ln/>
+        </p:spPr>
+        <p:txBody>
+          <a:bodyPr wrap="square" lIns="0" tIns="0" rIns="0" bIns="0" rtlCol="0" anchor="t"/>
+          <a:lstStyle/>
+          <a:p>
+            <a:pPr indent="0" marL="0">
+              <a:spcAft>
+                <a:spcPts val="500"/>
+              </a:spcAft>
+              <a:buNone/>
+            </a:pPr>
+            <a:r>
+              <a:rPr lang="en-US" sz="1600" b="1" dirty="0">
+                <a:solidFill>
+                  <a:srgbClr val="16202C"/>
+                </a:solidFill>
+              </a:rPr>
+              <a:t>어떻게 증명했나</a:t>
+            </a:r>
+            <a:endParaRPr lang="en-US" sz="1450" dirty="0"/>
+          </a:p>
+          <a:p>
+            <a:pPr marL="342900" indent="-342900">
+              <a:spcAft>
+                <a:spcPts val="500"/>
+              </a:spcAft>
+              <a:buSzPct val="100000"/>
+              <a:buChar char="•"/>
+            </a:pPr>
+            <a:r>
+              <a:rPr lang="en-US" sz="1450" dirty="0">
+                <a:solidFill>
+                  <a:schemeClr val="tx1"/>
+                </a:solidFill>
+              </a:rPr>
+              <a:t>평가셋 60건을 dev 24건(기준값 조정용)과 holdout 36건(조정 전에 고정, 최종 보고용)으로 나눴다. 이 덱의 수치는 모두 holdout.</a:t>
+            </a:r>
+            <a:endParaRPr lang="en-US" sz="1450" dirty="0"/>
+          </a:p>
+          <a:p>
+            <a:pPr marL="342900" indent="-342900">
+              <a:spcAft>
+                <a:spcPts val="500"/>
+              </a:spcAft>
+              <a:buSzPct val="100000"/>
+              <a:buChar char="•"/>
+            </a:pPr>
+            <a:r>
+              <a:rPr lang="en-US" sz="1450" dirty="0">
+                <a:solidFill>
+                  <a:schemeClr val="tx1"/>
+                </a:solidFill>
+              </a:rPr>
+              <a:t>개선을 하나씩 켠 7구성을 각 3회 반복하고, 구성 간 차이는 같은 질의끼리 짝지은 bootstrap 95% 신뢰구간으로 판정했다.</a:t>
+            </a:r>
+            <a:endParaRPr lang="en-US" sz="1450" dirty="0"/>
+          </a:p>
+          <a:p>
+            <a:pPr marL="342900" indent="-342900">
+              <a:spcAft>
+                <a:spcPts val="500"/>
+              </a:spcAft>
+              <a:buSzPct val="100000"/>
+              <a:buChar char="•"/>
+            </a:pPr>
+            <a:r>
+              <a:rPr lang="en-US" sz="1450" dirty="0">
+                <a:solidFill>
+                  <a:schemeClr val="tx1"/>
+                </a:solidFill>
+              </a:rPr>
+              <a:t>평가자(LLM Judge)가 관대할 수 있어, Judge와 무관한 결정적 지표(정답 런북 누락·혼입, 런북 어구 포함)로 결론을 냈다.</a:t>
+            </a:r>
+            <a:endParaRPr lang="en-US" sz="1450" dirty="0"/>
+          </a:p>
+        </p:txBody>
+      </p:sp>
+      <p:sp>
+        <p:nvSpPr>
+          <p:cNvPr id="14" name="Text 12"/>
+          <p:cNvSpPr txBox="1"/>
+          <p:nvPr/>
+        </p:nvSpPr>
+        <p:spPr>
+          <a:xfrm>
+            <a:off x="548640" y="6053328"/>
+            <a:ext cx="11064240" cy="274320"/>
+          </a:xfrm>
+          <a:prstGeom prst="rect">
+            <a:avLst/>
+          </a:prstGeom>
+          <a:noFill/>
+          <a:ln/>
+        </p:spPr>
+        <p:txBody>
+          <a:bodyPr wrap="square" lIns="0" tIns="0" rIns="0" bIns="0" rtlCol="0" anchor="ctr"/>
+          <a:lstStyle/>
+          <a:p>
+            <a:pPr indent="0" marL="0">
+              <a:buNone/>
+            </a:pPr>
+            <a:r>
+              <a:rPr lang="en-US" sz="1050" dirty="0">
+                <a:solidFill>
+                  <a:schemeClr val="accent3"/>
+                </a:solidFill>
+              </a:rPr>
+              <a:t>출처: results/*_latest.json (7구성 x 60건 x 3회 = 1,260회, 실행 오류 0), results/stats_holdout.json, eval/extra_metrics.py</a:t>
+            </a:r>
+            <a:endParaRPr lang="en-US" sz="1050" dirty="0"/>
+          </a:p>
+        </p:txBody>
+      </p:sp>
+      <p:sp>
+        <p:nvSpPr>
+          <p:cNvPr id="25" name="Slide Number Placeholder 0"/>
+          <p:cNvSpPr>
+            <a:spLocks noGrp="1"/>
+          </p:cNvSpPr>
+          <p:nvPr>
+            <p:ph type="sldNum" sz="quarter" idx="4294967295"/>
+          </p:nvPr>
+        </p:nvSpPr>
+        <p:spPr>
+          <a:xfrm>
+            <a:off x="11155680" y="6400800"/>
+            <a:ext cx="457200" cy="274320"/>
+          </a:xfrm>
+          <a:prstGeom prst="rect">
+            <a:avLst/>
+          </a:prstGeom>
+          <a:extLst>
+            <a:ext uri="{C572A759-6A51-4108-AA02-DFA0A04FC94B}">
+              <ma14:wrappingTextBoxFlag xmlns:ma14="http://schemas.microsoft.com/office/mac/drawingml/2011/main" val="0"/>
+            </a:ext>
+          </a:extLst>
+        </p:spPr>
+        <p:txBody>
+          <a:bodyPr/>
+          <a:lstStyle>
+            <a:lvl1pPr>
+              <a:defRPr sz="1000">
+                <a:solidFill>
+                  <a:schemeClr val="accent3"/>
+                </a:solidFill>
+              </a:defRPr>
+            </a:lvl1pPr>
+          </a:lstStyle>
+          <a:p>
+            <a:pPr algn="r"/>
+            <a:fld id="{F7021451-1387-4CA6-816F-3879F97B5CBC}" type="slidenum">
+              <a:rPr b="0" lang="en-US"/>
+              <a:t>3</a:t>
+            </a:fld>
+            <a:endParaRPr lang="en-US"/>
+          </a:p>
+        </p:txBody>
+      </p:sp>
+    </p:spTree>
+  </p:cSld>
+  <p:clrMapOvr>
+    <a:masterClrMapping/>
+  </p:clrMapOvr>
+</p:sld>
+</file>
+
+<file path=ppt/slides/slide5.xml><?xml version="1.0" encoding="utf-8"?>
+<p:sld xmlns:a="http://schemas.openxmlformats.org/drawingml/2006/main" xmlns:r="http://schemas.openxmlformats.org/officeDocument/2006/relationships" xmlns:p="http://schemas.openxmlformats.org/presentationml/2006/main">
+  <p:cSld name="Slide 5">
+    <p:spTree>
+      <p:nvGrpSpPr>
+        <p:cNvPr id="1" name=""/>
+        <p:cNvGrpSpPr/>
+        <p:nvPr/>
+      </p:nvGrpSpPr>
+      <p:grpSpPr>
+        <a:xfrm>
+          <a:off x="0" y="0"/>
+          <a:ext cx="0" cy="0"/>
+          <a:chOff x="0" y="0"/>
+          <a:chExt cx="0" cy="0"/>
+        </a:xfrm>
+      </p:grpSpPr>
+      <p:sp>
+        <p:nvSpPr>
+          <p:cNvPr id="2" name="Text 0"/>
+          <p:cNvSpPr/>
+          <p:nvPr>
+            <p:ph idx="100" type="title" hasCustomPrompt="1"/>
+          </p:nvPr>
+        </p:nvSpPr>
+        <p:spPr>
+          <a:xfrm>
+            <a:off x="548640" y="320040"/>
+            <a:ext cx="11064240" cy="777240"/>
+          </a:xfrm>
+          <a:prstGeom prst="rect">
+            <a:avLst/>
+          </a:prstGeom>
+          <a:noFill/>
+          <a:ln/>
+        </p:spPr>
+        <p:txBody>
+          <a:bodyPr wrap="square" lIns="0" tIns="0" rIns="0" bIns="0" rtlCol="0" anchor="ctr"/>
+          <a:lstStyle/>
+          <a:p>
+            <a:pPr algn="l" indent="0" marL="0">
+              <a:buNone/>
+            </a:pPr>
+            <a:r>
+              <a:rPr lang="en-US" sz="2800" b="1" dirty="0">
+                <a:solidFill>
+                  <a:schemeClr val="tx2"/>
+                </a:solidFill>
+              </a:rPr>
+              <a:t>문제 1: base는 질문을 읽지 않고, 알림 키워드로 런북을 고른다</a:t>
+            </a:r>
+            <a:endParaRPr lang="en-US" sz="2800" dirty="0"/>
+          </a:p>
+        </p:txBody>
+      </p:sp>
+      <p:sp>
+        <p:nvSpPr>
+          <p:cNvPr id="3" name="flow-0"/>
+          <p:cNvSpPr/>
+          <p:nvPr/>
+        </p:nvSpPr>
+        <p:spPr>
+          <a:xfrm>
+            <a:off x="548640" y="1371600"/>
+            <a:ext cx="2468880" cy="1737360"/>
+          </a:xfrm>
+          <a:prstGeom prst="roundRect">
+            <a:avLst>
+              <a:gd name="adj" fmla="val 6316"/>
+            </a:avLst>
+          </a:prstGeom>
+          <a:solidFill>
+            <a:schemeClr val="bg2"/>
+          </a:solidFill>
+          <a:ln w="12700">
+            <a:solidFill>
+              <a:schemeClr val="bg2"/>
+            </a:solidFill>
+            <a:prstDash val="solid"/>
+          </a:ln>
+        </p:spPr>
+      </p:sp>
+      <p:sp>
+        <p:nvSpPr>
+          <p:cNvPr id="4" name="Text 2"/>
+          <p:cNvSpPr txBox="1"/>
+          <p:nvPr/>
+        </p:nvSpPr>
+        <p:spPr>
+          <a:xfrm>
+            <a:off x="731520" y="1508760"/>
+            <a:ext cx="2103120" cy="365760"/>
+          </a:xfrm>
+          <a:prstGeom prst="rect">
+            <a:avLst/>
+          </a:prstGeom>
+          <a:noFill/>
+          <a:ln/>
+        </p:spPr>
+        <p:txBody>
+          <a:bodyPr wrap="square" lIns="0" tIns="0" rIns="0" bIns="0" rtlCol="0" anchor="ctr"/>
+          <a:lstStyle/>
+          <a:p>
+            <a:pPr indent="0" marL="0">
+              <a:buNone/>
+            </a:pPr>
+            <a:r>
+              <a:rPr lang="en-US" sz="1400" b="1" dirty="0">
+                <a:solidFill>
+                  <a:schemeClr val="tx2"/>
+                </a:solidFill>
+              </a:rPr>
+              <a:t>사용자 질의</a:t>
+            </a:r>
+            <a:endParaRPr lang="en-US" sz="1400" dirty="0"/>
+          </a:p>
+        </p:txBody>
+      </p:sp>
+      <p:sp>
+        <p:nvSpPr>
+          <p:cNvPr id="5" name="Text 3"/>
+          <p:cNvSpPr txBox="1"/>
+          <p:nvPr/>
+        </p:nvSpPr>
+        <p:spPr>
+          <a:xfrm>
+            <a:off x="731520" y="1920240"/>
+            <a:ext cx="2103120" cy="1097280"/>
+          </a:xfrm>
+          <a:prstGeom prst="rect">
+            <a:avLst/>
+          </a:prstGeom>
+          <a:noFill/>
+          <a:ln/>
+        </p:spPr>
+        <p:txBody>
+          <a:bodyPr wrap="square" lIns="0" tIns="0" rIns="0" bIns="0" rtlCol="0" anchor="t"/>
+          <a:lstStyle/>
+          <a:p>
+            <a:pPr indent="0" marL="0">
+              <a:buNone/>
+            </a:pPr>
+            <a:r>
+              <a:rPr lang="en-US" sz="1500" dirty="0">
+                <a:solidFill>
+                  <a:schemeClr val="tx1"/>
+                </a:solidFill>
+              </a:rPr>
+              <a:t>"DB 프라이머리가</a:t>
+            </a:r>
+            <a:endParaRPr lang="en-US" sz="1500" dirty="0"/>
+          </a:p>
+          <a:p>
+            <a:pPr indent="0" marL="0">
+              <a:buNone/>
+            </a:pPr>
+            <a:r>
+              <a:rPr lang="en-US" sz="1500" dirty="0">
+                <a:solidFill>
+                  <a:schemeClr val="tx1"/>
+                </a:solidFill>
+              </a:rPr>
+              <a:t>다운됐습니다"</a:t>
+            </a:r>
+            <a:endParaRPr lang="en-US" sz="1500" dirty="0"/>
+          </a:p>
+        </p:txBody>
+      </p:sp>
+      <p:sp>
+        <p:nvSpPr>
+          <p:cNvPr id="6" name="arrow-0"/>
+          <p:cNvSpPr/>
+          <p:nvPr/>
+        </p:nvSpPr>
+        <p:spPr>
+          <a:xfrm>
+            <a:off x="3063240" y="2057400"/>
+            <a:ext cx="274320" cy="365760"/>
+          </a:xfrm>
+          <a:prstGeom prst="rightArrow">
+            <a:avLst/>
+          </a:prstGeom>
+          <a:solidFill>
+            <a:schemeClr val="accent3"/>
+          </a:solidFill>
+          <a:ln w="12700">
+            <a:solidFill>
+              <a:schemeClr val="accent3"/>
+            </a:solidFill>
+            <a:prstDash val="solid"/>
+          </a:ln>
+        </p:spPr>
+      </p:sp>
+      <p:sp>
+        <p:nvSpPr>
+          <p:cNvPr id="7" name="flow-1"/>
+          <p:cNvSpPr/>
+          <p:nvPr/>
+        </p:nvSpPr>
+        <p:spPr>
+          <a:xfrm>
+            <a:off x="3383280" y="1371600"/>
+            <a:ext cx="2468880" cy="1737360"/>
+          </a:xfrm>
+          <a:prstGeom prst="roundRect">
+            <a:avLst>
+              <a:gd name="adj" fmla="val 6316"/>
+            </a:avLst>
+          </a:prstGeom>
+          <a:solidFill>
+            <a:schemeClr val="bg2"/>
+          </a:solidFill>
+          <a:ln w="12700">
+            <a:solidFill>
+              <a:schemeClr val="bg2"/>
+            </a:solidFill>
+            <a:prstDash val="solid"/>
+          </a:ln>
+        </p:spPr>
+      </p:sp>
+      <p:sp>
+        <p:nvSpPr>
+          <p:cNvPr id="8" name="Text 6"/>
+          <p:cNvSpPr txBox="1"/>
+          <p:nvPr/>
+        </p:nvSpPr>
+        <p:spPr>
+          <a:xfrm>
+            <a:off x="3566160" y="1508760"/>
+            <a:ext cx="2103120" cy="365760"/>
+          </a:xfrm>
+          <a:prstGeom prst="rect">
+            <a:avLst/>
+          </a:prstGeom>
+          <a:noFill/>
+          <a:ln/>
+        </p:spPr>
+        <p:txBody>
+          <a:bodyPr wrap="square" lIns="0" tIns="0" rIns="0" bIns="0" rtlCol="0" anchor="ctr"/>
+          <a:lstStyle/>
+          <a:p>
+            <a:pPr indent="0" marL="0">
+              <a:buNone/>
+            </a:pPr>
+            <a:r>
+              <a:rPr lang="en-US" sz="1400" b="1" dirty="0">
+                <a:solidFill>
+                  <a:schemeClr val="tx2"/>
+                </a:solidFill>
+              </a:rPr>
+              <a:t>planner</a:t>
+            </a:r>
+            <a:endParaRPr lang="en-US" sz="1400" dirty="0"/>
+          </a:p>
+        </p:txBody>
+      </p:sp>
+      <p:sp>
+        <p:nvSpPr>
+          <p:cNvPr id="9" name="Text 7"/>
+          <p:cNvSpPr txBox="1"/>
+          <p:nvPr/>
+        </p:nvSpPr>
+        <p:spPr>
+          <a:xfrm>
+            <a:off x="3566160" y="1920240"/>
+            <a:ext cx="2103120" cy="1097280"/>
+          </a:xfrm>
+          <a:prstGeom prst="rect">
+            <a:avLst/>
+          </a:prstGeom>
+          <a:noFill/>
+          <a:ln/>
+        </p:spPr>
+        <p:txBody>
+          <a:bodyPr wrap="square" lIns="0" tIns="0" rIns="0" bIns="0" rtlCol="0" anchor="t"/>
+          <a:lstStyle/>
+          <a:p>
+            <a:pPr indent="0" marL="0">
+              <a:buNone/>
+            </a:pPr>
+            <a:r>
+              <a:rPr lang="en-US" sz="1500" dirty="0">
+                <a:solidFill>
+                  <a:schemeClr val="tx1"/>
+                </a:solidFill>
+              </a:rPr>
+              <a:t>시스템명 없음</a:t>
+            </a:r>
+            <a:endParaRPr lang="en-US" sz="1500" dirty="0"/>
+          </a:p>
+          <a:p>
+            <a:pPr indent="0" marL="0">
+              <a:buNone/>
+            </a:pPr>
+            <a:r>
+              <a:rPr lang="en-US" sz="1500" dirty="0">
+                <a:solidFill>
+                  <a:schemeClr val="tx1"/>
+                </a:solidFill>
+              </a:rPr>
+              <a:t>→ auth-service 폴백</a:t>
+            </a:r>
+            <a:endParaRPr lang="en-US" sz="1500" dirty="0"/>
+          </a:p>
+        </p:txBody>
+      </p:sp>
+      <p:sp>
+        <p:nvSpPr>
+          <p:cNvPr id="10" name="arrow-1"/>
+          <p:cNvSpPr/>
+          <p:nvPr/>
+        </p:nvSpPr>
+        <p:spPr>
+          <a:xfrm>
+            <a:off x="5897880" y="2057400"/>
+            <a:ext cx="274320" cy="365760"/>
+          </a:xfrm>
+          <a:prstGeom prst="rightArrow">
+            <a:avLst/>
+          </a:prstGeom>
+          <a:solidFill>
+            <a:schemeClr val="accent3"/>
+          </a:solidFill>
+          <a:ln w="12700">
+            <a:solidFill>
+              <a:schemeClr val="accent3"/>
+            </a:solidFill>
+            <a:prstDash val="solid"/>
+          </a:ln>
+        </p:spPr>
+      </p:sp>
+      <p:sp>
+        <p:nvSpPr>
+          <p:cNvPr id="11" name="flow-2"/>
+          <p:cNvSpPr/>
+          <p:nvPr/>
+        </p:nvSpPr>
+        <p:spPr>
+          <a:xfrm>
+            <a:off x="6217920" y="1371600"/>
+            <a:ext cx="2468880" cy="1737360"/>
+          </a:xfrm>
+          <a:prstGeom prst="roundRect">
+            <a:avLst>
+              <a:gd name="adj" fmla="val 6316"/>
+            </a:avLst>
+          </a:prstGeom>
+          <a:solidFill>
+            <a:schemeClr val="bg2"/>
+          </a:solidFill>
+          <a:ln w="12700">
+            <a:solidFill>
+              <a:schemeClr val="bg2"/>
+            </a:solidFill>
+            <a:prstDash val="solid"/>
+          </a:ln>
+        </p:spPr>
+      </p:sp>
+      <p:sp>
+        <p:nvSpPr>
+          <p:cNvPr id="12" name="Text 10"/>
+          <p:cNvSpPr txBox="1"/>
+          <p:nvPr/>
+        </p:nvSpPr>
+        <p:spPr>
+          <a:xfrm>
+            <a:off x="6400800" y="1508760"/>
+            <a:ext cx="2103120" cy="365760"/>
+          </a:xfrm>
+          <a:prstGeom prst="rect">
+            <a:avLst/>
+          </a:prstGeom>
+          <a:noFill/>
+          <a:ln/>
+        </p:spPr>
+        <p:txBody>
+          <a:bodyPr wrap="square" lIns="0" tIns="0" rIns="0" bIns="0" rtlCol="0" anchor="ctr"/>
+          <a:lstStyle/>
+          <a:p>
+            <a:pPr indent="0" marL="0">
+              <a:buNone/>
+            </a:pPr>
+            <a:r>
+              <a:rPr lang="en-US" sz="1400" b="1" dirty="0">
+                <a:solidFill>
+                  <a:schemeClr val="tx2"/>
+                </a:solidFill>
+              </a:rPr>
+              <a:t>모니터링 알림</a:t>
+            </a:r>
+            <a:endParaRPr lang="en-US" sz="1400" dirty="0"/>
+          </a:p>
+        </p:txBody>
+      </p:sp>
+      <p:sp>
+        <p:nvSpPr>
+          <p:cNvPr id="13" name="Text 11"/>
+          <p:cNvSpPr txBox="1"/>
+          <p:nvPr/>
+        </p:nvSpPr>
+        <p:spPr>
+          <a:xfrm>
+            <a:off x="6400800" y="1920240"/>
+            <a:ext cx="2103120" cy="1097280"/>
+          </a:xfrm>
+          <a:prstGeom prst="rect">
+            <a:avLst/>
+          </a:prstGeom>
+          <a:noFill/>
+          <a:ln/>
+        </p:spPr>
+        <p:txBody>
+          <a:bodyPr wrap="square" lIns="0" tIns="0" rIns="0" bIns="0" rtlCol="0" anchor="t"/>
+          <a:lstStyle/>
+          <a:p>
+            <a:pPr indent="0" marL="0">
+              <a:buNone/>
+            </a:pPr>
+            <a:r>
+              <a:rPr lang="en-US" sz="1500" dirty="0">
+                <a:solidFill>
+                  <a:schemeClr val="tx1"/>
+                </a:solidFill>
+              </a:rPr>
+              <a:t>"p95 latency 2.4s"</a:t>
+            </a:r>
+            <a:endParaRPr lang="en-US" sz="1500" dirty="0"/>
+          </a:p>
+          <a:p>
+            <a:pPr indent="0" marL="0">
+              <a:buNone/>
+            </a:pPr>
+            <a:r>
+              <a:rPr lang="en-US" sz="1500" dirty="0">
+                <a:solidFill>
+                  <a:schemeClr val="tx1"/>
+                </a:solidFill>
+              </a:rPr>
+              <a:t>키워드 'latency' 일치</a:t>
+            </a:r>
+            <a:endParaRPr lang="en-US" sz="1500" dirty="0"/>
+          </a:p>
+        </p:txBody>
+      </p:sp>
+      <p:sp>
+        <p:nvSpPr>
+          <p:cNvPr id="14" name="arrow-2"/>
+          <p:cNvSpPr/>
+          <p:nvPr/>
+        </p:nvSpPr>
+        <p:spPr>
+          <a:xfrm>
+            <a:off x="8732520" y="2057400"/>
+            <a:ext cx="274320" cy="365760"/>
+          </a:xfrm>
+          <a:prstGeom prst="rightArrow">
+            <a:avLst/>
+          </a:prstGeom>
+          <a:solidFill>
+            <a:schemeClr val="accent3"/>
+          </a:solidFill>
+          <a:ln w="12700">
+            <a:solidFill>
+              <a:schemeClr val="accent3"/>
+            </a:solidFill>
+            <a:prstDash val="solid"/>
+          </a:ln>
+        </p:spPr>
+      </p:sp>
+      <p:sp>
+        <p:nvSpPr>
+          <p:cNvPr id="15" name="flow-3"/>
+          <p:cNvSpPr/>
+          <p:nvPr/>
+        </p:nvSpPr>
+        <p:spPr>
+          <a:xfrm>
+            <a:off x="9052560" y="1371600"/>
+            <a:ext cx="2468880" cy="1737360"/>
+          </a:xfrm>
+          <a:prstGeom prst="roundRect">
+            <a:avLst>
+              <a:gd name="adj" fmla="val 6316"/>
+            </a:avLst>
+          </a:prstGeom>
+          <a:solidFill>
+            <a:schemeClr val="accent1"/>
+          </a:solidFill>
+          <a:ln w="12700">
+            <a:solidFill>
+              <a:schemeClr val="accent1"/>
+            </a:solidFill>
+            <a:prstDash val="solid"/>
+          </a:ln>
+        </p:spPr>
+      </p:sp>
+      <p:sp>
+        <p:nvSpPr>
+          <p:cNvPr id="16" name="Text 14"/>
+          <p:cNvSpPr txBox="1"/>
+          <p:nvPr/>
+        </p:nvSpPr>
+        <p:spPr>
+          <a:xfrm>
+            <a:off x="9235440" y="1508760"/>
+            <a:ext cx="2103120" cy="365760"/>
+          </a:xfrm>
+          <a:prstGeom prst="rect">
+            <a:avLst/>
+          </a:prstGeom>
+          <a:noFill/>
+          <a:ln/>
+        </p:spPr>
+        <p:txBody>
+          <a:bodyPr wrap="square" lIns="0" tIns="0" rIns="0" bIns="0" rtlCol="0" anchor="ctr"/>
+          <a:lstStyle/>
+          <a:p>
+            <a:pPr indent="0" marL="0">
+              <a:buNone/>
+            </a:pPr>
+            <a:r>
+              <a:rPr lang="en-US" sz="1400" b="1" dirty="0">
+                <a:solidFill>
+                  <a:schemeClr val="bg1"/>
+                </a:solidFill>
+              </a:rPr>
+              <a:t>선택된 런북</a:t>
+            </a:r>
+            <a:endParaRPr lang="en-US" sz="1400" dirty="0"/>
+          </a:p>
+        </p:txBody>
+      </p:sp>
+      <p:sp>
+        <p:nvSpPr>
+          <p:cNvPr id="17" name="Text 15"/>
+          <p:cNvSpPr txBox="1"/>
+          <p:nvPr/>
+        </p:nvSpPr>
+        <p:spPr>
+          <a:xfrm>
+            <a:off x="9235440" y="1920240"/>
+            <a:ext cx="2103120" cy="1097280"/>
+          </a:xfrm>
+          <a:prstGeom prst="rect">
+            <a:avLst/>
+          </a:prstGeom>
+          <a:noFill/>
+          <a:ln/>
+        </p:spPr>
+        <p:txBody>
+          <a:bodyPr wrap="square" lIns="0" tIns="0" rIns="0" bIns="0" rtlCol="0" anchor="t"/>
+          <a:lstStyle/>
+          <a:p>
+            <a:pPr indent="0" marL="0">
+              <a:buNone/>
+            </a:pPr>
+            <a:r>
+              <a:rPr lang="en-US" sz="1500" dirty="0">
+                <a:solidFill>
+                  <a:schemeClr val="bg1"/>
+                </a:solidFill>
+              </a:rPr>
+              <a:t>high-latency</a:t>
+            </a:r>
+            <a:endParaRPr lang="en-US" sz="1500" dirty="0"/>
+          </a:p>
+          <a:p>
+            <a:pPr indent="0" marL="0">
+              <a:buNone/>
+            </a:pPr>
+            <a:r>
+              <a:rPr lang="en-US" sz="1500" dirty="0">
+                <a:solidFill>
+                  <a:schemeClr val="bg1"/>
+                </a:solidFill>
+              </a:rPr>
+              <a:t>(응답 지연 절차)</a:t>
+            </a:r>
+            <a:endParaRPr lang="en-US" sz="1500" dirty="0"/>
+          </a:p>
+        </p:txBody>
+      </p:sp>
+      <p:sp>
+        <p:nvSpPr>
+          <p:cNvPr id="18" name="stat-basemiss"/>
+          <p:cNvSpPr/>
+          <p:nvPr/>
+        </p:nvSpPr>
+        <p:spPr>
+          <a:xfrm>
+            <a:off x="548640" y="3429000"/>
+            <a:ext cx="3520440" cy="1828800"/>
+          </a:xfrm>
+          <a:prstGeom prst="roundRect">
+            <a:avLst>
+              <a:gd name="adj" fmla="val 6000"/>
+            </a:avLst>
+          </a:prstGeom>
+          <a:solidFill>
+            <a:schemeClr val="bg2"/>
+          </a:solidFill>
+          <a:ln w="12700">
+            <a:solidFill>
+              <a:schemeClr val="bg2"/>
+            </a:solidFill>
+            <a:prstDash val="solid"/>
+          </a:ln>
+        </p:spPr>
+      </p:sp>
+      <p:sp>
+        <p:nvSpPr>
+          <p:cNvPr id="19" name="Text 17"/>
+          <p:cNvSpPr txBox="1"/>
+          <p:nvPr/>
+        </p:nvSpPr>
+        <p:spPr>
+          <a:xfrm>
+            <a:off x="822960" y="3630168"/>
+            <a:ext cx="2971800" cy="868680"/>
+          </a:xfrm>
+          <a:prstGeom prst="rect">
+            <a:avLst/>
+          </a:prstGeom>
+          <a:noFill/>
+          <a:ln/>
+        </p:spPr>
+        <p:txBody>
+          <a:bodyPr wrap="square" lIns="0" tIns="0" rIns="0" bIns="0" rtlCol="0" anchor="ctr"/>
+          <a:lstStyle/>
+          <a:p>
+            <a:pPr indent="0" marL="0">
+              <a:buNone/>
+            </a:pPr>
+            <a:r>
+              <a:rPr lang="en-US" sz="3600" b="1" dirty="0">
+                <a:solidFill>
+                  <a:schemeClr val="accent1"/>
+                </a:solidFill>
+              </a:rPr>
+              <a:t>56%</a:t>
+            </a:r>
+            <a:endParaRPr lang="en-US" sz="3600" dirty="0"/>
+          </a:p>
+        </p:txBody>
+      </p:sp>
+      <p:sp>
+        <p:nvSpPr>
+          <p:cNvPr id="20" name="Text 18"/>
+          <p:cNvSpPr txBox="1"/>
+          <p:nvPr/>
+        </p:nvSpPr>
+        <p:spPr>
+          <a:xfrm>
+            <a:off x="822960" y="4526280"/>
+            <a:ext cx="2971800" cy="640080"/>
+          </a:xfrm>
+          <a:prstGeom prst="rect">
+            <a:avLst/>
+          </a:prstGeom>
+          <a:noFill/>
+          <a:ln/>
+        </p:spPr>
+        <p:txBody>
+          <a:bodyPr wrap="square" lIns="0" tIns="0" rIns="0" bIns="0" rtlCol="0" anchor="t"/>
+          <a:lstStyle/>
+          <a:p>
+            <a:pPr indent="0" marL="0">
+              <a:buNone/>
+            </a:pPr>
+            <a:r>
+              <a:rPr lang="en-US" sz="1350" dirty="0">
+                <a:solidFill>
+                  <a:schemeClr val="tx1"/>
+                </a:solidFill>
+              </a:rPr>
+              <a:t>holdout에서 base가 정답 런북을</a:t>
+            </a:r>
+            <a:endParaRPr lang="en-US" sz="1350" dirty="0"/>
+          </a:p>
+          <a:p>
+            <a:pPr indent="0" marL="0">
+              <a:buNone/>
+            </a:pPr>
+            <a:r>
+              <a:rPr lang="en-US" sz="1350" dirty="0">
+                <a:solidFill>
+                  <a:schemeClr val="tx1"/>
+                </a:solidFill>
+              </a:rPr>
+              <a:t>근거에 못 넣은 비율</a:t>
+            </a:r>
+            <a:endParaRPr lang="en-US" sz="1350" dirty="0"/>
+          </a:p>
+        </p:txBody>
+      </p:sp>
+      <p:sp>
+        <p:nvSpPr>
+          <p:cNvPr id="21" name="stat-bias"/>
+          <p:cNvSpPr/>
+          <p:nvPr/>
+        </p:nvSpPr>
+        <p:spPr>
+          <a:xfrm>
+            <a:off x="4334256" y="3429000"/>
+            <a:ext cx="3520440" cy="1828800"/>
+          </a:xfrm>
+          <a:prstGeom prst="roundRect">
+            <a:avLst>
+              <a:gd name="adj" fmla="val 6000"/>
+            </a:avLst>
+          </a:prstGeom>
+          <a:solidFill>
+            <a:schemeClr val="bg2"/>
+          </a:solidFill>
+          <a:ln w="12700">
+            <a:solidFill>
+              <a:schemeClr val="bg2"/>
+            </a:solidFill>
+            <a:prstDash val="solid"/>
+          </a:ln>
+        </p:spPr>
+      </p:sp>
+      <p:sp>
+        <p:nvSpPr>
+          <p:cNvPr id="22" name="Text 20"/>
+          <p:cNvSpPr txBox="1"/>
+          <p:nvPr/>
+        </p:nvSpPr>
+        <p:spPr>
+          <a:xfrm>
+            <a:off x="4608576" y="3630168"/>
+            <a:ext cx="2971800" cy="868680"/>
+          </a:xfrm>
+          <a:prstGeom prst="rect">
+            <a:avLst/>
+          </a:prstGeom>
+          <a:noFill/>
+          <a:ln/>
+        </p:spPr>
+        <p:txBody>
+          <a:bodyPr wrap="square" lIns="0" tIns="0" rIns="0" bIns="0" rtlCol="0" anchor="ctr"/>
+          <a:lstStyle/>
+          <a:p>
+            <a:pPr indent="0" marL="0">
+              <a:buNone/>
+            </a:pPr>
+            <a:r>
+              <a:rPr lang="en-US" sz="3600" b="1" dirty="0">
+                <a:solidFill>
+                  <a:schemeClr val="accent1"/>
+                </a:solidFill>
+              </a:rPr>
+              <a:t>78% vs 11%</a:t>
+            </a:r>
+            <a:endParaRPr lang="en-US" sz="3600" dirty="0"/>
+          </a:p>
+        </p:txBody>
+      </p:sp>
+      <p:sp>
+        <p:nvSpPr>
+          <p:cNvPr id="23" name="Text 21"/>
+          <p:cNvSpPr txBox="1"/>
+          <p:nvPr/>
+        </p:nvSpPr>
+        <p:spPr>
+          <a:xfrm>
+            <a:off x="4608576" y="4526280"/>
+            <a:ext cx="2971800" cy="640080"/>
+          </a:xfrm>
+          <a:prstGeom prst="rect">
+            <a:avLst/>
+          </a:prstGeom>
+          <a:noFill/>
+          <a:ln/>
+        </p:spPr>
+        <p:txBody>
+          <a:bodyPr wrap="square" lIns="0" tIns="0" rIns="0" bIns="0" rtlCol="0" anchor="t"/>
+          <a:lstStyle/>
+          <a:p>
+            <a:pPr indent="0" marL="0">
+              <a:buNone/>
+            </a:pPr>
+            <a:r>
+              <a:rPr lang="en-US" sz="1350" dirty="0">
+                <a:solidFill>
+                  <a:schemeClr val="tx1"/>
+                </a:solidFill>
+              </a:rPr>
+              <a:t>알림 문구대로 물을 때 vs 자기 말로</a:t>
+            </a:r>
+            <a:endParaRPr lang="en-US" sz="1350" dirty="0"/>
+          </a:p>
+          <a:p>
+            <a:pPr indent="0" marL="0">
+              <a:buNone/>
+            </a:pPr>
+            <a:r>
+              <a:rPr lang="en-US" sz="1350" dirty="0">
+                <a:solidFill>
+                  <a:schemeClr val="tx1"/>
+                </a:solidFill>
+              </a:rPr>
+              <a:t>물을 때 base Recall@1 (편향 검증)</a:t>
+            </a:r>
+            <a:endParaRPr lang="en-US" sz="1350" dirty="0"/>
+          </a:p>
+        </p:txBody>
+      </p:sp>
+      <p:sp>
+        <p:nvSpPr>
+          <p:cNvPr id="24" name="Text 22"/>
+          <p:cNvSpPr txBox="1"/>
+          <p:nvPr/>
+        </p:nvSpPr>
+        <p:spPr>
+          <a:xfrm>
+            <a:off x="8229600" y="3429000"/>
+            <a:ext cx="3410712" cy="2377440"/>
+          </a:xfrm>
+          <a:prstGeom prst="rect">
+            <a:avLst/>
+          </a:prstGeom>
+          <a:noFill/>
+          <a:ln/>
+        </p:spPr>
+        <p:txBody>
+          <a:bodyPr wrap="square" lIns="0" tIns="0" rIns="0" bIns="0" rtlCol="0" anchor="t"/>
+          <a:lstStyle/>
+          <a:p>
+            <a:pPr indent="0" marL="0">
+              <a:spcAft>
+                <a:spcPts val="500"/>
+              </a:spcAft>
+              <a:buNone/>
+            </a:pPr>
+            <a:r>
+              <a:rPr lang="en-US" sz="1350" b="1" dirty="0">
+                <a:solidFill>
+                  <a:schemeClr val="tx1"/>
+                </a:solidFill>
+              </a:rPr>
+              <a:t>원인 (src/agent/graph.py:192-213)</a:t>
+            </a:r>
+            <a:endParaRPr lang="en-US" sz="1350" dirty="0"/>
+          </a:p>
+          <a:p>
+            <a:pPr marL="342900" indent="-342900">
+              <a:spcAft>
+                <a:spcPts val="500"/>
+              </a:spcAft>
+              <a:buSzPct val="100000"/>
+              <a:buChar char="•"/>
+            </a:pPr>
+            <a:r>
+              <a:rPr lang="en-US" sz="1350" dirty="0">
+                <a:solidFill>
+                  <a:schemeClr val="tx1"/>
+                </a:solidFill>
+              </a:rPr>
+              <a:t>조사한 시스템의 알림 문구에서 키워드를 순서대로 찾아 첫 일치로 런북 1개를 고른다.</a:t>
+            </a:r>
+            <a:endParaRPr lang="en-US" sz="1350" dirty="0"/>
+          </a:p>
+          <a:p>
+            <a:pPr marL="342900" indent="-342900">
+              <a:spcAft>
+                <a:spcPts val="500"/>
+              </a:spcAft>
+              <a:buSzPct val="100000"/>
+              <a:buChar char="•"/>
+            </a:pPr>
+            <a:r>
+              <a:rPr lang="en-US" sz="1350" dirty="0">
+                <a:solidFill>
+                  <a:schemeClr val="tx1"/>
+                </a:solidFill>
+              </a:rPr>
+              <a:t>질의 문장은 쓰지 않는다. 당직자가 알림과 다른 말로 물으면 거의 맞히지 못한다.</a:t>
+            </a:r>
+            <a:endParaRPr lang="en-US" sz="1350" dirty="0"/>
+          </a:p>
+        </p:txBody>
+      </p:sp>
+      <p:sp>
+        <p:nvSpPr>
+          <p:cNvPr id="25" name="Text 23"/>
+          <p:cNvSpPr txBox="1"/>
+          <p:nvPr/>
+        </p:nvSpPr>
+        <p:spPr>
+          <a:xfrm>
+            <a:off x="548640" y="6053328"/>
+            <a:ext cx="11064240" cy="274320"/>
+          </a:xfrm>
+          <a:prstGeom prst="rect">
+            <a:avLst/>
+          </a:prstGeom>
+          <a:noFill/>
+          <a:ln/>
+        </p:spPr>
+        <p:txBody>
+          <a:bodyPr wrap="square" lIns="0" tIns="0" rIns="0" bIns="0" rtlCol="0" anchor="ctr"/>
+          <a:lstStyle/>
+          <a:p>
+            <a:pPr indent="0" marL="0">
+              <a:buNone/>
+            </a:pPr>
+            <a:r>
+              <a:rPr lang="en-US" sz="1050" dirty="0">
+                <a:solidFill>
+                  <a:schemeClr val="accent3"/>
+                </a:solidFill>
+              </a:rPr>
+              <a:t>holdout 정상 질의 aligned 9건 / paraphrased 9건, 3회 평균</a:t>
+            </a:r>
+            <a:endParaRPr lang="en-US" sz="1050" dirty="0"/>
+          </a:p>
+        </p:txBody>
+      </p:sp>
+      <p:sp>
+        <p:nvSpPr>
+          <p:cNvPr id="25" name="Slide Number Placeholder 0"/>
+          <p:cNvSpPr>
+            <a:spLocks noGrp="1"/>
+          </p:cNvSpPr>
+          <p:nvPr>
+            <p:ph type="sldNum" sz="quarter" idx="4294967295"/>
+          </p:nvPr>
+        </p:nvSpPr>
+        <p:spPr>
+          <a:xfrm>
+            <a:off x="11155680" y="6400800"/>
+            <a:ext cx="457200" cy="274320"/>
+          </a:xfrm>
+          <a:prstGeom prst="rect">
+            <a:avLst/>
+          </a:prstGeom>
+          <a:extLst>
+            <a:ext uri="{C572A759-6A51-4108-AA02-DFA0A04FC94B}">
+              <ma14:wrappingTextBoxFlag xmlns:ma14="http://schemas.microsoft.com/office/mac/drawingml/2011/main" val="0"/>
+            </a:ext>
+          </a:extLst>
+        </p:spPr>
+        <p:txBody>
+          <a:bodyPr/>
+          <a:lstStyle>
+            <a:lvl1pPr>
+              <a:defRPr sz="1000">
+                <a:solidFill>
+                  <a:schemeClr val="accent3"/>
+                </a:solidFill>
+              </a:defRPr>
+            </a:lvl1pPr>
+          </a:lstStyle>
+          <a:p>
+            <a:pPr algn="r"/>
+            <a:fld id="{F7021451-1387-4CA6-816F-3879F97B5CBC}" type="slidenum">
+              <a:rPr b="0" lang="en-US"/>
+              <a:t>5</a:t>
             </a:fld>
             <a:endParaRPr lang="en-US"/>
           </a:p>

--- a/deck/incident-agent-ablation_5min.pptx
+++ b/deck/incident-agent-ablation_5min.pptx
@@ -7,14 +7,15 @@
   <p:sldIdLst>
     <p:sldId id="256" r:id="rId2"/>
     <p:sldId id="257" r:id="rId3"/>
-    <p:sldId id="260" r:id="rId6"/>
     <p:sldId id="258" r:id="rId4"/>
-    <p:sldId id="265" r:id="rId11"/>
-    <p:sldId id="270" r:id="rId16"/>
+    <p:sldId id="261" r:id="rId7"/>
+    <p:sldId id="259" r:id="rId5"/>
+    <p:sldId id="266" r:id="rId12"/>
     <p:sldId id="271" r:id="rId17"/>
+    <p:sldId id="272" r:id="rId18"/>
   </p:sldIdLst>
   <p:notesMasterIdLst>
-    <p:notesMasterId r:id="rId19"/>
+    <p:notesMasterId r:id="rId20"/>
   </p:notesMasterIdLst>
   <p:sldSz cx="12192000" cy="6858000"/>
   <p:notesSz cx="6858000" cy="12192000"/>
@@ -113,47 +114,48 @@
   <p:extLst>
     <p:ext uri="{521415D9-36F7-43E2-AB2F-B90AF26B5E84}">
       <p14:sectionLst xmlns:p14="http://schemas.microsoft.com/office/powerpoint/2010/main">
-        <p14:section name="표지" id="{0ca7d6db-fdb8-bcd4-f044-2dfe218f7e7d}">
+        <p14:section name="표지" id="{dc8b99c6-d615-b7b0-0993-87ad23a3e87a}">
           <p14:sldIdLst>
             <p14:sldId id="256"/>
           </p14:sldIdLst>
         </p14:section>
-        <p14:section name="요약" id="{9adafa3c-f3cd-3044-e1dd-aaa6ff5db02d}">
+        <p14:section name="요약" id="{67fc83d8-f2c5-0466-3607-637fa2f68f2e}">
           <p14:sldIdLst>
             <p14:sldId id="257"/>
             <p14:sldId id="258"/>
+            <p14:sldId id="259"/>
           </p14:sldIdLst>
         </p14:section>
-        <p14:section name="문제" id="{99e2068b-bc77-d4c6-d18e-9851e7d81062}">
+        <p14:section name="문제" id="{0efcb65d-4533-99b4-be9a-925e55bd4925}">
           <p14:sldIdLst>
-            <p14:sldId id="260"/>
+            <p14:sldId id="261"/>
           </p14:sldIdLst>
         </p14:section>
-        <p14:section name="개선" id="{7ae72d53-17b1-2a87-0ab4-de496c65272f}">
+        <p14:section name="개선" id="{93f01414-197f-87e9-a0d0-d7eb96d707a9}">
           <p14:sldIdLst/>
         </p14:section>
-        <p14:section name="평가 설계" id="{89c76f3a-cb6f-e817-2ce5-2571ec1d857e}">
+        <p14:section name="평가 설계" id="{1761399b-bf95-5633-2a7e-a5f150e50ff5}">
           <p14:sldIdLst/>
         </p14:section>
-        <p14:section name="Before/After" id="{29ccccdf-61f8-fc02-b50a-73c802a2bf28}">
+        <p14:section name="Before/After" id="{edd76eb1-0797-af7b-55bd-154e8ca88ade}">
           <p14:sldIdLst>
-            <p14:sldId id="265"/>
+            <p14:sldId id="266"/>
           </p14:sldIdLst>
         </p14:section>
-        <p14:section name="평가자 검증" id="{5c4d0fdb-fa7e-04b9-3581-29f9835d05fa}">
+        <p14:section name="평가자 검증" id="{0dbd85c4-9735-533b-d517-6884f6cea659}">
           <p14:sldIdLst/>
         </p14:section>
-        <p14:section name="시연" id="{91e61492-86e6-5381-c26d-32b2a5f584f9}">
-          <p14:sldIdLst>
-            <p14:sldId id="270"/>
-          </p14:sldIdLst>
-        </p14:section>
-        <p14:section name="한계" id="{b0da42d1-4cd1-97b9-b696-c86b27506e1b}">
+        <p14:section name="시연" id="{bd8061bc-ebd2-19e3-7d16-e6590ef11772}">
           <p14:sldIdLst>
             <p14:sldId id="271"/>
           </p14:sldIdLst>
         </p14:section>
-        <p14:section name="마무리" id="{bfa83e08-d88f-4e51-fc14-2609c97fb189}">
+        <p14:section name="한계" id="{851cde9e-a030-c9be-2ce2-e3e7aad1d28a}">
+          <p14:sldIdLst>
+            <p14:sldId id="272"/>
+          </p14:sldIdLst>
+        </p14:section>
+        <p14:section name="마무리" id="{2d233bde-8772-1ffc-6666-f30dca9ed79c}">
           <p14:sldIdLst/>
         </p14:section>
       </p14:sectionLst>
@@ -602,7 +604,7 @@
 </p:notes>
 </file>
 
-<file path=ppt/notesSlides/notesSlide10.xml><?xml version="1.0" encoding="utf-8"?>
+<file path=ppt/notesSlides/notesSlide11.xml><?xml version="1.0" encoding="utf-8"?>
 <p:notes xmlns:a="http://schemas.openxmlformats.org/drawingml/2006/main" xmlns:r="http://schemas.openxmlformats.org/officeDocument/2006/relationships" xmlns:p="http://schemas.openxmlformats.org/presentationml/2006/main">
   <p:cSld>
     <p:spTree>
@@ -671,95 +673,7 @@
           <a:p>
             <a:fld id="{F7021451-1387-4CA6-816F-3879F97B5CBC}" type="slidenum">
               <a:rPr lang="en-US"/>
-              <a:t>10</a:t>
-            </a:fld>
-            <a:endParaRPr lang="en-US"/>
-          </a:p>
-        </p:txBody>
-      </p:sp>
-    </p:spTree>
-    <p:extLst>
-      <p:ext uri="{BB962C8B-B14F-4D97-AF65-F5344CB8AC3E}">
-        <p14:creationId xmlns:p14="http://schemas.microsoft.com/office/powerpoint/2010/main" val="1024086991"/>
-      </p:ext>
-    </p:extLst>
-  </p:cSld>
-  <p:clrMapOvr>
-    <a:masterClrMapping/>
-  </p:clrMapOvr>
-</p:notes>
-</file>
-
-<file path=ppt/notesSlides/notesSlide15.xml><?xml version="1.0" encoding="utf-8"?>
-<p:notes xmlns:a="http://schemas.openxmlformats.org/drawingml/2006/main" xmlns:r="http://schemas.openxmlformats.org/officeDocument/2006/relationships" xmlns:p="http://schemas.openxmlformats.org/presentationml/2006/main">
-  <p:cSld>
-    <p:spTree>
-      <p:nvGrpSpPr>
-        <p:cNvPr id="1" name=""/>
-        <p:cNvGrpSpPr/>
-        <p:nvPr/>
-      </p:nvGrpSpPr>
-      <p:grpSpPr>
-        <a:xfrm>
-          <a:off x="0" y="0"/>
-          <a:ext cx="0" cy="0"/>
-          <a:chOff x="0" y="0"/>
-          <a:chExt cx="0" cy="0"/>
-        </a:xfrm>
-      </p:grpSpPr>
-      <p:sp>
-        <p:nvSpPr>
-          <p:cNvPr id="2" name="Slide Image Placeholder 1"/>
-          <p:cNvSpPr>
-            <a:spLocks noGrp="1" noRot="1" noChangeAspect="1"/>
-          </p:cNvSpPr>
-          <p:nvPr>
-            <p:ph type="sldImg"/>
-          </p:nvPr>
-        </p:nvSpPr>
-        <p:spPr/>
-      </p:sp>
-      <p:sp>
-        <p:nvSpPr>
-          <p:cNvPr id="3" name="Notes Placeholder 2"/>
-          <p:cNvSpPr>
-            <a:spLocks noGrp="1"/>
-          </p:cNvSpPr>
-          <p:nvPr>
-            <p:ph type="body" idx="1"/>
-          </p:nvPr>
-        </p:nvSpPr>
-        <p:spPr/>
-        <p:txBody>
-          <a:bodyPr/>
-          <a:lstStyle/>
-          <a:p>
-            <a:r>
-              <a:rPr lang="en-US" dirty="0"/>
-              <a:t/>
-            </a:r>
-            <a:endParaRPr lang="en-US" dirty="0"/>
-          </a:p>
-        </p:txBody>
-      </p:sp>
-      <p:sp>
-        <p:nvSpPr>
-          <p:cNvPr id="4" name="Slide Number Placeholder 3"/>
-          <p:cNvSpPr>
-            <a:spLocks noGrp="1"/>
-          </p:cNvSpPr>
-          <p:nvPr>
-            <p:ph type="sldNum" sz="quarter" idx="10"/>
-          </p:nvPr>
-        </p:nvSpPr>
-        <p:spPr/>
-        <p:txBody>
-          <a:bodyPr/>
-          <a:lstStyle/>
-          <a:p>
-            <a:fld id="{F7021451-1387-4CA6-816F-3879F97B5CBC}" type="slidenum">
-              <a:rPr lang="en-US"/>
-              <a:t>15</a:t>
+              <a:t>11</a:t>
             </a:fld>
             <a:endParaRPr lang="en-US"/>
           </a:p>
@@ -866,6 +780,94 @@
 </p:notes>
 </file>
 
+<file path=ppt/notesSlides/notesSlide17.xml><?xml version="1.0" encoding="utf-8"?>
+<p:notes xmlns:a="http://schemas.openxmlformats.org/drawingml/2006/main" xmlns:r="http://schemas.openxmlformats.org/officeDocument/2006/relationships" xmlns:p="http://schemas.openxmlformats.org/presentationml/2006/main">
+  <p:cSld>
+    <p:spTree>
+      <p:nvGrpSpPr>
+        <p:cNvPr id="1" name=""/>
+        <p:cNvGrpSpPr/>
+        <p:nvPr/>
+      </p:nvGrpSpPr>
+      <p:grpSpPr>
+        <a:xfrm>
+          <a:off x="0" y="0"/>
+          <a:ext cx="0" cy="0"/>
+          <a:chOff x="0" y="0"/>
+          <a:chExt cx="0" cy="0"/>
+        </a:xfrm>
+      </p:grpSpPr>
+      <p:sp>
+        <p:nvSpPr>
+          <p:cNvPr id="2" name="Slide Image Placeholder 1"/>
+          <p:cNvSpPr>
+            <a:spLocks noGrp="1" noRot="1" noChangeAspect="1"/>
+          </p:cNvSpPr>
+          <p:nvPr>
+            <p:ph type="sldImg"/>
+          </p:nvPr>
+        </p:nvSpPr>
+        <p:spPr/>
+      </p:sp>
+      <p:sp>
+        <p:nvSpPr>
+          <p:cNvPr id="3" name="Notes Placeholder 2"/>
+          <p:cNvSpPr>
+            <a:spLocks noGrp="1"/>
+          </p:cNvSpPr>
+          <p:nvPr>
+            <p:ph type="body" idx="1"/>
+          </p:nvPr>
+        </p:nvSpPr>
+        <p:spPr/>
+        <p:txBody>
+          <a:bodyPr/>
+          <a:lstStyle/>
+          <a:p>
+            <a:r>
+              <a:rPr lang="en-US" dirty="0"/>
+              <a:t/>
+            </a:r>
+            <a:endParaRPr lang="en-US" dirty="0"/>
+          </a:p>
+        </p:txBody>
+      </p:sp>
+      <p:sp>
+        <p:nvSpPr>
+          <p:cNvPr id="4" name="Slide Number Placeholder 3"/>
+          <p:cNvSpPr>
+            <a:spLocks noGrp="1"/>
+          </p:cNvSpPr>
+          <p:nvPr>
+            <p:ph type="sldNum" sz="quarter" idx="10"/>
+          </p:nvPr>
+        </p:nvSpPr>
+        <p:spPr/>
+        <p:txBody>
+          <a:bodyPr/>
+          <a:lstStyle/>
+          <a:p>
+            <a:fld id="{F7021451-1387-4CA6-816F-3879F97B5CBC}" type="slidenum">
+              <a:rPr lang="en-US"/>
+              <a:t>17</a:t>
+            </a:fld>
+            <a:endParaRPr lang="en-US"/>
+          </a:p>
+        </p:txBody>
+      </p:sp>
+    </p:spTree>
+    <p:extLst>
+      <p:ext uri="{BB962C8B-B14F-4D97-AF65-F5344CB8AC3E}">
+        <p14:creationId xmlns:p14="http://schemas.microsoft.com/office/powerpoint/2010/main" val="1024086991"/>
+      </p:ext>
+    </p:extLst>
+  </p:cSld>
+  <p:clrMapOvr>
+    <a:masterClrMapping/>
+  </p:clrMapOvr>
+</p:notes>
+</file>
+
 <file path=ppt/notesSlides/notesSlide2.xml><?xml version="1.0" encoding="utf-8"?>
 <p:notes xmlns:a="http://schemas.openxmlformats.org/drawingml/2006/main" xmlns:r="http://schemas.openxmlformats.org/officeDocument/2006/relationships" xmlns:p="http://schemas.openxmlformats.org/presentationml/2006/main">
   <p:cSld>
@@ -1000,7 +1002,7 @@
           <a:p>
             <a:r>
               <a:rPr lang="en-US" dirty="0"/>
-              <a:t>세 숫자가 결론입니다. 그리고 이 숫자를 어떻게 믿을 수 있는지가 이 발표의 나머지입니다.</a:t>
+              <a:t>시장은 이미 AI SRE로 가고 있고 구조도 우리와 같습니다. 그런데 공개된 수치는 대부분 업체 주장이고, 효과를 부품별로 잰 공개 사례는 찾지 못했습니다. 이 과제는 그 빈칸을 채웠습니다.</a:t>
             </a:r>
             <a:endParaRPr lang="en-US" dirty="0"/>
           </a:p>
@@ -1042,7 +1044,7 @@
 </p:notes>
 </file>
 
-<file path=ppt/notesSlides/notesSlide5.xml><?xml version="1.0" encoding="utf-8"?>
+<file path=ppt/notesSlides/notesSlide4.xml><?xml version="1.0" encoding="utf-8"?>
 <p:notes xmlns:a="http://schemas.openxmlformats.org/drawingml/2006/main" xmlns:r="http://schemas.openxmlformats.org/officeDocument/2006/relationships" xmlns:p="http://schemas.openxmlformats.org/presentationml/2006/main">
   <p:cSld>
     <p:spTree>
@@ -1088,7 +1090,7 @@
           <a:p>
             <a:r>
               <a:rPr lang="en-US" dirty="0"/>
-              <a:t>평가셋을 알림 문구와 같은 말로 묻는 질문과 자기 말로 묻는 질문으로 나눠 봤습니다. base는 자기 말로 물으면 거의 못 맞힙니다.</a:t>
+              <a:t>세 숫자가 결론입니다. 그리고 이 숫자를 어떻게 믿을 수 있는지가 이 발표의 나머지입니다.</a:t>
             </a:r>
             <a:endParaRPr lang="en-US" dirty="0"/>
           </a:p>
@@ -1111,7 +1113,95 @@
           <a:p>
             <a:fld id="{F7021451-1387-4CA6-816F-3879F97B5CBC}" type="slidenum">
               <a:rPr lang="en-US"/>
-              <a:t>5</a:t>
+              <a:t>4</a:t>
+            </a:fld>
+            <a:endParaRPr lang="en-US"/>
+          </a:p>
+        </p:txBody>
+      </p:sp>
+    </p:spTree>
+    <p:extLst>
+      <p:ext uri="{BB962C8B-B14F-4D97-AF65-F5344CB8AC3E}">
+        <p14:creationId xmlns:p14="http://schemas.microsoft.com/office/powerpoint/2010/main" val="1024086991"/>
+      </p:ext>
+    </p:extLst>
+  </p:cSld>
+  <p:clrMapOvr>
+    <a:masterClrMapping/>
+  </p:clrMapOvr>
+</p:notes>
+</file>
+
+<file path=ppt/notesSlides/notesSlide6.xml><?xml version="1.0" encoding="utf-8"?>
+<p:notes xmlns:a="http://schemas.openxmlformats.org/drawingml/2006/main" xmlns:r="http://schemas.openxmlformats.org/officeDocument/2006/relationships" xmlns:p="http://schemas.openxmlformats.org/presentationml/2006/main">
+  <p:cSld>
+    <p:spTree>
+      <p:nvGrpSpPr>
+        <p:cNvPr id="1" name=""/>
+        <p:cNvGrpSpPr/>
+        <p:nvPr/>
+      </p:nvGrpSpPr>
+      <p:grpSpPr>
+        <a:xfrm>
+          <a:off x="0" y="0"/>
+          <a:ext cx="0" cy="0"/>
+          <a:chOff x="0" y="0"/>
+          <a:chExt cx="0" cy="0"/>
+        </a:xfrm>
+      </p:grpSpPr>
+      <p:sp>
+        <p:nvSpPr>
+          <p:cNvPr id="2" name="Slide Image Placeholder 1"/>
+          <p:cNvSpPr>
+            <a:spLocks noGrp="1" noRot="1" noChangeAspect="1"/>
+          </p:cNvSpPr>
+          <p:nvPr>
+            <p:ph type="sldImg"/>
+          </p:nvPr>
+        </p:nvSpPr>
+        <p:spPr/>
+      </p:sp>
+      <p:sp>
+        <p:nvSpPr>
+          <p:cNvPr id="3" name="Notes Placeholder 2"/>
+          <p:cNvSpPr>
+            <a:spLocks noGrp="1"/>
+          </p:cNvSpPr>
+          <p:nvPr>
+            <p:ph type="body" idx="1"/>
+          </p:nvPr>
+        </p:nvSpPr>
+        <p:spPr/>
+        <p:txBody>
+          <a:bodyPr/>
+          <a:lstStyle/>
+          <a:p>
+            <a:r>
+              <a:rPr lang="en-US" dirty="0"/>
+              <a:t>평가셋을 알림 문구와 같은 말로 묻는 질문과 자기 말로 묻는 질문으로 나눠 봤습니다. base는 자기 말로 물으면 거의 못 맞힙니다.</a:t>
+            </a:r>
+            <a:endParaRPr lang="en-US" dirty="0"/>
+          </a:p>
+        </p:txBody>
+      </p:sp>
+      <p:sp>
+        <p:nvSpPr>
+          <p:cNvPr id="4" name="Slide Number Placeholder 3"/>
+          <p:cNvSpPr>
+            <a:spLocks noGrp="1"/>
+          </p:cNvSpPr>
+          <p:nvPr>
+            <p:ph type="sldNum" sz="quarter" idx="10"/>
+          </p:nvPr>
+        </p:nvSpPr>
+        <p:spPr/>
+        <p:txBody>
+          <a:bodyPr/>
+          <a:lstStyle/>
+          <a:p>
+            <a:fld id="{F7021451-1387-4CA6-816F-3879F97B5CBC}" type="slidenum">
+              <a:rPr lang="en-US"/>
+              <a:t>6</a:t>
             </a:fld>
             <a:endParaRPr lang="en-US"/>
           </a:p>
@@ -1861,9 +1951,9 @@
 </p:sld>
 </file>
 
-<file path=ppt/slides/slide10.xml><?xml version="1.0" encoding="utf-8"?>
+<file path=ppt/slides/slide11.xml><?xml version="1.0" encoding="utf-8"?>
 <p:sld xmlns:a="http://schemas.openxmlformats.org/drawingml/2006/main" xmlns:r="http://schemas.openxmlformats.org/officeDocument/2006/relationships" xmlns:p="http://schemas.openxmlformats.org/presentationml/2006/main">
-  <p:cSld name="Slide 10">
+  <p:cSld name="Slide 11">
     <p:spTree>
       <p:nvGrpSpPr>
         <p:cNvPr id="1" name=""/>
@@ -1918,7 +2008,7 @@
       </p:sp>
       <p:graphicFrame>
         <p:nvGraphicFramePr>
-          <p:cNvPr id="11" name="contrib-table"/>
+          <p:cNvPr id="12" name="contrib-table"/>
           <p:cNvGraphicFramePr>
             <a:graphicFrameLocks noGrp="1"/>
           </p:cNvGraphicFramePr>
@@ -5407,583 +5497,7 @@
             <a:pPr algn="r"/>
             <a:fld id="{F7021451-1387-4CA6-816F-3879F97B5CBC}" type="slidenum">
               <a:rPr b="0" lang="en-US"/>
-              <a:t>10</a:t>
-            </a:fld>
-            <a:endParaRPr lang="en-US"/>
-          </a:p>
-        </p:txBody>
-      </p:sp>
-    </p:spTree>
-  </p:cSld>
-  <p:clrMapOvr>
-    <a:masterClrMapping/>
-  </p:clrMapOvr>
-</p:sld>
-</file>
-
-<file path=ppt/slides/slide15.xml><?xml version="1.0" encoding="utf-8"?>
-<p:sld xmlns:a="http://schemas.openxmlformats.org/drawingml/2006/main" xmlns:r="http://schemas.openxmlformats.org/officeDocument/2006/relationships" xmlns:p="http://schemas.openxmlformats.org/presentationml/2006/main">
-  <p:cSld name="Slide 15">
-    <p:spTree>
-      <p:nvGrpSpPr>
-        <p:cNvPr id="1" name=""/>
-        <p:cNvGrpSpPr/>
-        <p:nvPr/>
-      </p:nvGrpSpPr>
-      <p:grpSpPr>
-        <a:xfrm>
-          <a:off x="0" y="0"/>
-          <a:ext cx="0" cy="0"/>
-          <a:chOff x="0" y="0"/>
-          <a:chExt cx="0" cy="0"/>
-        </a:xfrm>
-      </p:grpSpPr>
-      <p:sp>
-        <p:nvSpPr>
-          <p:cNvPr id="2" name="Text 0"/>
-          <p:cNvSpPr/>
-          <p:nvPr>
-            <p:ph idx="100" type="title" hasCustomPrompt="1"/>
-          </p:nvPr>
-        </p:nvSpPr>
-        <p:spPr>
-          <a:xfrm>
-            <a:off x="548640" y="320040"/>
-            <a:ext cx="11064240" cy="777240"/>
-          </a:xfrm>
-          <a:prstGeom prst="rect">
-            <a:avLst/>
-          </a:prstGeom>
-          <a:noFill/>
-          <a:ln/>
-        </p:spPr>
-        <p:txBody>
-          <a:bodyPr wrap="square" lIns="0" tIns="0" rIns="0" bIns="0" rtlCol="0" anchor="ctr"/>
-          <a:lstStyle/>
-          <a:p>
-            <a:pPr algn="l" indent="0" marL="0">
-              <a:buNone/>
-            </a:pPr>
-            <a:r>
-              <a:rPr lang="en-US" sz="2800" b="1" dirty="0">
-                <a:solidFill>
-                  <a:schemeClr val="tx2"/>
-                </a:solidFill>
-              </a:rPr>
-              <a:t>시연: 같은 질문, base와 final을 나란히</a:t>
-            </a:r>
-            <a:endParaRPr lang="en-US" sz="2800" dirty="0"/>
-          </a:p>
-        </p:txBody>
-      </p:sp>
-      <p:sp>
-        <p:nvSpPr>
-          <p:cNvPr id="3" name="demo-cmd"/>
-          <p:cNvSpPr/>
-          <p:nvPr/>
-        </p:nvSpPr>
-        <p:spPr>
-          <a:xfrm>
-            <a:off x="548640" y="1371600"/>
-            <a:ext cx="11064240" cy="914400"/>
-          </a:xfrm>
-          <a:prstGeom prst="roundRect">
-            <a:avLst>
-              <a:gd name="adj" fmla="val 12000"/>
-            </a:avLst>
-          </a:prstGeom>
-          <a:solidFill>
-            <a:schemeClr val="tx2"/>
-          </a:solidFill>
-          <a:ln w="12700">
-            <a:solidFill>
-              <a:schemeClr val="tx2"/>
-            </a:solidFill>
-            <a:prstDash val="solid"/>
-          </a:ln>
-        </p:spPr>
-      </p:sp>
-      <p:sp>
-        <p:nvSpPr>
-          <p:cNvPr id="4" name="Text 2"/>
-          <p:cNvSpPr txBox="1"/>
-          <p:nvPr/>
-        </p:nvSpPr>
-        <p:spPr>
-          <a:xfrm>
-            <a:off x="822960" y="1463040"/>
-            <a:ext cx="10515600" cy="731520"/>
-          </a:xfrm>
-          <a:prstGeom prst="rect">
-            <a:avLst/>
-          </a:prstGeom>
-          <a:noFill/>
-          <a:ln/>
-        </p:spPr>
-        <p:txBody>
-          <a:bodyPr wrap="square" lIns="0" tIns="0" rIns="0" bIns="0" rtlCol="0" anchor="ctr"/>
-          <a:lstStyle/>
-          <a:p>
-            <a:pPr indent="0" marL="0">
-              <a:buNone/>
-            </a:pPr>
-            <a:r>
-              <a:rPr lang="en-US" sz="1600" dirty="0">
-                <a:solidFill>
-                  <a:schemeClr val="bg1"/>
-                </a:solidFill>
-                <a:latin typeface="Courier New" pitchFamily="34" charset="0"/>
-                <a:ea typeface="Courier New" pitchFamily="34" charset="-122"/>
-                <a:cs typeface="Courier New" pitchFamily="34" charset="-120"/>
-              </a:rPr>
-              <a:t>.venv/bin/python scripts/demo_side_by_side.py --id Q01</a:t>
-            </a:r>
-            <a:endParaRPr lang="en-US" sz="1600" dirty="0"/>
-          </a:p>
-        </p:txBody>
-      </p:sp>
-      <p:sp>
-        <p:nvSpPr>
-          <p:cNvPr id="5" name="demo-base"/>
-          <p:cNvSpPr/>
-          <p:nvPr/>
-        </p:nvSpPr>
-        <p:spPr>
-          <a:xfrm>
-            <a:off x="548640" y="2560320"/>
-            <a:ext cx="5458968" cy="2926080"/>
-          </a:xfrm>
-          <a:prstGeom prst="roundRect">
-            <a:avLst>
-              <a:gd name="adj" fmla="val 3750"/>
-            </a:avLst>
-          </a:prstGeom>
-          <a:solidFill>
-            <a:schemeClr val="bg2"/>
-          </a:solidFill>
-          <a:ln w="12700">
-            <a:solidFill>
-              <a:schemeClr val="bg2"/>
-            </a:solidFill>
-            <a:prstDash val="solid"/>
-          </a:ln>
-        </p:spPr>
-      </p:sp>
-      <p:sp>
-        <p:nvSpPr>
-          <p:cNvPr id="6" name="Text 4"/>
-          <p:cNvSpPr txBox="1"/>
-          <p:nvPr/>
-        </p:nvSpPr>
-        <p:spPr>
-          <a:xfrm>
-            <a:off x="822960" y="2743200"/>
-            <a:ext cx="1828800" cy="411480"/>
-          </a:xfrm>
-          <a:prstGeom prst="rect">
-            <a:avLst/>
-          </a:prstGeom>
-          <a:noFill/>
-          <a:ln/>
-        </p:spPr>
-        <p:txBody>
-          <a:bodyPr wrap="square" lIns="0" tIns="0" rIns="0" bIns="0" rtlCol="0" anchor="ctr"/>
-          <a:lstStyle/>
-          <a:p>
-            <a:pPr indent="0" marL="0">
-              <a:buNone/>
-            </a:pPr>
-            <a:r>
-              <a:rPr lang="en-US" sz="1800" b="1" dirty="0">
-                <a:solidFill>
-                  <a:schemeClr val="tx2"/>
-                </a:solidFill>
-              </a:rPr>
-              <a:t>[base]</a:t>
-            </a:r>
-            <a:endParaRPr lang="en-US" sz="1800" dirty="0"/>
-          </a:p>
-        </p:txBody>
-      </p:sp>
-      <p:sp>
-        <p:nvSpPr>
-          <p:cNvPr id="7" name="Text 5"/>
-          <p:cNvSpPr txBox="1"/>
-          <p:nvPr/>
-        </p:nvSpPr>
-        <p:spPr>
-          <a:xfrm>
-            <a:off x="4572000" y="2743200"/>
-            <a:ext cx="1188720" cy="411480"/>
-          </a:xfrm>
-          <a:prstGeom prst="rect">
-            <a:avLst/>
-          </a:prstGeom>
-          <a:noFill/>
-          <a:ln/>
-        </p:spPr>
-        <p:txBody>
-          <a:bodyPr wrap="square" lIns="0" tIns="0" rIns="0" bIns="0" rtlCol="0" anchor="ctr"/>
-          <a:lstStyle/>
-          <a:p>
-            <a:pPr algn="r" indent="0" marL="0">
-              <a:buNone/>
-            </a:pPr>
-            <a:r>
-              <a:rPr lang="en-US" sz="1600" b="1" dirty="0">
-                <a:solidFill>
-                  <a:schemeClr val="accent1"/>
-                </a:solidFill>
-              </a:rPr>
-              <a:t>오답</a:t>
-            </a:r>
-            <a:endParaRPr lang="en-US" sz="1600" dirty="0"/>
-          </a:p>
-        </p:txBody>
-      </p:sp>
-      <p:sp>
-        <p:nvSpPr>
-          <p:cNvPr id="8" name="Text 6"/>
-          <p:cNvSpPr txBox="1"/>
-          <p:nvPr/>
-        </p:nvSpPr>
-        <p:spPr>
-          <a:xfrm>
-            <a:off x="822960" y="3291840"/>
-            <a:ext cx="4937760" cy="2011680"/>
-          </a:xfrm>
-          <a:prstGeom prst="rect">
-            <a:avLst/>
-          </a:prstGeom>
-          <a:noFill/>
-          <a:ln/>
-        </p:spPr>
-        <p:txBody>
-          <a:bodyPr wrap="square" lIns="0" tIns="0" rIns="0" bIns="0" rtlCol="0" anchor="t"/>
-          <a:lstStyle/>
-          <a:p>
-            <a:pPr indent="0" marL="0">
-              <a:spcAft>
-                <a:spcPts val="800"/>
-              </a:spcAft>
-              <a:buNone/>
-            </a:pPr>
-            <a:r>
-              <a:rPr lang="en-US" sz="1450" dirty="0">
-                <a:solidFill>
-                  <a:srgbClr val="8A94A3"/>
-                </a:solidFill>
-              </a:rPr>
-              <a:t>고른 런북  </a:t>
-            </a:r>
-            <a:pPr indent="0" marL="0">
-              <a:spcAft>
-                <a:spcPts val="800"/>
-              </a:spcAft>
-              <a:buNone/>
-            </a:pPr>
-            <a:r>
-              <a:rPr lang="en-US" sz="1450" b="1" dirty="0">
-                <a:solidFill>
-                  <a:schemeClr val="tx1"/>
-                </a:solidFill>
-              </a:rPr>
-              <a:t>high-latency (응답 지연 절차)</a:t>
-            </a:r>
-            <a:endParaRPr lang="en-US" sz="1450" dirty="0"/>
-          </a:p>
-          <a:p>
-            <a:pPr indent="0" marL="0">
-              <a:spcAft>
-                <a:spcPts val="800"/>
-              </a:spcAft>
-              <a:buNone/>
-            </a:pPr>
-            <a:r>
-              <a:rPr lang="en-US" sz="1450" dirty="0">
-                <a:solidFill>
-                  <a:srgbClr val="8A94A3"/>
-                </a:solidFill>
-              </a:rPr>
-              <a:t>답의 핵심  </a:t>
-            </a:r>
-            <a:pPr indent="0" marL="0">
-              <a:spcAft>
-                <a:spcPts val="800"/>
-              </a:spcAft>
-              <a:buNone/>
-            </a:pPr>
-            <a:r>
-              <a:rPr lang="en-US" sz="1450" dirty="0">
-                <a:solidFill>
-                  <a:schemeClr val="tx1"/>
-                </a:solidFill>
-              </a:rPr>
-              <a:t>커넥션 풀 늘리기, 트래픽 분산…</a:t>
-            </a:r>
-            <a:endParaRPr lang="en-US" sz="1450" dirty="0"/>
-          </a:p>
-        </p:txBody>
-      </p:sp>
-      <p:sp>
-        <p:nvSpPr>
-          <p:cNvPr id="9" name="demo-final"/>
-          <p:cNvSpPr/>
-          <p:nvPr/>
-        </p:nvSpPr>
-        <p:spPr>
-          <a:xfrm>
-            <a:off x="6153912" y="2560320"/>
-            <a:ext cx="5458968" cy="2926080"/>
-          </a:xfrm>
-          <a:prstGeom prst="roundRect">
-            <a:avLst>
-              <a:gd name="adj" fmla="val 3750"/>
-            </a:avLst>
-          </a:prstGeom>
-          <a:solidFill>
-            <a:schemeClr val="bg2"/>
-          </a:solidFill>
-          <a:ln w="12700">
-            <a:solidFill>
-              <a:schemeClr val="bg2"/>
-            </a:solidFill>
-            <a:prstDash val="solid"/>
-          </a:ln>
-        </p:spPr>
-      </p:sp>
-      <p:sp>
-        <p:nvSpPr>
-          <p:cNvPr id="10" name="Text 8"/>
-          <p:cNvSpPr txBox="1"/>
-          <p:nvPr/>
-        </p:nvSpPr>
-        <p:spPr>
-          <a:xfrm>
-            <a:off x="6428232" y="2743200"/>
-            <a:ext cx="1828800" cy="411480"/>
-          </a:xfrm>
-          <a:prstGeom prst="rect">
-            <a:avLst/>
-          </a:prstGeom>
-          <a:noFill/>
-          <a:ln/>
-        </p:spPr>
-        <p:txBody>
-          <a:bodyPr wrap="square" lIns="0" tIns="0" rIns="0" bIns="0" rtlCol="0" anchor="ctr"/>
-          <a:lstStyle/>
-          <a:p>
-            <a:pPr indent="0" marL="0">
-              <a:buNone/>
-            </a:pPr>
-            <a:r>
-              <a:rPr lang="en-US" sz="1800" b="1" dirty="0">
-                <a:solidFill>
-                  <a:schemeClr val="tx2"/>
-                </a:solidFill>
-              </a:rPr>
-              <a:t>[final]</a:t>
-            </a:r>
-            <a:endParaRPr lang="en-US" sz="1800" dirty="0"/>
-          </a:p>
-        </p:txBody>
-      </p:sp>
-      <p:sp>
-        <p:nvSpPr>
-          <p:cNvPr id="11" name="Text 9"/>
-          <p:cNvSpPr txBox="1"/>
-          <p:nvPr/>
-        </p:nvSpPr>
-        <p:spPr>
-          <a:xfrm>
-            <a:off x="10177272" y="2743200"/>
-            <a:ext cx="1188720" cy="411480"/>
-          </a:xfrm>
-          <a:prstGeom prst="rect">
-            <a:avLst/>
-          </a:prstGeom>
-          <a:noFill/>
-          <a:ln/>
-        </p:spPr>
-        <p:txBody>
-          <a:bodyPr wrap="square" lIns="0" tIns="0" rIns="0" bIns="0" rtlCol="0" anchor="ctr"/>
-          <a:lstStyle/>
-          <a:p>
-            <a:pPr algn="r" indent="0" marL="0">
-              <a:buNone/>
-            </a:pPr>
-            <a:r>
-              <a:rPr lang="en-US" sz="1600" b="1" dirty="0">
-                <a:solidFill>
-                  <a:schemeClr val="accent2"/>
-                </a:solidFill>
-              </a:rPr>
-              <a:t>정답 포함</a:t>
-            </a:r>
-            <a:endParaRPr lang="en-US" sz="1600" dirty="0"/>
-          </a:p>
-        </p:txBody>
-      </p:sp>
-      <p:sp>
-        <p:nvSpPr>
-          <p:cNvPr id="12" name="Text 10"/>
-          <p:cNvSpPr txBox="1"/>
-          <p:nvPr/>
-        </p:nvSpPr>
-        <p:spPr>
-          <a:xfrm>
-            <a:off x="6428232" y="3291840"/>
-            <a:ext cx="4937760" cy="2011680"/>
-          </a:xfrm>
-          <a:prstGeom prst="rect">
-            <a:avLst/>
-          </a:prstGeom>
-          <a:noFill/>
-          <a:ln/>
-        </p:spPr>
-        <p:txBody>
-          <a:bodyPr wrap="square" lIns="0" tIns="0" rIns="0" bIns="0" rtlCol="0" anchor="t"/>
-          <a:lstStyle/>
-          <a:p>
-            <a:pPr indent="0" marL="0">
-              <a:spcAft>
-                <a:spcPts val="800"/>
-              </a:spcAft>
-              <a:buNone/>
-            </a:pPr>
-            <a:r>
-              <a:rPr lang="en-US" sz="1450" dirty="0">
-                <a:solidFill>
-                  <a:srgbClr val="8A94A3"/>
-                </a:solidFill>
-              </a:rPr>
-              <a:t>고른 런북  </a:t>
-            </a:r>
-            <a:pPr indent="0" marL="0">
-              <a:spcAft>
-                <a:spcPts val="800"/>
-              </a:spcAft>
-              <a:buNone/>
-            </a:pPr>
-            <a:r>
-              <a:rPr lang="en-US" sz="1450" b="1" dirty="0">
-                <a:solidFill>
-                  <a:schemeClr val="tx1"/>
-                </a:solidFill>
-              </a:rPr>
-              <a:t>db-down (+disk-full 혼입)</a:t>
-            </a:r>
-            <a:endParaRPr lang="en-US" sz="1450" dirty="0"/>
-          </a:p>
-          <a:p>
-            <a:pPr indent="0" marL="0">
-              <a:spcAft>
-                <a:spcPts val="800"/>
-              </a:spcAft>
-              <a:buNone/>
-            </a:pPr>
-            <a:r>
-              <a:rPr lang="en-US" sz="1450" dirty="0">
-                <a:solidFill>
-                  <a:srgbClr val="8A94A3"/>
-                </a:solidFill>
-              </a:rPr>
-              <a:t>답의 핵심  </a:t>
-            </a:r>
-            <a:pPr indent="0" marL="0">
-              <a:spcAft>
-                <a:spcPts val="800"/>
-              </a:spcAft>
-              <a:buNone/>
-            </a:pPr>
-            <a:r>
-              <a:rPr lang="en-US" sz="1450" dirty="0">
-                <a:solidFill>
-                  <a:schemeClr val="tx1"/>
-                </a:solidFill>
-              </a:rPr>
-              <a:t>커넥션 풀 점검, 필요 시 failover 노드로 전환…</a:t>
-            </a:r>
-            <a:endParaRPr lang="en-US" sz="1450" dirty="0"/>
-          </a:p>
-        </p:txBody>
-      </p:sp>
-      <p:sp>
-        <p:nvSpPr>
-          <p:cNvPr id="13" name="Text 11"/>
-          <p:cNvSpPr txBox="1"/>
-          <p:nvPr/>
-        </p:nvSpPr>
-        <p:spPr>
-          <a:xfrm>
-            <a:off x="548640" y="5715000"/>
-            <a:ext cx="11064240" cy="274320"/>
-          </a:xfrm>
-          <a:prstGeom prst="rect">
-            <a:avLst/>
-          </a:prstGeom>
-          <a:noFill/>
-          <a:ln/>
-        </p:spPr>
-        <p:txBody>
-          <a:bodyPr wrap="square" lIns="0" tIns="0" rIns="0" bIns="0" rtlCol="0" anchor="ctr"/>
-          <a:lstStyle/>
-          <a:p>
-            <a:pPr indent="0" marL="0">
-              <a:buNone/>
-            </a:pPr>
-            <a:r>
-              <a:rPr lang="en-US" sz="1050" dirty="0">
-                <a:solidFill>
-                  <a:schemeClr val="accent3"/>
-                </a:solidFill>
-              </a:rPr>
-              <a:t>질문: "DB 프라이머리가 다운됐습니다. 대응 절차를 알려주세요." 화면 하나에 런북 정오·답변·지연·비용·근거 없는 수치. 기록 results/raw/demo_*.json</a:t>
-            </a:r>
-            <a:endParaRPr lang="en-US" sz="1050" dirty="0"/>
-          </a:p>
-        </p:txBody>
-      </p:sp>
-      <p:sp>
-        <p:nvSpPr>
-          <p:cNvPr id="25" name="Slide Number Placeholder 0"/>
-          <p:cNvSpPr>
-            <a:spLocks noGrp="1"/>
-          </p:cNvSpPr>
-          <p:nvPr>
-            <p:ph type="sldNum" sz="quarter" idx="4294967295"/>
-          </p:nvPr>
-        </p:nvSpPr>
-        <p:spPr>
-          <a:xfrm>
-            <a:off x="11155680" y="6400800"/>
-            <a:ext cx="457200" cy="274320"/>
-          </a:xfrm>
-          <a:prstGeom prst="rect">
-            <a:avLst/>
-          </a:prstGeom>
-          <a:extLst>
-            <a:ext uri="{C572A759-6A51-4108-AA02-DFA0A04FC94B}">
-              <ma14:wrappingTextBoxFlag xmlns:ma14="http://schemas.microsoft.com/office/mac/drawingml/2011/main" val="0"/>
-            </a:ext>
-          </a:extLst>
-        </p:spPr>
-        <p:txBody>
-          <a:bodyPr/>
-          <a:lstStyle>
-            <a:lvl1pPr>
-              <a:defRPr sz="1000">
-                <a:solidFill>
-                  <a:schemeClr val="accent3"/>
-                </a:solidFill>
-              </a:defRPr>
-            </a:lvl1pPr>
-          </a:lstStyle>
-          <a:p>
-            <a:pPr algn="r"/>
-            <a:fld id="{F7021451-1387-4CA6-816F-3879F97B5CBC}" type="slidenum">
-              <a:rPr b="0" lang="en-US"/>
-              <a:t>15</a:t>
+              <a:t>11</a:t>
             </a:fld>
             <a:endParaRPr lang="en-US"/>
           </a:p>
@@ -6046,7 +5560,7 @@
                   <a:schemeClr val="tx2"/>
                 </a:solidFill>
               </a:rPr>
-              <a:t>한계와 다음 개선</a:t>
+              <a:t>시연: 같은 질문, base와 final을 나란히</a:t>
             </a:r>
             <a:endParaRPr lang="en-US" sz="2800" dirty="0"/>
           </a:p>
@@ -6054,18 +5568,84 @@
       </p:sp>
       <p:sp>
         <p:nvSpPr>
-          <p:cNvPr id="3" name="lim-0"/>
+          <p:cNvPr id="3" name="demo-cmd"/>
           <p:cNvSpPr/>
           <p:nvPr/>
         </p:nvSpPr>
         <p:spPr>
           <a:xfrm>
-            <a:off x="548640" y="1280160"/>
-            <a:ext cx="11064240" cy="1078992"/>
+            <a:off x="548640" y="1371600"/>
+            <a:ext cx="11064240" cy="914400"/>
           </a:xfrm>
           <a:prstGeom prst="roundRect">
             <a:avLst>
-              <a:gd name="adj" fmla="val 10169"/>
+              <a:gd name="adj" fmla="val 12000"/>
+            </a:avLst>
+          </a:prstGeom>
+          <a:solidFill>
+            <a:schemeClr val="tx2"/>
+          </a:solidFill>
+          <a:ln w="12700">
+            <a:solidFill>
+              <a:schemeClr val="tx2"/>
+            </a:solidFill>
+            <a:prstDash val="solid"/>
+          </a:ln>
+        </p:spPr>
+      </p:sp>
+      <p:sp>
+        <p:nvSpPr>
+          <p:cNvPr id="4" name="Text 2"/>
+          <p:cNvSpPr txBox="1"/>
+          <p:nvPr/>
+        </p:nvSpPr>
+        <p:spPr>
+          <a:xfrm>
+            <a:off x="822960" y="1463040"/>
+            <a:ext cx="10515600" cy="731520"/>
+          </a:xfrm>
+          <a:prstGeom prst="rect">
+            <a:avLst/>
+          </a:prstGeom>
+          <a:noFill/>
+          <a:ln/>
+        </p:spPr>
+        <p:txBody>
+          <a:bodyPr wrap="square" lIns="0" tIns="0" rIns="0" bIns="0" rtlCol="0" anchor="ctr"/>
+          <a:lstStyle/>
+          <a:p>
+            <a:pPr indent="0" marL="0">
+              <a:buNone/>
+            </a:pPr>
+            <a:r>
+              <a:rPr lang="en-US" sz="1600" dirty="0">
+                <a:solidFill>
+                  <a:schemeClr val="bg1"/>
+                </a:solidFill>
+                <a:latin typeface="Courier New" pitchFamily="34" charset="0"/>
+                <a:ea typeface="Courier New" pitchFamily="34" charset="-122"/>
+                <a:cs typeface="Courier New" pitchFamily="34" charset="-120"/>
+              </a:rPr>
+              <a:t>.venv/bin/python scripts/demo_side_by_side.py --id Q01</a:t>
+            </a:r>
+            <a:endParaRPr lang="en-US" sz="1600" dirty="0"/>
+          </a:p>
+        </p:txBody>
+      </p:sp>
+      <p:sp>
+        <p:nvSpPr>
+          <p:cNvPr id="5" name="demo-base"/>
+          <p:cNvSpPr/>
+          <p:nvPr/>
+        </p:nvSpPr>
+        <p:spPr>
+          <a:xfrm>
+            <a:off x="548640" y="2560320"/>
+            <a:ext cx="5458968" cy="2926080"/>
+          </a:xfrm>
+          <a:prstGeom prst="roundRect">
+            <a:avLst>
+              <a:gd name="adj" fmla="val 3750"/>
             </a:avLst>
           </a:prstGeom>
           <a:solidFill>
@@ -6081,6 +5661,516 @@
       </p:sp>
       <p:sp>
         <p:nvSpPr>
+          <p:cNvPr id="6" name="Text 4"/>
+          <p:cNvSpPr txBox="1"/>
+          <p:nvPr/>
+        </p:nvSpPr>
+        <p:spPr>
+          <a:xfrm>
+            <a:off x="822960" y="2743200"/>
+            <a:ext cx="1828800" cy="411480"/>
+          </a:xfrm>
+          <a:prstGeom prst="rect">
+            <a:avLst/>
+          </a:prstGeom>
+          <a:noFill/>
+          <a:ln/>
+        </p:spPr>
+        <p:txBody>
+          <a:bodyPr wrap="square" lIns="0" tIns="0" rIns="0" bIns="0" rtlCol="0" anchor="ctr"/>
+          <a:lstStyle/>
+          <a:p>
+            <a:pPr indent="0" marL="0">
+              <a:buNone/>
+            </a:pPr>
+            <a:r>
+              <a:rPr lang="en-US" sz="1800" b="1" dirty="0">
+                <a:solidFill>
+                  <a:schemeClr val="tx2"/>
+                </a:solidFill>
+              </a:rPr>
+              <a:t>[base]</a:t>
+            </a:r>
+            <a:endParaRPr lang="en-US" sz="1800" dirty="0"/>
+          </a:p>
+        </p:txBody>
+      </p:sp>
+      <p:sp>
+        <p:nvSpPr>
+          <p:cNvPr id="7" name="Text 5"/>
+          <p:cNvSpPr txBox="1"/>
+          <p:nvPr/>
+        </p:nvSpPr>
+        <p:spPr>
+          <a:xfrm>
+            <a:off x="4572000" y="2743200"/>
+            <a:ext cx="1188720" cy="411480"/>
+          </a:xfrm>
+          <a:prstGeom prst="rect">
+            <a:avLst/>
+          </a:prstGeom>
+          <a:noFill/>
+          <a:ln/>
+        </p:spPr>
+        <p:txBody>
+          <a:bodyPr wrap="square" lIns="0" tIns="0" rIns="0" bIns="0" rtlCol="0" anchor="ctr"/>
+          <a:lstStyle/>
+          <a:p>
+            <a:pPr algn="r" indent="0" marL="0">
+              <a:buNone/>
+            </a:pPr>
+            <a:r>
+              <a:rPr lang="en-US" sz="1600" b="1" dirty="0">
+                <a:solidFill>
+                  <a:schemeClr val="accent1"/>
+                </a:solidFill>
+              </a:rPr>
+              <a:t>오답</a:t>
+            </a:r>
+            <a:endParaRPr lang="en-US" sz="1600" dirty="0"/>
+          </a:p>
+        </p:txBody>
+      </p:sp>
+      <p:sp>
+        <p:nvSpPr>
+          <p:cNvPr id="8" name="Text 6"/>
+          <p:cNvSpPr txBox="1"/>
+          <p:nvPr/>
+        </p:nvSpPr>
+        <p:spPr>
+          <a:xfrm>
+            <a:off x="822960" y="3291840"/>
+            <a:ext cx="4937760" cy="2011680"/>
+          </a:xfrm>
+          <a:prstGeom prst="rect">
+            <a:avLst/>
+          </a:prstGeom>
+          <a:noFill/>
+          <a:ln/>
+        </p:spPr>
+        <p:txBody>
+          <a:bodyPr wrap="square" lIns="0" tIns="0" rIns="0" bIns="0" rtlCol="0" anchor="t"/>
+          <a:lstStyle/>
+          <a:p>
+            <a:pPr indent="0" marL="0">
+              <a:spcAft>
+                <a:spcPts val="800"/>
+              </a:spcAft>
+              <a:buNone/>
+            </a:pPr>
+            <a:r>
+              <a:rPr lang="en-US" sz="1450" dirty="0">
+                <a:solidFill>
+                  <a:srgbClr val="8A94A3"/>
+                </a:solidFill>
+              </a:rPr>
+              <a:t>고른 런북  </a:t>
+            </a:r>
+            <a:pPr indent="0" marL="0">
+              <a:spcAft>
+                <a:spcPts val="800"/>
+              </a:spcAft>
+              <a:buNone/>
+            </a:pPr>
+            <a:r>
+              <a:rPr lang="en-US" sz="1450" b="1" dirty="0">
+                <a:solidFill>
+                  <a:schemeClr val="tx1"/>
+                </a:solidFill>
+              </a:rPr>
+              <a:t>high-latency (응답 지연 절차)</a:t>
+            </a:r>
+            <a:endParaRPr lang="en-US" sz="1450" dirty="0"/>
+          </a:p>
+          <a:p>
+            <a:pPr indent="0" marL="0">
+              <a:spcAft>
+                <a:spcPts val="800"/>
+              </a:spcAft>
+              <a:buNone/>
+            </a:pPr>
+            <a:r>
+              <a:rPr lang="en-US" sz="1450" dirty="0">
+                <a:solidFill>
+                  <a:srgbClr val="8A94A3"/>
+                </a:solidFill>
+              </a:rPr>
+              <a:t>답의 핵심  </a:t>
+            </a:r>
+            <a:pPr indent="0" marL="0">
+              <a:spcAft>
+                <a:spcPts val="800"/>
+              </a:spcAft>
+              <a:buNone/>
+            </a:pPr>
+            <a:r>
+              <a:rPr lang="en-US" sz="1450" dirty="0">
+                <a:solidFill>
+                  <a:schemeClr val="tx1"/>
+                </a:solidFill>
+              </a:rPr>
+              <a:t>커넥션 풀 늘리기, 트래픽 분산…</a:t>
+            </a:r>
+            <a:endParaRPr lang="en-US" sz="1450" dirty="0"/>
+          </a:p>
+        </p:txBody>
+      </p:sp>
+      <p:sp>
+        <p:nvSpPr>
+          <p:cNvPr id="9" name="demo-final"/>
+          <p:cNvSpPr/>
+          <p:nvPr/>
+        </p:nvSpPr>
+        <p:spPr>
+          <a:xfrm>
+            <a:off x="6153912" y="2560320"/>
+            <a:ext cx="5458968" cy="2926080"/>
+          </a:xfrm>
+          <a:prstGeom prst="roundRect">
+            <a:avLst>
+              <a:gd name="adj" fmla="val 3750"/>
+            </a:avLst>
+          </a:prstGeom>
+          <a:solidFill>
+            <a:schemeClr val="bg2"/>
+          </a:solidFill>
+          <a:ln w="12700">
+            <a:solidFill>
+              <a:schemeClr val="bg2"/>
+            </a:solidFill>
+            <a:prstDash val="solid"/>
+          </a:ln>
+        </p:spPr>
+      </p:sp>
+      <p:sp>
+        <p:nvSpPr>
+          <p:cNvPr id="10" name="Text 8"/>
+          <p:cNvSpPr txBox="1"/>
+          <p:nvPr/>
+        </p:nvSpPr>
+        <p:spPr>
+          <a:xfrm>
+            <a:off x="6428232" y="2743200"/>
+            <a:ext cx="1828800" cy="411480"/>
+          </a:xfrm>
+          <a:prstGeom prst="rect">
+            <a:avLst/>
+          </a:prstGeom>
+          <a:noFill/>
+          <a:ln/>
+        </p:spPr>
+        <p:txBody>
+          <a:bodyPr wrap="square" lIns="0" tIns="0" rIns="0" bIns="0" rtlCol="0" anchor="ctr"/>
+          <a:lstStyle/>
+          <a:p>
+            <a:pPr indent="0" marL="0">
+              <a:buNone/>
+            </a:pPr>
+            <a:r>
+              <a:rPr lang="en-US" sz="1800" b="1" dirty="0">
+                <a:solidFill>
+                  <a:schemeClr val="tx2"/>
+                </a:solidFill>
+              </a:rPr>
+              <a:t>[final]</a:t>
+            </a:r>
+            <a:endParaRPr lang="en-US" sz="1800" dirty="0"/>
+          </a:p>
+        </p:txBody>
+      </p:sp>
+      <p:sp>
+        <p:nvSpPr>
+          <p:cNvPr id="11" name="Text 9"/>
+          <p:cNvSpPr txBox="1"/>
+          <p:nvPr/>
+        </p:nvSpPr>
+        <p:spPr>
+          <a:xfrm>
+            <a:off x="10177272" y="2743200"/>
+            <a:ext cx="1188720" cy="411480"/>
+          </a:xfrm>
+          <a:prstGeom prst="rect">
+            <a:avLst/>
+          </a:prstGeom>
+          <a:noFill/>
+          <a:ln/>
+        </p:spPr>
+        <p:txBody>
+          <a:bodyPr wrap="square" lIns="0" tIns="0" rIns="0" bIns="0" rtlCol="0" anchor="ctr"/>
+          <a:lstStyle/>
+          <a:p>
+            <a:pPr algn="r" indent="0" marL="0">
+              <a:buNone/>
+            </a:pPr>
+            <a:r>
+              <a:rPr lang="en-US" sz="1600" b="1" dirty="0">
+                <a:solidFill>
+                  <a:schemeClr val="accent2"/>
+                </a:solidFill>
+              </a:rPr>
+              <a:t>정답 포함</a:t>
+            </a:r>
+            <a:endParaRPr lang="en-US" sz="1600" dirty="0"/>
+          </a:p>
+        </p:txBody>
+      </p:sp>
+      <p:sp>
+        <p:nvSpPr>
+          <p:cNvPr id="12" name="Text 10"/>
+          <p:cNvSpPr txBox="1"/>
+          <p:nvPr/>
+        </p:nvSpPr>
+        <p:spPr>
+          <a:xfrm>
+            <a:off x="6428232" y="3291840"/>
+            <a:ext cx="4937760" cy="2011680"/>
+          </a:xfrm>
+          <a:prstGeom prst="rect">
+            <a:avLst/>
+          </a:prstGeom>
+          <a:noFill/>
+          <a:ln/>
+        </p:spPr>
+        <p:txBody>
+          <a:bodyPr wrap="square" lIns="0" tIns="0" rIns="0" bIns="0" rtlCol="0" anchor="t"/>
+          <a:lstStyle/>
+          <a:p>
+            <a:pPr indent="0" marL="0">
+              <a:spcAft>
+                <a:spcPts val="800"/>
+              </a:spcAft>
+              <a:buNone/>
+            </a:pPr>
+            <a:r>
+              <a:rPr lang="en-US" sz="1450" dirty="0">
+                <a:solidFill>
+                  <a:srgbClr val="8A94A3"/>
+                </a:solidFill>
+              </a:rPr>
+              <a:t>고른 런북  </a:t>
+            </a:r>
+            <a:pPr indent="0" marL="0">
+              <a:spcAft>
+                <a:spcPts val="800"/>
+              </a:spcAft>
+              <a:buNone/>
+            </a:pPr>
+            <a:r>
+              <a:rPr lang="en-US" sz="1450" b="1" dirty="0">
+                <a:solidFill>
+                  <a:schemeClr val="tx1"/>
+                </a:solidFill>
+              </a:rPr>
+              <a:t>db-down (+disk-full 혼입)</a:t>
+            </a:r>
+            <a:endParaRPr lang="en-US" sz="1450" dirty="0"/>
+          </a:p>
+          <a:p>
+            <a:pPr indent="0" marL="0">
+              <a:spcAft>
+                <a:spcPts val="800"/>
+              </a:spcAft>
+              <a:buNone/>
+            </a:pPr>
+            <a:r>
+              <a:rPr lang="en-US" sz="1450" dirty="0">
+                <a:solidFill>
+                  <a:srgbClr val="8A94A3"/>
+                </a:solidFill>
+              </a:rPr>
+              <a:t>답의 핵심  </a:t>
+            </a:r>
+            <a:pPr indent="0" marL="0">
+              <a:spcAft>
+                <a:spcPts val="800"/>
+              </a:spcAft>
+              <a:buNone/>
+            </a:pPr>
+            <a:r>
+              <a:rPr lang="en-US" sz="1450" dirty="0">
+                <a:solidFill>
+                  <a:schemeClr val="tx1"/>
+                </a:solidFill>
+              </a:rPr>
+              <a:t>커넥션 풀 점검, 필요 시 failover 노드로 전환…</a:t>
+            </a:r>
+            <a:endParaRPr lang="en-US" sz="1450" dirty="0"/>
+          </a:p>
+        </p:txBody>
+      </p:sp>
+      <p:sp>
+        <p:nvSpPr>
+          <p:cNvPr id="13" name="Text 11"/>
+          <p:cNvSpPr txBox="1"/>
+          <p:nvPr/>
+        </p:nvSpPr>
+        <p:spPr>
+          <a:xfrm>
+            <a:off x="548640" y="5715000"/>
+            <a:ext cx="11064240" cy="274320"/>
+          </a:xfrm>
+          <a:prstGeom prst="rect">
+            <a:avLst/>
+          </a:prstGeom>
+          <a:noFill/>
+          <a:ln/>
+        </p:spPr>
+        <p:txBody>
+          <a:bodyPr wrap="square" lIns="0" tIns="0" rIns="0" bIns="0" rtlCol="0" anchor="ctr"/>
+          <a:lstStyle/>
+          <a:p>
+            <a:pPr indent="0" marL="0">
+              <a:buNone/>
+            </a:pPr>
+            <a:r>
+              <a:rPr lang="en-US" sz="1050" dirty="0">
+                <a:solidFill>
+                  <a:schemeClr val="accent3"/>
+                </a:solidFill>
+              </a:rPr>
+              <a:t>질문: "DB 프라이머리가 다운됐습니다. 대응 절차를 알려주세요." 화면 하나에 런북 정오·답변·지연·비용·근거 없는 수치. 기록 results/raw/demo_*.json</a:t>
+            </a:r>
+            <a:endParaRPr lang="en-US" sz="1050" dirty="0"/>
+          </a:p>
+        </p:txBody>
+      </p:sp>
+      <p:sp>
+        <p:nvSpPr>
+          <p:cNvPr id="25" name="Slide Number Placeholder 0"/>
+          <p:cNvSpPr>
+            <a:spLocks noGrp="1"/>
+          </p:cNvSpPr>
+          <p:nvPr>
+            <p:ph type="sldNum" sz="quarter" idx="4294967295"/>
+          </p:nvPr>
+        </p:nvSpPr>
+        <p:spPr>
+          <a:xfrm>
+            <a:off x="11155680" y="6400800"/>
+            <a:ext cx="457200" cy="274320"/>
+          </a:xfrm>
+          <a:prstGeom prst="rect">
+            <a:avLst/>
+          </a:prstGeom>
+          <a:extLst>
+            <a:ext uri="{C572A759-6A51-4108-AA02-DFA0A04FC94B}">
+              <ma14:wrappingTextBoxFlag xmlns:ma14="http://schemas.microsoft.com/office/mac/drawingml/2011/main" val="0"/>
+            </a:ext>
+          </a:extLst>
+        </p:spPr>
+        <p:txBody>
+          <a:bodyPr/>
+          <a:lstStyle>
+            <a:lvl1pPr>
+              <a:defRPr sz="1000">
+                <a:solidFill>
+                  <a:schemeClr val="accent3"/>
+                </a:solidFill>
+              </a:defRPr>
+            </a:lvl1pPr>
+          </a:lstStyle>
+          <a:p>
+            <a:pPr algn="r"/>
+            <a:fld id="{F7021451-1387-4CA6-816F-3879F97B5CBC}" type="slidenum">
+              <a:rPr b="0" lang="en-US"/>
+              <a:t>16</a:t>
+            </a:fld>
+            <a:endParaRPr lang="en-US"/>
+          </a:p>
+        </p:txBody>
+      </p:sp>
+    </p:spTree>
+  </p:cSld>
+  <p:clrMapOvr>
+    <a:masterClrMapping/>
+  </p:clrMapOvr>
+</p:sld>
+</file>
+
+<file path=ppt/slides/slide17.xml><?xml version="1.0" encoding="utf-8"?>
+<p:sld xmlns:a="http://schemas.openxmlformats.org/drawingml/2006/main" xmlns:r="http://schemas.openxmlformats.org/officeDocument/2006/relationships" xmlns:p="http://schemas.openxmlformats.org/presentationml/2006/main">
+  <p:cSld name="Slide 17">
+    <p:spTree>
+      <p:nvGrpSpPr>
+        <p:cNvPr id="1" name=""/>
+        <p:cNvGrpSpPr/>
+        <p:nvPr/>
+      </p:nvGrpSpPr>
+      <p:grpSpPr>
+        <a:xfrm>
+          <a:off x="0" y="0"/>
+          <a:ext cx="0" cy="0"/>
+          <a:chOff x="0" y="0"/>
+          <a:chExt cx="0" cy="0"/>
+        </a:xfrm>
+      </p:grpSpPr>
+      <p:sp>
+        <p:nvSpPr>
+          <p:cNvPr id="2" name="Text 0"/>
+          <p:cNvSpPr/>
+          <p:nvPr>
+            <p:ph idx="100" type="title" hasCustomPrompt="1"/>
+          </p:nvPr>
+        </p:nvSpPr>
+        <p:spPr>
+          <a:xfrm>
+            <a:off x="548640" y="320040"/>
+            <a:ext cx="11064240" cy="777240"/>
+          </a:xfrm>
+          <a:prstGeom prst="rect">
+            <a:avLst/>
+          </a:prstGeom>
+          <a:noFill/>
+          <a:ln/>
+        </p:spPr>
+        <p:txBody>
+          <a:bodyPr wrap="square" lIns="0" tIns="0" rIns="0" bIns="0" rtlCol="0" anchor="ctr"/>
+          <a:lstStyle/>
+          <a:p>
+            <a:pPr algn="l" indent="0" marL="0">
+              <a:buNone/>
+            </a:pPr>
+            <a:r>
+              <a:rPr lang="en-US" sz="2800" b="1" dirty="0">
+                <a:solidFill>
+                  <a:schemeClr val="tx2"/>
+                </a:solidFill>
+              </a:rPr>
+              <a:t>한계와 다음 개선</a:t>
+            </a:r>
+            <a:endParaRPr lang="en-US" sz="2800" dirty="0"/>
+          </a:p>
+        </p:txBody>
+      </p:sp>
+      <p:sp>
+        <p:nvSpPr>
+          <p:cNvPr id="3" name="lim-0"/>
+          <p:cNvSpPr/>
+          <p:nvPr/>
+        </p:nvSpPr>
+        <p:spPr>
+          <a:xfrm>
+            <a:off x="548640" y="1280160"/>
+            <a:ext cx="11064240" cy="1078992"/>
+          </a:xfrm>
+          <a:prstGeom prst="roundRect">
+            <a:avLst>
+              <a:gd name="adj" fmla="val 10169"/>
+            </a:avLst>
+          </a:prstGeom>
+          <a:solidFill>
+            <a:schemeClr val="bg2"/>
+          </a:solidFill>
+          <a:ln w="12700">
+            <a:solidFill>
+              <a:schemeClr val="bg2"/>
+            </a:solidFill>
+            <a:prstDash val="solid"/>
+          </a:ln>
+        </p:spPr>
+      </p:sp>
+      <p:sp>
+        <p:nvSpPr>
           <p:cNvPr id="4" name="lim-dot-0"/>
           <p:cNvSpPr/>
           <p:nvPr/>
@@ -6875,7 +6965,7 @@
             <a:pPr algn="r"/>
             <a:fld id="{F7021451-1387-4CA6-816F-3879F97B5CBC}" type="slidenum">
               <a:rPr b="0" lang="en-US"/>
-              <a:t>16</a:t>
+              <a:t>17</a:t>
             </a:fld>
             <a:endParaRPr lang="en-US"/>
           </a:p>
@@ -7130,7 +7220,7 @@
                   <a:schemeClr val="tx2"/>
                 </a:solidFill>
               </a:rPr>
-              <a:t>결론: 조치 정확도는 RAG가, 비용은 캐스케이드가 낮췄다</a:t>
+              <a:t>실태 현황: 시장은 AI SRE로 가는데, 효과를 잰 곳은 드물다</a:t>
             </a:r>
             <a:endParaRPr lang="en-US" sz="2800" dirty="0"/>
           </a:p>
@@ -7138,18 +7228,18 @@
       </p:sp>
       <p:sp>
         <p:nvSpPr>
-          <p:cNvPr id="3" name="stat-miss"/>
+          <p:cNvPr id="3" name="stat-outage"/>
           <p:cNvSpPr/>
           <p:nvPr/>
         </p:nvSpPr>
         <p:spPr>
           <a:xfrm>
-            <a:off x="548640" y="1371600"/>
-            <a:ext cx="3520440" cy="1828800"/>
+            <a:off x="548640" y="1280160"/>
+            <a:ext cx="3520440" cy="2103120"/>
           </a:xfrm>
           <a:prstGeom prst="roundRect">
             <a:avLst>
-              <a:gd name="adj" fmla="val 6000"/>
+              <a:gd name="adj" fmla="val 5217"/>
             </a:avLst>
           </a:prstGeom>
           <a:solidFill>
@@ -7171,7 +7261,7 @@
         </p:nvSpPr>
         <p:spPr>
           <a:xfrm>
-            <a:off x="822960" y="1572768"/>
+            <a:off x="822960" y="1481328"/>
             <a:ext cx="2971800" cy="868680"/>
           </a:xfrm>
           <a:prstGeom prst="rect">
@@ -7190,10 +7280,10 @@
             <a:r>
               <a:rPr lang="en-US" sz="3600" b="1" dirty="0">
                 <a:solidFill>
-                  <a:schemeClr val="accent2"/>
+                  <a:schemeClr val="accent1"/>
                 </a:solidFill>
               </a:rPr>
-              <a:t>56% → 9%</a:t>
+              <a:t>54%</a:t>
             </a:r>
             <a:endParaRPr lang="en-US" sz="3600" dirty="0"/>
           </a:p>
@@ -7207,8 +7297,8 @@
         </p:nvSpPr>
         <p:spPr>
           <a:xfrm>
-            <a:off x="822960" y="2468880"/>
-            <a:ext cx="2971800" cy="640080"/>
+            <a:off x="822960" y="2377440"/>
+            <a:ext cx="2971800" cy="914400"/>
           </a:xfrm>
           <a:prstGeom prst="rect">
             <a:avLst/>
@@ -7229,40 +7319,26 @@
                   <a:schemeClr val="tx1"/>
                 </a:solidFill>
               </a:rPr>
-              <a:t>정답 런북 누락률 (base → final)</a:t>
+              <a:t>최근 중대 장애 비용이 10만 달러를 넘었다는 응답 (Uptime Institute 2025). 절차 미준수 장애도 늘었다</a:t>
             </a:r>
             <a:endParaRPr lang="en-US" sz="1350" dirty="0"/>
           </a:p>
-          <a:p>
-            <a:pPr indent="0" marL="0">
-              <a:buNone/>
-            </a:pPr>
-            <a:r>
-              <a:rPr lang="en-US" sz="1350" dirty="0">
-                <a:solidFill>
-                  <a:schemeClr val="tx1"/>
-                </a:solidFill>
-              </a:rPr>
-              <a:t>= 맞는 조치를 권고하지 못할 위험</a:t>
-            </a:r>
-            <a:endParaRPr lang="en-US" sz="1350" dirty="0"/>
-          </a:p>
-        </p:txBody>
-      </p:sp>
-      <p:sp>
-        <p:nvSpPr>
-          <p:cNvPr id="6" name="stat-cost"/>
+        </p:txBody>
+      </p:sp>
+      <p:sp>
+        <p:nvSpPr>
+          <p:cNvPr id="6" name="stat-market"/>
           <p:cNvSpPr/>
           <p:nvPr/>
         </p:nvSpPr>
         <p:spPr>
           <a:xfrm>
-            <a:off x="4334256" y="1371600"/>
-            <a:ext cx="3520440" cy="1828800"/>
+            <a:off x="4334256" y="1280160"/>
+            <a:ext cx="3520440" cy="2103120"/>
           </a:xfrm>
           <a:prstGeom prst="roundRect">
             <a:avLst>
-              <a:gd name="adj" fmla="val 6000"/>
+              <a:gd name="adj" fmla="val 5217"/>
             </a:avLst>
           </a:prstGeom>
           <a:solidFill>
@@ -7284,7 +7360,7 @@
         </p:nvSpPr>
         <p:spPr>
           <a:xfrm>
-            <a:off x="4608576" y="1572768"/>
+            <a:off x="4608576" y="1481328"/>
             <a:ext cx="2971800" cy="868680"/>
           </a:xfrm>
           <a:prstGeom prst="rect">
@@ -7303,10 +7379,10 @@
             <a:r>
               <a:rPr lang="en-US" sz="3600" b="1" dirty="0">
                 <a:solidFill>
-                  <a:schemeClr val="accent6"/>
+                  <a:schemeClr val="accent2"/>
                 </a:solidFill>
               </a:rPr>
-              <a:t>-84%</a:t>
+              <a:t>5개</a:t>
             </a:r>
             <a:endParaRPr lang="en-US" sz="3600" dirty="0"/>
           </a:p>
@@ -7320,8 +7396,8 @@
         </p:nvSpPr>
         <p:spPr>
           <a:xfrm>
-            <a:off x="4608576" y="2468880"/>
-            <a:ext cx="2971800" cy="640080"/>
+            <a:off x="4608576" y="2377440"/>
+            <a:ext cx="2971800" cy="914400"/>
           </a:xfrm>
           <a:prstGeom prst="rect">
             <a:avLst/>
@@ -7342,40 +7418,26 @@
                   <a:schemeClr val="tx1"/>
                 </a:solidFill>
               </a:rPr>
-              <a:t>장애 1건당 처리 비용 $0.00343 → $0.00057</a:t>
+              <a:t>국외 정식 출시 AI SRE: PagerDuty·Datadog·Azure·AWS·Grafana. 국내도 SK AX·삼성계정·롯데ON·현대오토에버·GS리테일</a:t>
             </a:r>
             <a:endParaRPr lang="en-US" sz="1350" dirty="0"/>
           </a:p>
-          <a:p>
-            <a:pPr indent="0" marL="0">
-              <a:buNone/>
-            </a:pPr>
-            <a:r>
-              <a:rPr lang="en-US" sz="1350" dirty="0">
-                <a:solidFill>
-                  <a:schemeClr val="tx1"/>
-                </a:solidFill>
-              </a:rPr>
-              <a:t>(캐스케이드만 켜면 -73%)</a:t>
-            </a:r>
-            <a:endParaRPr lang="en-US" sz="1350" dirty="0"/>
-          </a:p>
-        </p:txBody>
-      </p:sp>
-      <p:sp>
-        <p:nvSpPr>
-          <p:cNvPr id="9" name="stat-judge"/>
+        </p:txBody>
+      </p:sp>
+      <p:sp>
+        <p:nvSpPr>
+          <p:cNvPr id="9" name="stat-gap"/>
           <p:cNvSpPr/>
           <p:nvPr/>
         </p:nvSpPr>
         <p:spPr>
           <a:xfrm>
-            <a:off x="8119872" y="1371600"/>
-            <a:ext cx="3520440" cy="1828800"/>
+            <a:off x="8119872" y="1280160"/>
+            <a:ext cx="3520440" cy="2103120"/>
           </a:xfrm>
           <a:prstGeom prst="roundRect">
             <a:avLst>
-              <a:gd name="adj" fmla="val 6000"/>
+              <a:gd name="adj" fmla="val 5217"/>
             </a:avLst>
           </a:prstGeom>
           <a:solidFill>
@@ -7397,7 +7459,7 @@
         </p:nvSpPr>
         <p:spPr>
           <a:xfrm>
-            <a:off x="8394192" y="1572768"/>
+            <a:off x="8394192" y="1481328"/>
             <a:ext cx="2971800" cy="868680"/>
           </a:xfrm>
           <a:prstGeom prst="rect">
@@ -7416,10 +7478,10 @@
             <a:r>
               <a:rPr lang="en-US" sz="3600" b="1" dirty="0">
                 <a:solidFill>
-                  <a:schemeClr val="accent1"/>
+                  <a:schemeClr val="accent6"/>
                 </a:solidFill>
               </a:rPr>
-              <a:t>개선 미확인</a:t>
+              <a:t>0건</a:t>
             </a:r>
             <a:endParaRPr lang="en-US" sz="3600" dirty="0"/>
           </a:p>
@@ -7433,8 +7495,8 @@
         </p:nvSpPr>
         <p:spPr>
           <a:xfrm>
-            <a:off x="8394192" y="2468880"/>
-            <a:ext cx="2971800" cy="640080"/>
+            <a:off x="8394192" y="2377440"/>
+            <a:ext cx="2971800" cy="914400"/>
           </a:xfrm>
           <a:prstGeom prst="rect">
             <a:avLst/>
@@ -7455,40 +7517,26 @@
                   <a:schemeClr val="tx1"/>
                 </a:solidFill>
               </a:rPr>
-              <a:t>LLM Judge 단독: 품질 향상 확인 안 됨</a:t>
+              <a:t>조사 범위의 국내 공개 사례 중 고정 평가셋·Ablation 공개. 국외 수치도 대부분 '최대 몇 %' 업체 주장</a:t>
             </a:r>
             <a:endParaRPr lang="en-US" sz="1350" dirty="0"/>
           </a:p>
-          <a:p>
-            <a:pPr indent="0" marL="0">
-              <a:buNone/>
-            </a:pPr>
-            <a:r>
-              <a:rPr lang="en-US" sz="1350" dirty="0">
-                <a:solidFill>
-                  <a:schemeClr val="tx1"/>
-                </a:solidFill>
-              </a:rPr>
-              <a:t>지연은 +2.3초 (유의)</a:t>
-            </a:r>
-            <a:endParaRPr lang="en-US" sz="1350" dirty="0"/>
-          </a:p>
-        </p:txBody>
-      </p:sp>
-      <p:sp>
-        <p:nvSpPr>
-          <p:cNvPr id="12" name="method"/>
+        </p:txBody>
+      </p:sp>
+      <p:sp>
+        <p:nvSpPr>
+          <p:cNvPr id="12" name="landscape-evidence"/>
           <p:cNvSpPr/>
           <p:nvPr/>
         </p:nvSpPr>
         <p:spPr>
           <a:xfrm>
-            <a:off x="548640" y="3520440"/>
-            <a:ext cx="11064240" cy="1783080"/>
+            <a:off x="548640" y="3611880"/>
+            <a:ext cx="11064240" cy="2148840"/>
           </a:xfrm>
           <a:prstGeom prst="roundRect">
             <a:avLst>
-              <a:gd name="adj" fmla="val 6154"/>
+              <a:gd name="adj" fmla="val 5106"/>
             </a:avLst>
           </a:prstGeom>
           <a:solidFill>
@@ -7510,8 +7558,8 @@
         </p:nvSpPr>
         <p:spPr>
           <a:xfrm>
-            <a:off x="822960" y="3657600"/>
-            <a:ext cx="10515600" cy="1600200"/>
+            <a:off x="822960" y="3749040"/>
+            <a:ext cx="10515600" cy="1920240"/>
           </a:xfrm>
           <a:prstGeom prst="rect">
             <a:avLst/>
@@ -7525,73 +7573,73 @@
           <a:p>
             <a:pPr indent="0" marL="0">
               <a:spcAft>
-                <a:spcPts val="500"/>
+                <a:spcPts val="400"/>
               </a:spcAft>
               <a:buNone/>
             </a:pPr>
             <a:r>
-              <a:rPr lang="en-US" sz="1600" b="1" dirty="0">
-                <a:solidFill>
-                  <a:srgbClr val="16202C"/>
+              <a:rPr lang="en-US" sz="1400" b="1" dirty="0">
+                <a:solidFill>
+                  <a:schemeClr val="tx1"/>
                 </a:solidFill>
               </a:rPr>
-              <a:t>어떻게 증명했나</a:t>
-            </a:r>
-            <a:endParaRPr lang="en-US" sz="1450" dirty="0"/>
+              <a:t>현업 구조는 우리와 같다: 런북 근거 + MCP 도구 연동 + 조치 전 사람 승인</a:t>
+            </a:r>
+            <a:endParaRPr lang="en-US" sz="1400" dirty="0"/>
           </a:p>
           <a:p>
             <a:pPr marL="342900" indent="-342900">
               <a:spcAft>
-                <a:spcPts val="500"/>
+                <a:spcPts val="400"/>
               </a:spcAft>
               <a:buSzPct val="100000"/>
               <a:buChar char="•"/>
             </a:pPr>
             <a:r>
-              <a:rPr lang="en-US" sz="1450" dirty="0">
+              <a:rPr lang="en-US" sz="1400" dirty="0">
                 <a:solidFill>
                   <a:schemeClr val="tx1"/>
                 </a:solidFill>
               </a:rPr>
-              <a:t>평가셋 60건을 dev 24건(기준값 조정용)과 holdout 36건(조정 전에 고정, 최종 보고용)으로 나눴다. 이 덱의 수치는 모두 holdout.</a:t>
-            </a:r>
-            <a:endParaRPr lang="en-US" sz="1450" dirty="0"/>
+              <a:t>Datadog: 기능 하나가 일부 조사는 개선하고 다른 조사는 나쁘게 만든 사례 공개 → 부품을 하나씩 켜고 끄며 재야 하는 이유</a:t>
+            </a:r>
+            <a:endParaRPr lang="en-US" sz="1400" dirty="0"/>
           </a:p>
           <a:p>
             <a:pPr marL="342900" indent="-342900">
               <a:spcAft>
-                <a:spcPts val="500"/>
+                <a:spcPts val="400"/>
               </a:spcAft>
               <a:buSzPct val="100000"/>
               <a:buChar char="•"/>
             </a:pPr>
             <a:r>
-              <a:rPr lang="en-US" sz="1450" dirty="0">
+              <a:rPr lang="en-US" sz="1400" dirty="0">
                 <a:solidFill>
                   <a:schemeClr val="tx1"/>
                 </a:solidFill>
               </a:rPr>
-              <a:t>개선을 하나씩 켠 7구성을 각 3회 반복하고, 구성 간 차이는 같은 질의끼리 짝지은 bootstrap 95% 신뢰구간으로 판정했다.</a:t>
-            </a:r>
-            <a:endParaRPr lang="en-US" sz="1450" dirty="0"/>
+              <a:t>연구: SOP를 넣자 RCA 정확도 35.5% → 64.0% (Flow-of-Action, WWW'25) · 외부 피드백 없는 자기교정은 효과 없음 (Huang 외, ICLR'24)</a:t>
+            </a:r>
+            <a:endParaRPr lang="en-US" sz="1400" dirty="0"/>
           </a:p>
           <a:p>
             <a:pPr marL="342900" indent="-342900">
               <a:spcAft>
-                <a:spcPts val="500"/>
+                <a:spcPts val="400"/>
               </a:spcAft>
               <a:buSzPct val="100000"/>
               <a:buChar char="•"/>
             </a:pPr>
             <a:r>
-              <a:rPr lang="en-US" sz="1450" dirty="0">
+              <a:rPr lang="en-US" sz="1400" dirty="0">
                 <a:solidFill>
                   <a:schemeClr val="tx1"/>
                 </a:solidFill>
               </a:rPr>
-              <a:t>평가자(LLM Judge)가 관대할 수 있어, Judge와 무관한 결정적 지표(정답 런북 누락·혼입, 런북 어구 포함)로 결론을 냈다.</a:t>
-            </a:r>
-            <a:endParaRPr lang="en-US" sz="1450" dirty="0"/>
+              <a:t>국내 연구: RCA 에이전트 실패 1위는 데이터 해석 환각 71.2% (오케스트로·한양대, ASPLOS'26 AIOps 워크숍)</a:t>
+            </a:r>
+            <a:endParaRPr lang="en-US" sz="1400" dirty="0"/>
           </a:p>
         </p:txBody>
       </p:sp>
@@ -7603,7 +7651,7 @@
         </p:nvSpPr>
         <p:spPr>
           <a:xfrm>
-            <a:off x="548640" y="6053328"/>
+            <a:off x="548640" y="5897880"/>
             <a:ext cx="11064240" cy="274320"/>
           </a:xfrm>
           <a:prstGeom prst="rect">
@@ -7625,7 +7673,7 @@
                   <a:schemeClr val="accent3"/>
                 </a:solidFill>
               </a:rPr>
-              <a:t>출처: results/*_latest.json (7구성 x 60건 x 3회 = 1,260회, 실행 오류 0), results/stats_holdout.json, eval/extra_metrics.py</a:t>
+              <a:t>출처 전체: docs/research/00_요약_실태현황.md (국외 18개 제품·국내 19건·논문 38건, 2026-10-22 확인, 업체 수치는 업체 주장)</a:t>
             </a:r>
             <a:endParaRPr lang="en-US" sz="1050" dirty="0"/>
           </a:p>
@@ -7684,9 +7732,9 @@
 </p:sld>
 </file>
 
-<file path=ppt/slides/slide5.xml><?xml version="1.0" encoding="utf-8"?>
+<file path=ppt/slides/slide4.xml><?xml version="1.0" encoding="utf-8"?>
 <p:sld xmlns:a="http://schemas.openxmlformats.org/drawingml/2006/main" xmlns:r="http://schemas.openxmlformats.org/officeDocument/2006/relationships" xmlns:p="http://schemas.openxmlformats.org/presentationml/2006/main">
-  <p:cSld name="Slide 5">
+  <p:cSld name="Slide 4">
     <p:spTree>
       <p:nvGrpSpPr>
         <p:cNvPr id="1" name=""/>
@@ -7733,7 +7781,7 @@
                   <a:schemeClr val="tx2"/>
                 </a:solidFill>
               </a:rPr>
-              <a:t>문제 1: base는 질문을 읽지 않고, 알림 키워드로 런북을 고른다</a:t>
+              <a:t>결론: 조치 정확도는 RAG가, 비용은 캐스케이드가 낮췄다</a:t>
             </a:r>
             <a:endParaRPr lang="en-US" sz="2800" dirty="0"/>
           </a:p>
@@ -7741,18 +7789,18 @@
       </p:sp>
       <p:sp>
         <p:nvSpPr>
-          <p:cNvPr id="3" name="flow-0"/>
+          <p:cNvPr id="3" name="stat-miss"/>
           <p:cNvSpPr/>
           <p:nvPr/>
         </p:nvSpPr>
         <p:spPr>
           <a:xfrm>
             <a:off x="548640" y="1371600"/>
-            <a:ext cx="2468880" cy="1737360"/>
+            <a:ext cx="3520440" cy="1828800"/>
           </a:xfrm>
           <a:prstGeom prst="roundRect">
             <a:avLst>
-              <a:gd name="adj" fmla="val 6316"/>
+              <a:gd name="adj" fmla="val 6000"/>
             </a:avLst>
           </a:prstGeom>
           <a:solidFill>
@@ -7774,6 +7822,609 @@
         </p:nvSpPr>
         <p:spPr>
           <a:xfrm>
+            <a:off x="822960" y="1572768"/>
+            <a:ext cx="2971800" cy="868680"/>
+          </a:xfrm>
+          <a:prstGeom prst="rect">
+            <a:avLst/>
+          </a:prstGeom>
+          <a:noFill/>
+          <a:ln/>
+        </p:spPr>
+        <p:txBody>
+          <a:bodyPr wrap="square" lIns="0" tIns="0" rIns="0" bIns="0" rtlCol="0" anchor="ctr"/>
+          <a:lstStyle/>
+          <a:p>
+            <a:pPr indent="0" marL="0">
+              <a:buNone/>
+            </a:pPr>
+            <a:r>
+              <a:rPr lang="en-US" sz="3600" b="1" dirty="0">
+                <a:solidFill>
+                  <a:schemeClr val="accent2"/>
+                </a:solidFill>
+              </a:rPr>
+              <a:t>56% → 9%</a:t>
+            </a:r>
+            <a:endParaRPr lang="en-US" sz="3600" dirty="0"/>
+          </a:p>
+        </p:txBody>
+      </p:sp>
+      <p:sp>
+        <p:nvSpPr>
+          <p:cNvPr id="5" name="Text 3"/>
+          <p:cNvSpPr txBox="1"/>
+          <p:nvPr/>
+        </p:nvSpPr>
+        <p:spPr>
+          <a:xfrm>
+            <a:off x="822960" y="2468880"/>
+            <a:ext cx="2971800" cy="640080"/>
+          </a:xfrm>
+          <a:prstGeom prst="rect">
+            <a:avLst/>
+          </a:prstGeom>
+          <a:noFill/>
+          <a:ln/>
+        </p:spPr>
+        <p:txBody>
+          <a:bodyPr wrap="square" lIns="0" tIns="0" rIns="0" bIns="0" rtlCol="0" anchor="t"/>
+          <a:lstStyle/>
+          <a:p>
+            <a:pPr indent="0" marL="0">
+              <a:buNone/>
+            </a:pPr>
+            <a:r>
+              <a:rPr lang="en-US" sz="1350" dirty="0">
+                <a:solidFill>
+                  <a:schemeClr val="tx1"/>
+                </a:solidFill>
+              </a:rPr>
+              <a:t>정답 런북 누락률 (base → final)</a:t>
+            </a:r>
+            <a:endParaRPr lang="en-US" sz="1350" dirty="0"/>
+          </a:p>
+          <a:p>
+            <a:pPr indent="0" marL="0">
+              <a:buNone/>
+            </a:pPr>
+            <a:r>
+              <a:rPr lang="en-US" sz="1350" dirty="0">
+                <a:solidFill>
+                  <a:schemeClr val="tx1"/>
+                </a:solidFill>
+              </a:rPr>
+              <a:t>= 맞는 조치를 권고하지 못할 위험</a:t>
+            </a:r>
+            <a:endParaRPr lang="en-US" sz="1350" dirty="0"/>
+          </a:p>
+        </p:txBody>
+      </p:sp>
+      <p:sp>
+        <p:nvSpPr>
+          <p:cNvPr id="6" name="stat-cost"/>
+          <p:cNvSpPr/>
+          <p:nvPr/>
+        </p:nvSpPr>
+        <p:spPr>
+          <a:xfrm>
+            <a:off x="4334256" y="1371600"/>
+            <a:ext cx="3520440" cy="1828800"/>
+          </a:xfrm>
+          <a:prstGeom prst="roundRect">
+            <a:avLst>
+              <a:gd name="adj" fmla="val 6000"/>
+            </a:avLst>
+          </a:prstGeom>
+          <a:solidFill>
+            <a:schemeClr val="bg2"/>
+          </a:solidFill>
+          <a:ln w="12700">
+            <a:solidFill>
+              <a:schemeClr val="bg2"/>
+            </a:solidFill>
+            <a:prstDash val="solid"/>
+          </a:ln>
+        </p:spPr>
+      </p:sp>
+      <p:sp>
+        <p:nvSpPr>
+          <p:cNvPr id="7" name="Text 5"/>
+          <p:cNvSpPr txBox="1"/>
+          <p:nvPr/>
+        </p:nvSpPr>
+        <p:spPr>
+          <a:xfrm>
+            <a:off x="4608576" y="1572768"/>
+            <a:ext cx="2971800" cy="868680"/>
+          </a:xfrm>
+          <a:prstGeom prst="rect">
+            <a:avLst/>
+          </a:prstGeom>
+          <a:noFill/>
+          <a:ln/>
+        </p:spPr>
+        <p:txBody>
+          <a:bodyPr wrap="square" lIns="0" tIns="0" rIns="0" bIns="0" rtlCol="0" anchor="ctr"/>
+          <a:lstStyle/>
+          <a:p>
+            <a:pPr indent="0" marL="0">
+              <a:buNone/>
+            </a:pPr>
+            <a:r>
+              <a:rPr lang="en-US" sz="3600" b="1" dirty="0">
+                <a:solidFill>
+                  <a:schemeClr val="accent6"/>
+                </a:solidFill>
+              </a:rPr>
+              <a:t>-84%</a:t>
+            </a:r>
+            <a:endParaRPr lang="en-US" sz="3600" dirty="0"/>
+          </a:p>
+        </p:txBody>
+      </p:sp>
+      <p:sp>
+        <p:nvSpPr>
+          <p:cNvPr id="8" name="Text 6"/>
+          <p:cNvSpPr txBox="1"/>
+          <p:nvPr/>
+        </p:nvSpPr>
+        <p:spPr>
+          <a:xfrm>
+            <a:off x="4608576" y="2468880"/>
+            <a:ext cx="2971800" cy="640080"/>
+          </a:xfrm>
+          <a:prstGeom prst="rect">
+            <a:avLst/>
+          </a:prstGeom>
+          <a:noFill/>
+          <a:ln/>
+        </p:spPr>
+        <p:txBody>
+          <a:bodyPr wrap="square" lIns="0" tIns="0" rIns="0" bIns="0" rtlCol="0" anchor="t"/>
+          <a:lstStyle/>
+          <a:p>
+            <a:pPr indent="0" marL="0">
+              <a:buNone/>
+            </a:pPr>
+            <a:r>
+              <a:rPr lang="en-US" sz="1350" dirty="0">
+                <a:solidFill>
+                  <a:schemeClr val="tx1"/>
+                </a:solidFill>
+              </a:rPr>
+              <a:t>장애 1건당 처리 비용 $0.00343 → $0.00057</a:t>
+            </a:r>
+            <a:endParaRPr lang="en-US" sz="1350" dirty="0"/>
+          </a:p>
+          <a:p>
+            <a:pPr indent="0" marL="0">
+              <a:buNone/>
+            </a:pPr>
+            <a:r>
+              <a:rPr lang="en-US" sz="1350" dirty="0">
+                <a:solidFill>
+                  <a:schemeClr val="tx1"/>
+                </a:solidFill>
+              </a:rPr>
+              <a:t>(캐스케이드만 켜면 -73%)</a:t>
+            </a:r>
+            <a:endParaRPr lang="en-US" sz="1350" dirty="0"/>
+          </a:p>
+        </p:txBody>
+      </p:sp>
+      <p:sp>
+        <p:nvSpPr>
+          <p:cNvPr id="9" name="stat-judge"/>
+          <p:cNvSpPr/>
+          <p:nvPr/>
+        </p:nvSpPr>
+        <p:spPr>
+          <a:xfrm>
+            <a:off x="8119872" y="1371600"/>
+            <a:ext cx="3520440" cy="1828800"/>
+          </a:xfrm>
+          <a:prstGeom prst="roundRect">
+            <a:avLst>
+              <a:gd name="adj" fmla="val 6000"/>
+            </a:avLst>
+          </a:prstGeom>
+          <a:solidFill>
+            <a:schemeClr val="bg2"/>
+          </a:solidFill>
+          <a:ln w="12700">
+            <a:solidFill>
+              <a:schemeClr val="bg2"/>
+            </a:solidFill>
+            <a:prstDash val="solid"/>
+          </a:ln>
+        </p:spPr>
+      </p:sp>
+      <p:sp>
+        <p:nvSpPr>
+          <p:cNvPr id="10" name="Text 8"/>
+          <p:cNvSpPr txBox="1"/>
+          <p:nvPr/>
+        </p:nvSpPr>
+        <p:spPr>
+          <a:xfrm>
+            <a:off x="8394192" y="1572768"/>
+            <a:ext cx="2971800" cy="868680"/>
+          </a:xfrm>
+          <a:prstGeom prst="rect">
+            <a:avLst/>
+          </a:prstGeom>
+          <a:noFill/>
+          <a:ln/>
+        </p:spPr>
+        <p:txBody>
+          <a:bodyPr wrap="square" lIns="0" tIns="0" rIns="0" bIns="0" rtlCol="0" anchor="ctr"/>
+          <a:lstStyle/>
+          <a:p>
+            <a:pPr indent="0" marL="0">
+              <a:buNone/>
+            </a:pPr>
+            <a:r>
+              <a:rPr lang="en-US" sz="3600" b="1" dirty="0">
+                <a:solidFill>
+                  <a:schemeClr val="accent1"/>
+                </a:solidFill>
+              </a:rPr>
+              <a:t>개선 미확인</a:t>
+            </a:r>
+            <a:endParaRPr lang="en-US" sz="3600" dirty="0"/>
+          </a:p>
+        </p:txBody>
+      </p:sp>
+      <p:sp>
+        <p:nvSpPr>
+          <p:cNvPr id="11" name="Text 9"/>
+          <p:cNvSpPr txBox="1"/>
+          <p:nvPr/>
+        </p:nvSpPr>
+        <p:spPr>
+          <a:xfrm>
+            <a:off x="8394192" y="2468880"/>
+            <a:ext cx="2971800" cy="640080"/>
+          </a:xfrm>
+          <a:prstGeom prst="rect">
+            <a:avLst/>
+          </a:prstGeom>
+          <a:noFill/>
+          <a:ln/>
+        </p:spPr>
+        <p:txBody>
+          <a:bodyPr wrap="square" lIns="0" tIns="0" rIns="0" bIns="0" rtlCol="0" anchor="t"/>
+          <a:lstStyle/>
+          <a:p>
+            <a:pPr indent="0" marL="0">
+              <a:buNone/>
+            </a:pPr>
+            <a:r>
+              <a:rPr lang="en-US" sz="1350" dirty="0">
+                <a:solidFill>
+                  <a:schemeClr val="tx1"/>
+                </a:solidFill>
+              </a:rPr>
+              <a:t>LLM Judge 단독: 품질 향상 확인 안 됨</a:t>
+            </a:r>
+            <a:endParaRPr lang="en-US" sz="1350" dirty="0"/>
+          </a:p>
+          <a:p>
+            <a:pPr indent="0" marL="0">
+              <a:buNone/>
+            </a:pPr>
+            <a:r>
+              <a:rPr lang="en-US" sz="1350" dirty="0">
+                <a:solidFill>
+                  <a:schemeClr val="tx1"/>
+                </a:solidFill>
+              </a:rPr>
+              <a:t>지연은 +2.3초 (유의)</a:t>
+            </a:r>
+            <a:endParaRPr lang="en-US" sz="1350" dirty="0"/>
+          </a:p>
+        </p:txBody>
+      </p:sp>
+      <p:sp>
+        <p:nvSpPr>
+          <p:cNvPr id="12" name="method"/>
+          <p:cNvSpPr/>
+          <p:nvPr/>
+        </p:nvSpPr>
+        <p:spPr>
+          <a:xfrm>
+            <a:off x="548640" y="3520440"/>
+            <a:ext cx="11064240" cy="1783080"/>
+          </a:xfrm>
+          <a:prstGeom prst="roundRect">
+            <a:avLst>
+              <a:gd name="adj" fmla="val 6154"/>
+            </a:avLst>
+          </a:prstGeom>
+          <a:solidFill>
+            <a:schemeClr val="bg2"/>
+          </a:solidFill>
+          <a:ln w="12700">
+            <a:solidFill>
+              <a:schemeClr val="bg2"/>
+            </a:solidFill>
+            <a:prstDash val="solid"/>
+          </a:ln>
+        </p:spPr>
+      </p:sp>
+      <p:sp>
+        <p:nvSpPr>
+          <p:cNvPr id="13" name="Text 11"/>
+          <p:cNvSpPr txBox="1"/>
+          <p:nvPr/>
+        </p:nvSpPr>
+        <p:spPr>
+          <a:xfrm>
+            <a:off x="822960" y="3657600"/>
+            <a:ext cx="10515600" cy="1600200"/>
+          </a:xfrm>
+          <a:prstGeom prst="rect">
+            <a:avLst/>
+          </a:prstGeom>
+          <a:noFill/>
+          <a:ln/>
+        </p:spPr>
+        <p:txBody>
+          <a:bodyPr wrap="square" lIns="0" tIns="0" rIns="0" bIns="0" rtlCol="0" anchor="t"/>
+          <a:lstStyle/>
+          <a:p>
+            <a:pPr indent="0" marL="0">
+              <a:spcAft>
+                <a:spcPts val="500"/>
+              </a:spcAft>
+              <a:buNone/>
+            </a:pPr>
+            <a:r>
+              <a:rPr lang="en-US" sz="1600" b="1" dirty="0">
+                <a:solidFill>
+                  <a:srgbClr val="16202C"/>
+                </a:solidFill>
+              </a:rPr>
+              <a:t>어떻게 증명했나</a:t>
+            </a:r>
+            <a:endParaRPr lang="en-US" sz="1450" dirty="0"/>
+          </a:p>
+          <a:p>
+            <a:pPr marL="342900" indent="-342900">
+              <a:spcAft>
+                <a:spcPts val="500"/>
+              </a:spcAft>
+              <a:buSzPct val="100000"/>
+              <a:buChar char="•"/>
+            </a:pPr>
+            <a:r>
+              <a:rPr lang="en-US" sz="1450" dirty="0">
+                <a:solidFill>
+                  <a:schemeClr val="tx1"/>
+                </a:solidFill>
+              </a:rPr>
+              <a:t>평가셋 60건을 dev 24건(기준값 조정용)과 holdout 36건(조정 전에 고정, 최종 보고용)으로 나눴다. 이 덱의 수치는 모두 holdout.</a:t>
+            </a:r>
+            <a:endParaRPr lang="en-US" sz="1450" dirty="0"/>
+          </a:p>
+          <a:p>
+            <a:pPr marL="342900" indent="-342900">
+              <a:spcAft>
+                <a:spcPts val="500"/>
+              </a:spcAft>
+              <a:buSzPct val="100000"/>
+              <a:buChar char="•"/>
+            </a:pPr>
+            <a:r>
+              <a:rPr lang="en-US" sz="1450" dirty="0">
+                <a:solidFill>
+                  <a:schemeClr val="tx1"/>
+                </a:solidFill>
+              </a:rPr>
+              <a:t>개선을 하나씩 켠 7구성을 각 3회 반복하고, 구성 간 차이는 같은 질의끼리 짝지은 bootstrap 95% 신뢰구간으로 판정했다.</a:t>
+            </a:r>
+            <a:endParaRPr lang="en-US" sz="1450" dirty="0"/>
+          </a:p>
+          <a:p>
+            <a:pPr marL="342900" indent="-342900">
+              <a:spcAft>
+                <a:spcPts val="500"/>
+              </a:spcAft>
+              <a:buSzPct val="100000"/>
+              <a:buChar char="•"/>
+            </a:pPr>
+            <a:r>
+              <a:rPr lang="en-US" sz="1450" dirty="0">
+                <a:solidFill>
+                  <a:schemeClr val="tx1"/>
+                </a:solidFill>
+              </a:rPr>
+              <a:t>평가자(LLM Judge)가 관대할 수 있어, Judge와 무관한 결정적 지표(정답 런북 누락·혼입, 런북 어구 포함)로 결론을 냈다.</a:t>
+            </a:r>
+            <a:endParaRPr lang="en-US" sz="1450" dirty="0"/>
+          </a:p>
+        </p:txBody>
+      </p:sp>
+      <p:sp>
+        <p:nvSpPr>
+          <p:cNvPr id="14" name="Text 12"/>
+          <p:cNvSpPr txBox="1"/>
+          <p:nvPr/>
+        </p:nvSpPr>
+        <p:spPr>
+          <a:xfrm>
+            <a:off x="548640" y="6053328"/>
+            <a:ext cx="11064240" cy="274320"/>
+          </a:xfrm>
+          <a:prstGeom prst="rect">
+            <a:avLst/>
+          </a:prstGeom>
+          <a:noFill/>
+          <a:ln/>
+        </p:spPr>
+        <p:txBody>
+          <a:bodyPr wrap="square" lIns="0" tIns="0" rIns="0" bIns="0" rtlCol="0" anchor="ctr"/>
+          <a:lstStyle/>
+          <a:p>
+            <a:pPr indent="0" marL="0">
+              <a:buNone/>
+            </a:pPr>
+            <a:r>
+              <a:rPr lang="en-US" sz="1050" dirty="0">
+                <a:solidFill>
+                  <a:schemeClr val="accent3"/>
+                </a:solidFill>
+              </a:rPr>
+              <a:t>출처: results/*_latest.json (7구성 x 60건 x 3회 = 1,260회, 실행 오류 0), results/stats_holdout.json, eval/extra_metrics.py</a:t>
+            </a:r>
+            <a:endParaRPr lang="en-US" sz="1050" dirty="0"/>
+          </a:p>
+        </p:txBody>
+      </p:sp>
+      <p:sp>
+        <p:nvSpPr>
+          <p:cNvPr id="25" name="Slide Number Placeholder 0"/>
+          <p:cNvSpPr>
+            <a:spLocks noGrp="1"/>
+          </p:cNvSpPr>
+          <p:nvPr>
+            <p:ph type="sldNum" sz="quarter" idx="4294967295"/>
+          </p:nvPr>
+        </p:nvSpPr>
+        <p:spPr>
+          <a:xfrm>
+            <a:off x="11155680" y="6400800"/>
+            <a:ext cx="457200" cy="274320"/>
+          </a:xfrm>
+          <a:prstGeom prst="rect">
+            <a:avLst/>
+          </a:prstGeom>
+          <a:extLst>
+            <a:ext uri="{C572A759-6A51-4108-AA02-DFA0A04FC94B}">
+              <ma14:wrappingTextBoxFlag xmlns:ma14="http://schemas.microsoft.com/office/mac/drawingml/2011/main" val="0"/>
+            </a:ext>
+          </a:extLst>
+        </p:spPr>
+        <p:txBody>
+          <a:bodyPr/>
+          <a:lstStyle>
+            <a:lvl1pPr>
+              <a:defRPr sz="1000">
+                <a:solidFill>
+                  <a:schemeClr val="accent3"/>
+                </a:solidFill>
+              </a:defRPr>
+            </a:lvl1pPr>
+          </a:lstStyle>
+          <a:p>
+            <a:pPr algn="r"/>
+            <a:fld id="{F7021451-1387-4CA6-816F-3879F97B5CBC}" type="slidenum">
+              <a:rPr b="0" lang="en-US"/>
+              <a:t>4</a:t>
+            </a:fld>
+            <a:endParaRPr lang="en-US"/>
+          </a:p>
+        </p:txBody>
+      </p:sp>
+    </p:spTree>
+  </p:cSld>
+  <p:clrMapOvr>
+    <a:masterClrMapping/>
+  </p:clrMapOvr>
+</p:sld>
+</file>
+
+<file path=ppt/slides/slide6.xml><?xml version="1.0" encoding="utf-8"?>
+<p:sld xmlns:a="http://schemas.openxmlformats.org/drawingml/2006/main" xmlns:r="http://schemas.openxmlformats.org/officeDocument/2006/relationships" xmlns:p="http://schemas.openxmlformats.org/presentationml/2006/main">
+  <p:cSld name="Slide 6">
+    <p:spTree>
+      <p:nvGrpSpPr>
+        <p:cNvPr id="1" name=""/>
+        <p:cNvGrpSpPr/>
+        <p:nvPr/>
+      </p:nvGrpSpPr>
+      <p:grpSpPr>
+        <a:xfrm>
+          <a:off x="0" y="0"/>
+          <a:ext cx="0" cy="0"/>
+          <a:chOff x="0" y="0"/>
+          <a:chExt cx="0" cy="0"/>
+        </a:xfrm>
+      </p:grpSpPr>
+      <p:sp>
+        <p:nvSpPr>
+          <p:cNvPr id="2" name="Text 0"/>
+          <p:cNvSpPr/>
+          <p:nvPr>
+            <p:ph idx="100" type="title" hasCustomPrompt="1"/>
+          </p:nvPr>
+        </p:nvSpPr>
+        <p:spPr>
+          <a:xfrm>
+            <a:off x="548640" y="320040"/>
+            <a:ext cx="11064240" cy="777240"/>
+          </a:xfrm>
+          <a:prstGeom prst="rect">
+            <a:avLst/>
+          </a:prstGeom>
+          <a:noFill/>
+          <a:ln/>
+        </p:spPr>
+        <p:txBody>
+          <a:bodyPr wrap="square" lIns="0" tIns="0" rIns="0" bIns="0" rtlCol="0" anchor="ctr"/>
+          <a:lstStyle/>
+          <a:p>
+            <a:pPr algn="l" indent="0" marL="0">
+              <a:buNone/>
+            </a:pPr>
+            <a:r>
+              <a:rPr lang="en-US" sz="2800" b="1" dirty="0">
+                <a:solidFill>
+                  <a:schemeClr val="tx2"/>
+                </a:solidFill>
+              </a:rPr>
+              <a:t>문제 1: base는 질문을 읽지 않고, 알림 키워드로 런북을 고른다</a:t>
+            </a:r>
+            <a:endParaRPr lang="en-US" sz="2800" dirty="0"/>
+          </a:p>
+        </p:txBody>
+      </p:sp>
+      <p:sp>
+        <p:nvSpPr>
+          <p:cNvPr id="3" name="flow-0"/>
+          <p:cNvSpPr/>
+          <p:nvPr/>
+        </p:nvSpPr>
+        <p:spPr>
+          <a:xfrm>
+            <a:off x="548640" y="1371600"/>
+            <a:ext cx="2468880" cy="1737360"/>
+          </a:xfrm>
+          <a:prstGeom prst="roundRect">
+            <a:avLst>
+              <a:gd name="adj" fmla="val 6316"/>
+            </a:avLst>
+          </a:prstGeom>
+          <a:solidFill>
+            <a:schemeClr val="bg2"/>
+          </a:solidFill>
+          <a:ln w="12700">
+            <a:solidFill>
+              <a:schemeClr val="bg2"/>
+            </a:solidFill>
+            <a:prstDash val="solid"/>
+          </a:ln>
+        </p:spPr>
+      </p:sp>
+      <p:sp>
+        <p:nvSpPr>
+          <p:cNvPr id="4" name="Text 2"/>
+          <p:cNvSpPr txBox="1"/>
+          <p:nvPr/>
+        </p:nvSpPr>
+        <p:spPr>
+          <a:xfrm>
             <a:off x="731520" y="1508760"/>
             <a:ext cx="2103120" cy="365760"/>
           </a:xfrm>
@@ -8642,7 +9293,7 @@
             <a:pPr algn="r"/>
             <a:fld id="{F7021451-1387-4CA6-816F-3879F97B5CBC}" type="slidenum">
               <a:rPr b="0" lang="en-US"/>
-              <a:t>5</a:t>
+              <a:t>6</a:t>
             </a:fld>
             <a:endParaRPr lang="en-US"/>
           </a:p>

--- a/deck/incident-agent-ablation_5min.pptx
+++ b/deck/incident-agent-ablation_5min.pptx
@@ -114,48 +114,48 @@
   <p:extLst>
     <p:ext uri="{521415D9-36F7-43E2-AB2F-B90AF26B5E84}">
       <p14:sectionLst xmlns:p14="http://schemas.microsoft.com/office/powerpoint/2010/main">
-        <p14:section name="표지" id="{4365c6a4-0189-2cbc-0db5-5a8a4c37d0fe}">
+        <p14:section name="표지" id="{cb703ed0-e368-367a-ed5d-5da66a6751f1}">
           <p14:sldIdLst>
             <p14:sldId id="256"/>
           </p14:sldIdLst>
         </p14:section>
-        <p14:section name="요약" id="{9273d741-01f2-ad45-d1a8-2cfdbbdce48c}">
+        <p14:section name="요약" id="{5d3a84db-093f-033c-bb10-0d332a27469a}">
           <p14:sldIdLst>
             <p14:sldId id="257"/>
             <p14:sldId id="258"/>
             <p14:sldId id="259"/>
           </p14:sldIdLst>
         </p14:section>
-        <p14:section name="문제" id="{0d8e5597-441f-35fa-c6c1-2101b09cd101}">
+        <p14:section name="문제" id="{14da6d29-f2f1-0419-fbb9-764071b85fcd}">
           <p14:sldIdLst>
             <p14:sldId id="261"/>
           </p14:sldIdLst>
         </p14:section>
-        <p14:section name="개선" id="{b50b0e4a-091a-8b9e-9b97-d0e77bbfa91a}">
+        <p14:section name="개선" id="{7dd2ddb3-3f72-5f48-ad17-4113f163d6af}">
           <p14:sldIdLst/>
         </p14:section>
-        <p14:section name="평가 설계" id="{dc22f297-5d4f-6d23-3e36-0c32b6c93826}">
+        <p14:section name="평가 설계" id="{1f9e9f43-4ead-79ed-8ede-f3ea5b628198}">
           <p14:sldIdLst/>
         </p14:section>
-        <p14:section name="Before/After" id="{5f10685a-74c4-aa14-0161-966c1feb7600}">
+        <p14:section name="Before/After" id="{3205e74a-3a34-d5b6-d100-d3074eb4174c}">
           <p14:sldIdLst>
             <p14:sldId id="266"/>
           </p14:sldIdLst>
         </p14:section>
-        <p14:section name="평가자 검증" id="{d806e0a7-125b-3176-9369-ba0e8610dd91}">
+        <p14:section name="평가자 검증" id="{3f0189bb-5fe6-165d-6f3c-4b9b79d1c2df}">
           <p14:sldIdLst/>
         </p14:section>
-        <p14:section name="시연" id="{470a2e4f-8e7d-b8b3-27a1-59a42247a407}">
+        <p14:section name="시연" id="{82fa8e94-933d-2eb2-638a-703a4b60cabc}">
           <p14:sldIdLst>
             <p14:sldId id="271"/>
           </p14:sldIdLst>
         </p14:section>
-        <p14:section name="한계" id="{748247f8-8d7d-c9ef-7b0b-16fea090203e}">
+        <p14:section name="한계" id="{a2bba64d-d1b5-87ed-4fcb-fab3dab16ef8}">
           <p14:sldIdLst>
             <p14:sldId id="272"/>
           </p14:sldIdLst>
         </p14:section>
-        <p14:section name="마무리" id="{12b3e427-ea92-94a3-8c6d-6b425ae1c045}">
+        <p14:section name="마무리" id="{2199741f-2f5e-d308-499d-fca8e514ef46}">
           <p14:sldIdLst/>
         </p14:section>
       </p14:sectionLst>
@@ -5762,7 +5762,7 @@
                             <a:srgbClr val="1A2230"/>
                           </a:solidFill>
                         </a:rPr>
-                        <a:t>+2.3초 ★</a:t>
+                        <a:t>+2.7초 ★</a:t>
                       </a:r>
                       <a:endParaRPr lang="en-US" sz="1250" dirty="0"/>
                     </a:p>
@@ -6585,12 +6585,12 @@
                         <a:buNone/>
                       </a:pPr>
                       <a:r>
-                        <a:rPr lang="en-US" sz="1250" b="1" dirty="0">
+                        <a:rPr lang="en-US" sz="1250" dirty="0">
                           <a:solidFill>
                             <a:srgbClr val="1A2230"/>
                           </a:solidFill>
                         </a:rPr>
-                        <a:t>-0.7초 ★</a:t>
+                        <a:t>+0.1초</a:t>
                       </a:r>
                       <a:endParaRPr lang="en-US" sz="1250" dirty="0"/>
                     </a:p>
@@ -6632,9 +6632,6 @@
                       <a:headEnd type="none" w="med" len="med"/>
                       <a:tailEnd type="none" w="med" len="med"/>
                     </a:lnB>
-                    <a:solidFill>
-                      <a:srgbClr val="D7EFE6"/>
-                    </a:solidFill>
                   </a:tcPr>
                 </a:tc>
               </a:tr>
@@ -7004,7 +7001,7 @@
                             <a:srgbClr val="1A2230"/>
                           </a:solidFill>
                         </a:rPr>
-                        <a:t>+0.1초</a:t>
+                        <a:t>+0.0초</a:t>
                       </a:r>
                       <a:endParaRPr lang="en-US" sz="1250" dirty="0"/>
                     </a:p>
@@ -7415,7 +7412,7 @@
                             <a:srgbClr val="1A2230"/>
                           </a:solidFill>
                         </a:rPr>
-                        <a:t>-0.9초 ★</a:t>
+                        <a:t>+0.3초 ★</a:t>
                       </a:r>
                       <a:endParaRPr lang="en-US" sz="1250" dirty="0"/>
                     </a:p>
@@ -7458,7 +7455,7 @@
                       <a:tailEnd type="none" w="med" len="med"/>
                     </a:lnB>
                     <a:solidFill>
-                      <a:srgbClr val="D7EFE6"/>
+                      <a:srgbClr val="FBE3D3"/>
                     </a:solidFill>
                   </a:tcPr>
                 </a:tc>
@@ -7841,7 +7838,7 @@
                             <a:srgbClr val="1A2230"/>
                           </a:solidFill>
                         </a:rPr>
-                        <a:t>+1.4초 ★</a:t>
+                        <a:t>+2.5초 ★</a:t>
                       </a:r>
                       <a:endParaRPr lang="en-US" sz="1250" dirty="0"/>
                     </a:p>
@@ -7923,7 +7920,7 @@
                   <a:schemeClr val="tx1"/>
                 </a:solidFill>
               </a:rPr>
-              <a:t>★ = 95% 신뢰구간이 0을 포함하지 않음 (holdout 36건, 질의 단위 paired bootstrap 2,000회). 초록 = 좋아짐, 주황 = 나빠짐. 표시 없는 칸은 차이가 있다고 말할 수 없음. 캐스케이드·v2 위 비용·전체 행의 지연은 재측정 부하(2프로세스 vs 7프로세스) 차이가 섞였을 수 있음.</a:t>
+              <a:t>★ = 95% 신뢰구간이 0을 포함하지 않음 (holdout 36건, 질의 단위 paired bootstrap 2,000회). 초록 = 좋아짐, 주황 = 나빠짐. 표시 없는 칸은 차이가 있다고 말할 수 없음. 지연은 7구성을 같은 부하로 다시 잰 값(평가 Judge 생략, scripts/run_latency_ctrl.sh).</a:t>
             </a:r>
             <a:endParaRPr lang="en-US" sz="1150" dirty="0"/>
           </a:p>
@@ -8958,7 +8955,7 @@
                             <a:srgbClr val="1A2230"/>
                           </a:solidFill>
                         </a:rPr>
-                        <a:t>8.3초</a:t>
+                        <a:t>8.6초</a:t>
                       </a:r>
                       <a:endParaRPr lang="en-US" sz="1300" dirty="0"/>
                     </a:p>
@@ -9424,7 +9421,7 @@
                             <a:srgbClr val="1A2230"/>
                           </a:solidFill>
                         </a:rPr>
-                        <a:t>8.9초</a:t>
+                        <a:t>9.2초</a:t>
                       </a:r>
                       <a:endParaRPr lang="en-US" sz="1300" dirty="0"/>
                     </a:p>
@@ -9890,7 +9887,7 @@
                             <a:srgbClr val="1A2230"/>
                           </a:solidFill>
                         </a:rPr>
-                        <a:t>17.1초</a:t>
+                        <a:t>16.1초</a:t>
                       </a:r>
                       <a:endParaRPr lang="en-US" sz="1300" dirty="0"/>
                     </a:p>
@@ -10356,7 +10353,7 @@
                             <a:srgbClr val="1A2230"/>
                           </a:solidFill>
                         </a:rPr>
-                        <a:t>12.0초</a:t>
+                        <a:t>12.3초</a:t>
                       </a:r>
                       <a:endParaRPr lang="en-US" sz="1300" dirty="0"/>
                     </a:p>
@@ -10822,7 +10819,7 @@
                             <a:srgbClr val="1A2230"/>
                           </a:solidFill>
                         </a:rPr>
-                        <a:t>10.6초</a:t>
+                        <a:t>12.2초</a:t>
                       </a:r>
                       <a:endParaRPr lang="en-US" sz="1300" dirty="0"/>
                     </a:p>
@@ -11288,7 +11285,7 @@
                             <a:srgbClr val="1A2230"/>
                           </a:solidFill>
                         </a:rPr>
-                        <a:t>11.8초</a:t>
+                        <a:t>12.1초</a:t>
                       </a:r>
                       <a:endParaRPr lang="en-US" sz="1300" dirty="0"/>
                     </a:p>
@@ -11754,7 +11751,7 @@
                             <a:srgbClr val="1A2230"/>
                           </a:solidFill>
                         </a:rPr>
-                        <a:t>9.8초</a:t>
+                        <a:t>12.1초</a:t>
                       </a:r>
                       <a:endParaRPr lang="en-US" sz="1300" dirty="0"/>
                     </a:p>
@@ -11966,7 +11963,7 @@
                   <a:schemeClr val="accent3"/>
                 </a:solidFill>
               </a:rPr>
-              <a:t>holdout 36건, 3회 평균. 비용은 OpenAI 공개 단가 x 실측 토큰 추정치 (평가 Judge 제외). 지연: 5구성은 7프로세스 동시 부하, +비용·final은 캐시 버그 수정 뒤 2프로세스로 재측정 → 두 구성의 지연 차이엔 부하 차이가 섞였을 수 있음</a:t>
+              <a:t>holdout 36건, 3회 평균. 비용은 OpenAI 공개 단가 x 실측 토큰 추정치 (평가 Judge 제외). p95 지연은 7구성을 같은 부하(동시 7프로세스 x 2)로 다시 잰 값</a:t>
             </a:r>
             <a:endParaRPr lang="en-US" sz="1050" dirty="0"/>
           </a:p>
@@ -17292,7 +17289,7 @@
                   <a:schemeClr val="tx1"/>
                 </a:solidFill>
               </a:rPr>
-              <a:t>지연은 +2.3초 (유의)</a:t>
+              <a:t>지연은 +2.7초 (유의)</a:t>
             </a:r>
             <a:endParaRPr lang="en-US" sz="1350" dirty="0"/>
           </a:p>

--- a/deck/incident-agent-ablation_5min.pptx
+++ b/deck/incident-agent-ablation_5min.pptx
@@ -114,48 +114,48 @@
   <p:extLst>
     <p:ext uri="{521415D9-36F7-43E2-AB2F-B90AF26B5E84}">
       <p14:sectionLst xmlns:p14="http://schemas.microsoft.com/office/powerpoint/2010/main">
-        <p14:section name="표지" id="{cb703ed0-e368-367a-ed5d-5da66a6751f1}">
+        <p14:section name="표지" id="{083c3193-b15f-0789-91e3-f6a56e2358d0}">
           <p14:sldIdLst>
             <p14:sldId id="256"/>
           </p14:sldIdLst>
         </p14:section>
-        <p14:section name="요약" id="{5d3a84db-093f-033c-bb10-0d332a27469a}">
+        <p14:section name="요약" id="{4e3c16ff-c70d-7306-71f7-16575315ebe7}">
           <p14:sldIdLst>
             <p14:sldId id="257"/>
             <p14:sldId id="258"/>
             <p14:sldId id="259"/>
           </p14:sldIdLst>
         </p14:section>
-        <p14:section name="문제" id="{14da6d29-f2f1-0419-fbb9-764071b85fcd}">
+        <p14:section name="문제" id="{c98d9fce-80c0-44f6-0913-71960e332e40}">
           <p14:sldIdLst>
             <p14:sldId id="261"/>
           </p14:sldIdLst>
         </p14:section>
-        <p14:section name="개선" id="{7dd2ddb3-3f72-5f48-ad17-4113f163d6af}">
+        <p14:section name="개선" id="{bed266ee-f70c-848d-c7a4-09b0bb6f579d}">
           <p14:sldIdLst/>
         </p14:section>
-        <p14:section name="평가 설계" id="{1f9e9f43-4ead-79ed-8ede-f3ea5b628198}">
+        <p14:section name="평가 설계" id="{bcf31b6d-8d98-07f9-8ed8-09ba76e5e396}">
           <p14:sldIdLst/>
         </p14:section>
-        <p14:section name="Before/After" id="{3205e74a-3a34-d5b6-d100-d3074eb4174c}">
+        <p14:section name="Before/After" id="{d32f0add-03b5-9f5a-82c6-385f817c7c60}">
           <p14:sldIdLst>
             <p14:sldId id="266"/>
           </p14:sldIdLst>
         </p14:section>
-        <p14:section name="평가자 검증" id="{3f0189bb-5fe6-165d-6f3c-4b9b79d1c2df}">
+        <p14:section name="평가자 검증" id="{e348aebc-dae6-cce2-eac3-48d67d1bab57}">
           <p14:sldIdLst/>
         </p14:section>
-        <p14:section name="시연" id="{82fa8e94-933d-2eb2-638a-703a4b60cabc}">
+        <p14:section name="시연" id="{edcba01b-149f-1639-d1f0-fb283230ffd9}">
           <p14:sldIdLst>
             <p14:sldId id="271"/>
           </p14:sldIdLst>
         </p14:section>
-        <p14:section name="한계" id="{a2bba64d-d1b5-87ed-4fcb-fab3dab16ef8}">
+        <p14:section name="한계" id="{f88d8eb1-ccd7-109f-7a03-9d523704a1ee}">
           <p14:sldIdLst>
             <p14:sldId id="272"/>
           </p14:sldIdLst>
         </p14:section>
-        <p14:section name="마무리" id="{2199741f-2f5e-d308-499d-fca8e514ef46}">
+        <p14:section name="마무리" id="{d267c7f3-b72c-0230-3d6d-dfb32153b43b}">
           <p14:sldIdLst/>
         </p14:section>
       </p14:sectionLst>
@@ -4507,7 +4507,21 @@
                   <a:schemeClr val="tx2"/>
                 </a:solidFill>
               </a:rPr>
-              <a:t>Before/After 2: 개선별 기여도 — 같은 질의끼리 짝지어 비교했다</a:t>
+              <a:t>Before/After 2: 개선별 기여도</a:t>
+            </a:r>
+            <a:endParaRPr lang="en-US" sz="2800" dirty="0"/>
+          </a:p>
+          <a:p>
+            <a:pPr algn="l" indent="0" marL="0">
+              <a:buNone/>
+            </a:pPr>
+            <a:r>
+              <a:rPr lang="en-US" sz="2800" b="1" dirty="0">
+                <a:solidFill>
+                  <a:schemeClr val="tx2"/>
+                </a:solidFill>
+              </a:rPr>
+              <a:t>같은 질의끼리 짝지어 비교했다</a:t>
             </a:r>
             <a:endParaRPr lang="en-US" sz="2800" dirty="0"/>
           </a:p>
@@ -8064,7 +8078,21 @@
                   <a:schemeClr val="tx2"/>
                 </a:solidFill>
               </a:rPr>
-              <a:t>Before/After 3: 품질을 얻은 대가 — 트레이드오프 한 장</a:t>
+              <a:t>Before/After 3: 품질을 얻은 대가</a:t>
+            </a:r>
+            <a:endParaRPr lang="en-US" sz="2800" dirty="0"/>
+          </a:p>
+          <a:p>
+            <a:pPr algn="l" indent="0" marL="0">
+              <a:buNone/>
+            </a:pPr>
+            <a:r>
+              <a:rPr lang="en-US" sz="2800" b="1" dirty="0">
+                <a:solidFill>
+                  <a:schemeClr val="tx2"/>
+                </a:solidFill>
+              </a:rPr>
+              <a:t>트레이드오프 한 장</a:t>
             </a:r>
             <a:endParaRPr lang="en-US" sz="2800" dirty="0"/>
           </a:p>
